--- a/presentation.pptx
+++ b/presentation.pptx
@@ -5,7 +5,7 @@
     <p:sldMasterId id="2147483762" r:id="rId1"/>
   </p:sldMasterIdLst>
   <p:notesMasterIdLst>
-    <p:notesMasterId r:id="rId15"/>
+    <p:notesMasterId r:id="rId16"/>
   </p:notesMasterIdLst>
   <p:sldIdLst>
     <p:sldId id="256" r:id="rId2"/>
@@ -13,14 +13,15 @@
     <p:sldId id="258" r:id="rId4"/>
     <p:sldId id="259" r:id="rId5"/>
     <p:sldId id="260" r:id="rId6"/>
-    <p:sldId id="261" r:id="rId7"/>
-    <p:sldId id="269" r:id="rId8"/>
-    <p:sldId id="262" r:id="rId9"/>
-    <p:sldId id="263" r:id="rId10"/>
-    <p:sldId id="264" r:id="rId11"/>
-    <p:sldId id="265" r:id="rId12"/>
-    <p:sldId id="266" r:id="rId13"/>
-    <p:sldId id="268" r:id="rId14"/>
+    <p:sldId id="270" r:id="rId7"/>
+    <p:sldId id="261" r:id="rId8"/>
+    <p:sldId id="269" r:id="rId9"/>
+    <p:sldId id="262" r:id="rId10"/>
+    <p:sldId id="263" r:id="rId11"/>
+    <p:sldId id="264" r:id="rId12"/>
+    <p:sldId id="265" r:id="rId13"/>
+    <p:sldId id="266" r:id="rId14"/>
+    <p:sldId id="268" r:id="rId15"/>
   </p:sldIdLst>
   <p:sldSz cx="12188825" cy="6858000"/>
   <p:notesSz cx="6858000" cy="9144000"/>
@@ -4283,7 +4284,7 @@
           <a:lstStyle/>
           <a:p>
             <a:r>
-              <a:t>Accessory detection (rigging)</a:t>
+              <a:t>Accuracy: training vs real world</a:t>
             </a:r>
           </a:p>
         </p:txBody>
@@ -4321,7 +4322,29 @@
                   <a:schemeClr val="tx1"/>
                 </a:solidFill>
               </a:rPr>
-              <a:t>Goal: ONLY the chosen accessory enables wins; other coloured items must not trigger it</a:t>
+              <a:t>Training run summary (printed at end of 03_train.py):</a:t>
+            </a:r>
+          </a:p>
+          <a:p>
+            <a:pPr lvl="1">
+              <a:lnSpc>
+                <a:spcPct val="90000"/>
+              </a:lnSpc>
+            </a:pPr>
+            <a:r>
+              <a:rPr lang="en-GB" dirty="0"/>
+              <a:t>Train Loss: 0.5232 | Train Accuracy: 0.7783 </a:t>
+            </a:r>
+          </a:p>
+          <a:p>
+            <a:pPr lvl="1">
+              <a:lnSpc>
+                <a:spcPct val="90000"/>
+              </a:lnSpc>
+            </a:pPr>
+            <a:r>
+              <a:rPr lang="en-GB" dirty="0"/>
+              <a:t>Val Loss: 0.7143 | Val Accuracy: 0.7535 </a:t>
             </a:r>
           </a:p>
           <a:p>
@@ -4336,129 +4359,7 @@
                   <a:schemeClr val="tx1"/>
                 </a:solidFill>
               </a:rPr>
-              <a:t>Approach: HSV mask + per-startup baseline (no second neural network needed)</a:t>
-            </a:r>
-          </a:p>
-          <a:p>
-            <a:pPr lvl="1">
-              <a:lnSpc>
-                <a:spcPct val="90000"/>
-              </a:lnSpc>
-            </a:pPr>
-            <a:r>
-              <a:rPr lang="en-GB" dirty="0">
-                <a:solidFill>
-                  <a:schemeClr val="tx1"/>
-                </a:solidFill>
-              </a:rPr>
-              <a:t>cv::</a:t>
-            </a:r>
-            <a:r>
-              <a:rPr lang="en-GB" dirty="0" err="1">
-                <a:solidFill>
-                  <a:schemeClr val="tx1"/>
-                </a:solidFill>
-              </a:rPr>
-              <a:t>cvtColor</a:t>
-            </a:r>
-            <a:r>
-              <a:rPr lang="en-GB" dirty="0">
-                <a:solidFill>
-                  <a:schemeClr val="tx1"/>
-                </a:solidFill>
-              </a:rPr>
-              <a:t>(RGB-&gt;HSV) -&gt; cv::</a:t>
-            </a:r>
-            <a:r>
-              <a:rPr lang="en-GB" dirty="0" err="1">
-                <a:solidFill>
-                  <a:schemeClr val="tx1"/>
-                </a:solidFill>
-              </a:rPr>
-              <a:t>inRange</a:t>
-            </a:r>
-            <a:r>
-              <a:rPr lang="en-GB" dirty="0">
-                <a:solidFill>
-                  <a:schemeClr val="tx1"/>
-                </a:solidFill>
-              </a:rPr>
-              <a:t>(hue/sat/</a:t>
-            </a:r>
-            <a:r>
-              <a:rPr lang="en-GB" dirty="0" err="1">
-                <a:solidFill>
-                  <a:schemeClr val="tx1"/>
-                </a:solidFill>
-              </a:rPr>
-              <a:t>val</a:t>
-            </a:r>
-            <a:r>
-              <a:rPr lang="en-GB" dirty="0">
-                <a:solidFill>
-                  <a:schemeClr val="tx1"/>
-                </a:solidFill>
-              </a:rPr>
-              <a:t> bounds) -&gt; cv::</a:t>
-            </a:r>
-            <a:r>
-              <a:rPr lang="en-GB" dirty="0" err="1">
-                <a:solidFill>
-                  <a:schemeClr val="tx1"/>
-                </a:solidFill>
-              </a:rPr>
-              <a:t>countNonZero</a:t>
-            </a:r>
-            <a:endParaRPr lang="en-GB" dirty="0">
-              <a:solidFill>
-                <a:schemeClr val="tx1"/>
-              </a:solidFill>
-            </a:endParaRPr>
-          </a:p>
-          <a:p>
-            <a:pPr lvl="1">
-              <a:lnSpc>
-                <a:spcPct val="90000"/>
-              </a:lnSpc>
-            </a:pPr>
-            <a:r>
-              <a:rPr lang="en-GB" dirty="0">
-                <a:solidFill>
-                  <a:schemeClr val="tx1"/>
-                </a:solidFill>
-              </a:rPr>
-              <a:t>Calibrate baseline by averaging 60 empty-scene frames at startup</a:t>
-            </a:r>
-          </a:p>
-          <a:p>
-            <a:pPr lvl="1">
-              <a:lnSpc>
-                <a:spcPct val="90000"/>
-              </a:lnSpc>
-            </a:pPr>
-            <a:r>
-              <a:rPr lang="en-GB" dirty="0">
-                <a:solidFill>
-                  <a:schemeClr val="tx1"/>
-                </a:solidFill>
-              </a:rPr>
-              <a:t>'Present' if live count &gt; baseline * </a:t>
-            </a:r>
-            <a:r>
-              <a:rPr lang="en-GB" dirty="0" err="1">
-                <a:solidFill>
-                  <a:schemeClr val="tx1"/>
-                </a:solidFill>
-              </a:rPr>
-              <a:t>threshold_multiplier</a:t>
-            </a:r>
-            <a:r>
-              <a:rPr lang="en-GB" dirty="0">
-                <a:solidFill>
-                  <a:schemeClr val="tx1"/>
-                </a:solidFill>
-              </a:rPr>
-              <a:t> (default 1.25)</a:t>
+              <a:t>Stability gate hides occasional single-frame mis-reads from the user</a:t>
             </a:r>
           </a:p>
           <a:p>
@@ -4468,135 +4369,27 @@
               </a:lnSpc>
             </a:pPr>
             <a:r>
-              <a:rPr lang="en-GB" dirty="0" err="1">
+              <a:rPr lang="en-GB" dirty="0">
                 <a:solidFill>
                   <a:schemeClr val="tx1"/>
                 </a:solidFill>
               </a:rPr>
-              <a:t>Tunable</a:t>
-            </a:r>
-            <a:r>
+              <a:t>For real world testing with group members we checked the logs </a:t>
+            </a:r>
+            <a:br>
               <a:rPr lang="en-GB" dirty="0">
                 <a:solidFill>
                   <a:schemeClr val="tx1"/>
                 </a:solidFill>
               </a:rPr>
-              <a:t> without rebuild via </a:t>
-            </a:r>
-            <a:r>
-              <a:rPr lang="en-GB" dirty="0" err="1">
+            </a:br>
+            <a:r>
+              <a:rPr lang="en-GB" dirty="0">
                 <a:solidFill>
                   <a:schemeClr val="tx1"/>
                 </a:solidFill>
               </a:rPr>
-              <a:t>accessory.conf</a:t>
-            </a:r>
-            <a:r>
-              <a:rPr lang="en-GB" dirty="0">
-                <a:solidFill>
-                  <a:schemeClr val="tx1"/>
-                </a:solidFill>
-              </a:rPr>
-              <a:t>:</a:t>
-            </a:r>
-          </a:p>
-          <a:p>
-            <a:pPr lvl="1">
-              <a:lnSpc>
-                <a:spcPct val="90000"/>
-              </a:lnSpc>
-            </a:pPr>
-            <a:r>
-              <a:rPr lang="en-GB" dirty="0" err="1">
-                <a:solidFill>
-                  <a:schemeClr val="tx1"/>
-                </a:solidFill>
-              </a:rPr>
-              <a:t>hue_min</a:t>
-            </a:r>
-            <a:r>
-              <a:rPr lang="en-GB" dirty="0">
-                <a:solidFill>
-                  <a:schemeClr val="tx1"/>
-                </a:solidFill>
-              </a:rPr>
-              <a:t>/max, </a:t>
-            </a:r>
-            <a:r>
-              <a:rPr lang="en-GB" dirty="0" err="1">
-                <a:solidFill>
-                  <a:schemeClr val="tx1"/>
-                </a:solidFill>
-              </a:rPr>
-              <a:t>sat_min</a:t>
-            </a:r>
-            <a:r>
-              <a:rPr lang="en-GB" dirty="0">
-                <a:solidFill>
-                  <a:schemeClr val="tx1"/>
-                </a:solidFill>
-              </a:rPr>
-              <a:t>/max, </a:t>
-            </a:r>
-            <a:r>
-              <a:rPr lang="en-GB" dirty="0" err="1">
-                <a:solidFill>
-                  <a:schemeClr val="tx1"/>
-                </a:solidFill>
-              </a:rPr>
-              <a:t>val_min</a:t>
-            </a:r>
-            <a:r>
-              <a:rPr lang="en-GB" dirty="0">
-                <a:solidFill>
-                  <a:schemeClr val="tx1"/>
-                </a:solidFill>
-              </a:rPr>
-              <a:t>/max, </a:t>
-            </a:r>
-            <a:r>
-              <a:rPr lang="en-GB" dirty="0" err="1">
-                <a:solidFill>
-                  <a:schemeClr val="tx1"/>
-                </a:solidFill>
-              </a:rPr>
-              <a:t>calibration_frames</a:t>
-            </a:r>
-            <a:r>
-              <a:rPr lang="en-GB" dirty="0">
-                <a:solidFill>
-                  <a:schemeClr val="tx1"/>
-                </a:solidFill>
-              </a:rPr>
-              <a:t>, </a:t>
-            </a:r>
-            <a:r>
-              <a:rPr lang="en-GB" dirty="0" err="1">
-                <a:solidFill>
-                  <a:schemeClr val="tx1"/>
-                </a:solidFill>
-              </a:rPr>
-              <a:t>threshold_multiplier</a:t>
-            </a:r>
-            <a:endParaRPr lang="en-GB" dirty="0">
-              <a:solidFill>
-                <a:schemeClr val="tx1"/>
-              </a:solidFill>
-            </a:endParaRPr>
-          </a:p>
-          <a:p>
-            <a:pPr>
-              <a:lnSpc>
-                <a:spcPct val="90000"/>
-              </a:lnSpc>
-            </a:pPr>
-            <a:r>
-              <a:rPr lang="en-GB" dirty="0">
-                <a:solidFill>
-                  <a:schemeClr val="tx1"/>
-                </a:solidFill>
-              </a:rPr>
-              <a:t>--no-accessory flag falls back to a fair (random) game for A/B testing</a:t>
+              <a:t>and it was working good about 70% of the times</a:t>
             </a:r>
           </a:p>
         </p:txBody>
@@ -4850,7 +4643,7 @@
           <a:lstStyle/>
           <a:p>
             <a:r>
-              <a:t>Issues &amp; pitfalls encountered</a:t>
+              <a:t>Accessory detection (rigging)</a:t>
             </a:r>
           </a:p>
         </p:txBody>
@@ -4867,13 +4660,13 @@
         </p:nvSpPr>
         <p:spPr>
           <a:xfrm>
-            <a:off x="1673471" y="1973853"/>
-            <a:ext cx="8841881" cy="3318582"/>
+            <a:off x="1705617" y="2291262"/>
+            <a:ext cx="8777226" cy="2879256"/>
           </a:xfrm>
         </p:spPr>
         <p:txBody>
           <a:bodyPr>
-            <a:normAutofit lnSpcReduction="10000"/>
+            <a:normAutofit/>
           </a:bodyPr>
           <a:lstStyle/>
           <a:p>
@@ -4883,12 +4676,27 @@
               </a:lnSpc>
             </a:pPr>
             <a:r>
-              <a:rPr lang="en-GB" sz="1600" dirty="0">
+              <a:rPr lang="en-GB" dirty="0">
                 <a:solidFill>
                   <a:schemeClr val="tx1"/>
                 </a:solidFill>
               </a:rPr>
-              <a:t>First model (tiny custom CNN, 96x72 grayscale + CLAHE + Otsu) struggled to generalise</a:t>
+              <a:t>Goal: ONLY the chosen accessory enables wins; other coloured items must not trigger it</a:t>
+            </a:r>
+          </a:p>
+          <a:p>
+            <a:pPr>
+              <a:lnSpc>
+                <a:spcPct val="90000"/>
+              </a:lnSpc>
+            </a:pPr>
+            <a:r>
+              <a:rPr lang="en-GB" dirty="0">
+                <a:solidFill>
+                  <a:schemeClr val="tx1"/>
+                </a:solidFill>
+              </a:rPr>
+              <a:t>Approach: HSV mask + per-startup baseline (no second neural network needed)</a:t>
             </a:r>
           </a:p>
           <a:p>
@@ -4903,7 +4711,114 @@
                   <a:schemeClr val="tx1"/>
                 </a:solidFill>
               </a:rPr>
-              <a:t>Swapped to MobileNetV3Small transfer learning; accuracy jumped, code path simplified</a:t>
+              <a:t>cv::</a:t>
+            </a:r>
+            <a:r>
+              <a:rPr lang="en-GB" dirty="0" err="1">
+                <a:solidFill>
+                  <a:schemeClr val="tx1"/>
+                </a:solidFill>
+              </a:rPr>
+              <a:t>cvtColor</a:t>
+            </a:r>
+            <a:r>
+              <a:rPr lang="en-GB" dirty="0">
+                <a:solidFill>
+                  <a:schemeClr val="tx1"/>
+                </a:solidFill>
+              </a:rPr>
+              <a:t>(RGB-&gt;HSV) -&gt; cv::</a:t>
+            </a:r>
+            <a:r>
+              <a:rPr lang="en-GB" dirty="0" err="1">
+                <a:solidFill>
+                  <a:schemeClr val="tx1"/>
+                </a:solidFill>
+              </a:rPr>
+              <a:t>inRange</a:t>
+            </a:r>
+            <a:r>
+              <a:rPr lang="en-GB" dirty="0">
+                <a:solidFill>
+                  <a:schemeClr val="tx1"/>
+                </a:solidFill>
+              </a:rPr>
+              <a:t>(hue/sat/</a:t>
+            </a:r>
+            <a:r>
+              <a:rPr lang="en-GB" dirty="0" err="1">
+                <a:solidFill>
+                  <a:schemeClr val="tx1"/>
+                </a:solidFill>
+              </a:rPr>
+              <a:t>val</a:t>
+            </a:r>
+            <a:r>
+              <a:rPr lang="en-GB" dirty="0">
+                <a:solidFill>
+                  <a:schemeClr val="tx1"/>
+                </a:solidFill>
+              </a:rPr>
+              <a:t> bounds) -&gt; cv::</a:t>
+            </a:r>
+            <a:r>
+              <a:rPr lang="en-GB" dirty="0" err="1">
+                <a:solidFill>
+                  <a:schemeClr val="tx1"/>
+                </a:solidFill>
+              </a:rPr>
+              <a:t>countNonZero</a:t>
+            </a:r>
+            <a:endParaRPr lang="en-GB" dirty="0">
+              <a:solidFill>
+                <a:schemeClr val="tx1"/>
+              </a:solidFill>
+            </a:endParaRPr>
+          </a:p>
+          <a:p>
+            <a:pPr lvl="1">
+              <a:lnSpc>
+                <a:spcPct val="90000"/>
+              </a:lnSpc>
+            </a:pPr>
+            <a:r>
+              <a:rPr lang="en-GB" dirty="0">
+                <a:solidFill>
+                  <a:schemeClr val="tx1"/>
+                </a:solidFill>
+              </a:rPr>
+              <a:t>Calibrate baseline by averaging 60 empty-scene frames at startup</a:t>
+            </a:r>
+          </a:p>
+          <a:p>
+            <a:pPr lvl="1">
+              <a:lnSpc>
+                <a:spcPct val="90000"/>
+              </a:lnSpc>
+            </a:pPr>
+            <a:r>
+              <a:rPr lang="en-GB" dirty="0">
+                <a:solidFill>
+                  <a:schemeClr val="tx1"/>
+                </a:solidFill>
+              </a:rPr>
+              <a:t>'Present' if live count &gt; baseline * </a:t>
+            </a:r>
+            <a:r>
+              <a:rPr lang="en-GB" dirty="0" err="1">
+                <a:solidFill>
+                  <a:schemeClr val="tx1"/>
+                </a:solidFill>
+              </a:rPr>
+              <a:t>threshold_multiplier</a:t>
+            </a:r>
+            <a:r>
+              <a:rPr lang="en-GB" dirty="0">
+                <a:solidFill>
+                  <a:schemeClr val="tx1"/>
+                </a:solidFill>
+              </a:rPr>
+              <a:t> (default 1.25)</a:t>
             </a:r>
           </a:p>
           <a:p>
@@ -4913,60 +4828,36 @@
               </a:lnSpc>
             </a:pPr>
             <a:r>
-              <a:rPr lang="en-GB" sz="1600" dirty="0">
+              <a:rPr lang="en-GB" dirty="0" err="1">
                 <a:solidFill>
                   <a:schemeClr val="tx1"/>
                 </a:solidFill>
               </a:rPr>
-              <a:t>TF 2.16 </a:t>
-            </a:r>
-            <a:r>
-              <a:rPr lang="en-GB" sz="1600" dirty="0" err="1">
+              <a:t>Tunable</a:t>
+            </a:r>
+            <a:r>
+              <a:rPr lang="en-GB" dirty="0">
                 <a:solidFill>
                   <a:schemeClr val="tx1"/>
                 </a:solidFill>
               </a:rPr>
-              <a:t>TFLite</a:t>
-            </a:r>
-            <a:r>
-              <a:rPr lang="en-GB" sz="1600" dirty="0">
+              <a:t> without rebuild via </a:t>
+            </a:r>
+            <a:r>
+              <a:rPr lang="en-GB" dirty="0" err="1">
                 <a:solidFill>
                   <a:schemeClr val="tx1"/>
                 </a:solidFill>
               </a:rPr>
-              <a:t> converter dropped final </a:t>
-            </a:r>
-            <a:r>
-              <a:rPr lang="en-GB" sz="1600" dirty="0" err="1">
+              <a:t>accessory.conf</a:t>
+            </a:r>
+            <a:r>
+              <a:rPr lang="en-GB" dirty="0">
                 <a:solidFill>
                   <a:schemeClr val="tx1"/>
                 </a:solidFill>
               </a:rPr>
-              <a:t>softmax</a:t>
-            </a:r>
-            <a:r>
-              <a:rPr lang="en-GB" sz="1600" dirty="0">
-                <a:solidFill>
-                  <a:schemeClr val="tx1"/>
-                </a:solidFill>
-              </a:rPr>
-              <a:t> silently on </a:t>
-            </a:r>
-            <a:r>
-              <a:rPr lang="en-GB" sz="1600" dirty="0" err="1">
-                <a:solidFill>
-                  <a:schemeClr val="tx1"/>
-                </a:solidFill>
-              </a:rPr>
-              <a:t>Keras</a:t>
-            </a:r>
-            <a:r>
-              <a:rPr lang="en-GB" sz="1600" dirty="0">
-                <a:solidFill>
-                  <a:schemeClr val="tx1"/>
-                </a:solidFill>
-              </a:rPr>
-              <a:t> 3 Sequential models</a:t>
+              <a:t>:</a:t>
             </a:r>
           </a:p>
           <a:p>
@@ -4976,27 +4867,36 @@
               </a:lnSpc>
             </a:pPr>
             <a:r>
+              <a:rPr lang="en-GB" dirty="0" err="1">
+                <a:solidFill>
+                  <a:schemeClr val="tx1"/>
+                </a:solidFill>
+              </a:rPr>
+              <a:t>hue_min</a:t>
+            </a:r>
+            <a:r>
               <a:rPr lang="en-GB" dirty="0">
                 <a:solidFill>
                   <a:schemeClr val="tx1"/>
                 </a:solidFill>
               </a:rPr>
-              <a:t>Confidence scores were not normalised -&gt; our threshold logic was off</a:t>
-            </a:r>
-          </a:p>
-          <a:p>
-            <a:pPr lvl="1">
-              <a:lnSpc>
-                <a:spcPct val="90000"/>
-              </a:lnSpc>
-            </a:pPr>
+              <a:t>/max, </a:t>
+            </a:r>
+            <a:r>
+              <a:rPr lang="en-GB" dirty="0" err="1">
+                <a:solidFill>
+                  <a:schemeClr val="tx1"/>
+                </a:solidFill>
+              </a:rPr>
+              <a:t>sat_min</a:t>
+            </a:r>
             <a:r>
               <a:rPr lang="en-GB" dirty="0">
                 <a:solidFill>
                   <a:schemeClr val="tx1"/>
                 </a:solidFill>
               </a:rPr>
-              <a:t>Re-baked </a:t>
+              <a:t>/max, </a:t>
             </a:r>
             <a:r>
               <a:rPr lang="en-GB" dirty="0" err="1">
@@ -5004,7 +4904,7 @@
                   <a:schemeClr val="tx1"/>
                 </a:solidFill>
               </a:rPr>
-              <a:t>softmax</a:t>
+              <a:t>val_min</a:t>
             </a:r>
             <a:r>
               <a:rPr lang="en-GB" dirty="0">
@@ -5012,7 +4912,7 @@
                   <a:schemeClr val="tx1"/>
                 </a:solidFill>
               </a:rPr>
-              <a:t> into the new export; C++ stopped applying its own </a:t>
+              <a:t>/max, </a:t>
             </a:r>
             <a:r>
               <a:rPr lang="en-GB" dirty="0" err="1">
@@ -5020,7 +4920,23 @@
                   <a:schemeClr val="tx1"/>
                 </a:solidFill>
               </a:rPr>
-              <a:t>softmax</a:t>
+              <a:t>calibration_frames</a:t>
+            </a:r>
+            <a:r>
+              <a:rPr lang="en-GB" dirty="0">
+                <a:solidFill>
+                  <a:schemeClr val="tx1"/>
+                </a:solidFill>
+              </a:rPr>
+              <a:t>, </a:t>
+            </a:r>
+            <a:r>
+              <a:rPr lang="en-GB" dirty="0" err="1">
+                <a:solidFill>
+                  <a:schemeClr val="tx1"/>
+                </a:solidFill>
+              </a:rPr>
+              <a:t>threshold_multiplier</a:t>
             </a:r>
             <a:endParaRPr lang="en-GB" dirty="0">
               <a:solidFill>
@@ -5035,112 +4951,12 @@
               </a:lnSpc>
             </a:pPr>
             <a:r>
-              <a:rPr lang="en-GB" sz="1600" dirty="0">
+              <a:rPr lang="en-GB" dirty="0">
                 <a:solidFill>
                   <a:schemeClr val="tx1"/>
                 </a:solidFill>
               </a:rPr>
-              <a:t>Picamera2 'RGB888' format actually returns BGR; reference Python used BGR2HSV</a:t>
-            </a:r>
-          </a:p>
-          <a:p>
-            <a:pPr lvl="1">
-              <a:lnSpc>
-                <a:spcPct val="90000"/>
-              </a:lnSpc>
-            </a:pPr>
-            <a:r>
-              <a:rPr lang="en-GB" dirty="0">
-                <a:solidFill>
-                  <a:schemeClr val="tx1"/>
-                </a:solidFill>
-              </a:rPr>
-              <a:t>Our C++ uses RGB2HSV correctly -&gt; colleague's HSV defaults need re-tuning here</a:t>
-            </a:r>
-          </a:p>
-          <a:p>
-            <a:pPr>
-              <a:lnSpc>
-                <a:spcPct val="90000"/>
-              </a:lnSpc>
-            </a:pPr>
-            <a:r>
-              <a:rPr lang="en-GB" sz="1600" dirty="0">
-                <a:solidFill>
-                  <a:schemeClr val="tx1"/>
-                </a:solidFill>
-              </a:rPr>
-              <a:t>Strict 4-consecutive-frame consensus was too brittle (one blurry frame reset count)</a:t>
-            </a:r>
-          </a:p>
-          <a:p>
-            <a:pPr lvl="1">
-              <a:lnSpc>
-                <a:spcPct val="90000"/>
-              </a:lnSpc>
-            </a:pPr>
-            <a:r>
-              <a:rPr lang="en-GB" dirty="0">
-                <a:solidFill>
-                  <a:schemeClr val="tx1"/>
-                </a:solidFill>
-              </a:rPr>
-              <a:t>Replaced with sliding window of 8, accept &gt;=5 agreeing, skip low-confidence frames</a:t>
-            </a:r>
-          </a:p>
-          <a:p>
-            <a:pPr>
-              <a:lnSpc>
-                <a:spcPct val="90000"/>
-              </a:lnSpc>
-            </a:pPr>
-            <a:r>
-              <a:rPr lang="en-GB" sz="1600" dirty="0" err="1">
-                <a:solidFill>
-                  <a:schemeClr val="tx1"/>
-                </a:solidFill>
-              </a:rPr>
-              <a:t>Devcontainer</a:t>
-            </a:r>
-            <a:r>
-              <a:rPr lang="en-GB" sz="1600" dirty="0">
-                <a:solidFill>
-                  <a:schemeClr val="tx1"/>
-                </a:solidFill>
-              </a:rPr>
-              <a:t> cannot reach the Pi network -&gt; Mac drives all </a:t>
-            </a:r>
-            <a:r>
-              <a:rPr lang="en-GB" sz="1600" dirty="0" err="1">
-                <a:solidFill>
-                  <a:schemeClr val="tx1"/>
-                </a:solidFill>
-              </a:rPr>
-              <a:t>rsync</a:t>
-            </a:r>
-            <a:r>
-              <a:rPr lang="en-GB" sz="1600" dirty="0">
-                <a:solidFill>
-                  <a:schemeClr val="tx1"/>
-                </a:solidFill>
-              </a:rPr>
-              <a:t>/ssh; </a:t>
-            </a:r>
-            <a:r>
-              <a:rPr lang="en-GB" sz="1600" dirty="0" err="1">
-                <a:solidFill>
-                  <a:schemeClr val="tx1"/>
-                </a:solidFill>
-              </a:rPr>
-              <a:t>sysroot</a:t>
-            </a:r>
-            <a:r>
-              <a:rPr lang="en-GB" sz="1600" dirty="0">
-                <a:solidFill>
-                  <a:schemeClr val="tx1"/>
-                </a:solidFill>
-              </a:rPr>
-              <a:t> pulled once</a:t>
+              <a:t>--no-accessory flag falls back to a fair (random) game for A/B testing</a:t>
             </a:r>
           </a:p>
         </p:txBody>
@@ -5394,6 +5210,550 @@
           <a:lstStyle/>
           <a:p>
             <a:r>
+              <a:t>Issues &amp; pitfalls encountered</a:t>
+            </a:r>
+          </a:p>
+        </p:txBody>
+      </p:sp>
+      <p:sp>
+        <p:nvSpPr>
+          <p:cNvPr id="3" name="Content Placeholder 2"/>
+          <p:cNvSpPr>
+            <a:spLocks noGrp="1"/>
+          </p:cNvSpPr>
+          <p:nvPr>
+            <p:ph idx="1"/>
+          </p:nvPr>
+        </p:nvSpPr>
+        <p:spPr>
+          <a:xfrm>
+            <a:off x="1673471" y="1973853"/>
+            <a:ext cx="8841881" cy="3318582"/>
+          </a:xfrm>
+        </p:spPr>
+        <p:txBody>
+          <a:bodyPr>
+            <a:normAutofit lnSpcReduction="10000"/>
+          </a:bodyPr>
+          <a:lstStyle/>
+          <a:p>
+            <a:pPr>
+              <a:lnSpc>
+                <a:spcPct val="90000"/>
+              </a:lnSpc>
+            </a:pPr>
+            <a:r>
+              <a:rPr lang="en-GB" sz="1600" dirty="0">
+                <a:solidFill>
+                  <a:schemeClr val="tx1"/>
+                </a:solidFill>
+              </a:rPr>
+              <a:t>First model (tiny custom CNN, 96x72 grayscale + CLAHE + Otsu) struggled to generalise</a:t>
+            </a:r>
+          </a:p>
+          <a:p>
+            <a:pPr lvl="1">
+              <a:lnSpc>
+                <a:spcPct val="90000"/>
+              </a:lnSpc>
+            </a:pPr>
+            <a:r>
+              <a:rPr lang="en-GB" dirty="0">
+                <a:solidFill>
+                  <a:schemeClr val="tx1"/>
+                </a:solidFill>
+              </a:rPr>
+              <a:t>Swapped to MobileNetV3Small transfer learning; accuracy jumped, code path simplified</a:t>
+            </a:r>
+          </a:p>
+          <a:p>
+            <a:pPr>
+              <a:lnSpc>
+                <a:spcPct val="90000"/>
+              </a:lnSpc>
+            </a:pPr>
+            <a:r>
+              <a:rPr lang="en-GB" sz="1600" dirty="0">
+                <a:solidFill>
+                  <a:schemeClr val="tx1"/>
+                </a:solidFill>
+              </a:rPr>
+              <a:t>TF 2.16 </a:t>
+            </a:r>
+            <a:r>
+              <a:rPr lang="en-GB" sz="1600" dirty="0" err="1">
+                <a:solidFill>
+                  <a:schemeClr val="tx1"/>
+                </a:solidFill>
+              </a:rPr>
+              <a:t>TFLite</a:t>
+            </a:r>
+            <a:r>
+              <a:rPr lang="en-GB" sz="1600" dirty="0">
+                <a:solidFill>
+                  <a:schemeClr val="tx1"/>
+                </a:solidFill>
+              </a:rPr>
+              <a:t> converter dropped final </a:t>
+            </a:r>
+            <a:r>
+              <a:rPr lang="en-GB" sz="1600" dirty="0" err="1">
+                <a:solidFill>
+                  <a:schemeClr val="tx1"/>
+                </a:solidFill>
+              </a:rPr>
+              <a:t>softmax</a:t>
+            </a:r>
+            <a:r>
+              <a:rPr lang="en-GB" sz="1600" dirty="0">
+                <a:solidFill>
+                  <a:schemeClr val="tx1"/>
+                </a:solidFill>
+              </a:rPr>
+              <a:t> silently on </a:t>
+            </a:r>
+            <a:r>
+              <a:rPr lang="en-GB" sz="1600" dirty="0" err="1">
+                <a:solidFill>
+                  <a:schemeClr val="tx1"/>
+                </a:solidFill>
+              </a:rPr>
+              <a:t>Keras</a:t>
+            </a:r>
+            <a:r>
+              <a:rPr lang="en-GB" sz="1600" dirty="0">
+                <a:solidFill>
+                  <a:schemeClr val="tx1"/>
+                </a:solidFill>
+              </a:rPr>
+              <a:t> 3 Sequential models</a:t>
+            </a:r>
+          </a:p>
+          <a:p>
+            <a:pPr lvl="1">
+              <a:lnSpc>
+                <a:spcPct val="90000"/>
+              </a:lnSpc>
+            </a:pPr>
+            <a:r>
+              <a:rPr lang="en-GB" dirty="0">
+                <a:solidFill>
+                  <a:schemeClr val="tx1"/>
+                </a:solidFill>
+              </a:rPr>
+              <a:t>Confidence scores were not normalised -&gt; our threshold logic was off</a:t>
+            </a:r>
+          </a:p>
+          <a:p>
+            <a:pPr lvl="1">
+              <a:lnSpc>
+                <a:spcPct val="90000"/>
+              </a:lnSpc>
+            </a:pPr>
+            <a:r>
+              <a:rPr lang="en-GB" dirty="0">
+                <a:solidFill>
+                  <a:schemeClr val="tx1"/>
+                </a:solidFill>
+              </a:rPr>
+              <a:t>Re-baked </a:t>
+            </a:r>
+            <a:r>
+              <a:rPr lang="en-GB" dirty="0" err="1">
+                <a:solidFill>
+                  <a:schemeClr val="tx1"/>
+                </a:solidFill>
+              </a:rPr>
+              <a:t>softmax</a:t>
+            </a:r>
+            <a:r>
+              <a:rPr lang="en-GB" dirty="0">
+                <a:solidFill>
+                  <a:schemeClr val="tx1"/>
+                </a:solidFill>
+              </a:rPr>
+              <a:t> into the new export; C++ stopped applying its own </a:t>
+            </a:r>
+            <a:r>
+              <a:rPr lang="en-GB" dirty="0" err="1">
+                <a:solidFill>
+                  <a:schemeClr val="tx1"/>
+                </a:solidFill>
+              </a:rPr>
+              <a:t>softmax</a:t>
+            </a:r>
+            <a:endParaRPr lang="en-GB" dirty="0">
+              <a:solidFill>
+                <a:schemeClr val="tx1"/>
+              </a:solidFill>
+            </a:endParaRPr>
+          </a:p>
+          <a:p>
+            <a:pPr>
+              <a:lnSpc>
+                <a:spcPct val="90000"/>
+              </a:lnSpc>
+            </a:pPr>
+            <a:r>
+              <a:rPr lang="en-GB" sz="1600" dirty="0">
+                <a:solidFill>
+                  <a:schemeClr val="tx1"/>
+                </a:solidFill>
+              </a:rPr>
+              <a:t>Picamera2 'RGB888' format actually returns BGR; reference Python used BGR2HSV</a:t>
+            </a:r>
+          </a:p>
+          <a:p>
+            <a:pPr lvl="1">
+              <a:lnSpc>
+                <a:spcPct val="90000"/>
+              </a:lnSpc>
+            </a:pPr>
+            <a:r>
+              <a:rPr lang="en-GB" dirty="0">
+                <a:solidFill>
+                  <a:schemeClr val="tx1"/>
+                </a:solidFill>
+              </a:rPr>
+              <a:t>Our C++ uses RGB2HSV correctly -&gt; HSV defaults need re-tuning here</a:t>
+            </a:r>
+          </a:p>
+          <a:p>
+            <a:pPr>
+              <a:lnSpc>
+                <a:spcPct val="90000"/>
+              </a:lnSpc>
+            </a:pPr>
+            <a:r>
+              <a:rPr lang="en-GB" sz="1600" dirty="0">
+                <a:solidFill>
+                  <a:schemeClr val="tx1"/>
+                </a:solidFill>
+              </a:rPr>
+              <a:t>Strict 4-consecutive-frame consensus was too brittle (one blurry frame reset count)</a:t>
+            </a:r>
+          </a:p>
+          <a:p>
+            <a:pPr lvl="1">
+              <a:lnSpc>
+                <a:spcPct val="90000"/>
+              </a:lnSpc>
+            </a:pPr>
+            <a:r>
+              <a:rPr lang="en-GB" dirty="0">
+                <a:solidFill>
+                  <a:schemeClr val="tx1"/>
+                </a:solidFill>
+              </a:rPr>
+              <a:t>Replaced with sliding window of 8, accept &gt;=5 agreeing, skip low-confidence frames</a:t>
+            </a:r>
+          </a:p>
+          <a:p>
+            <a:pPr>
+              <a:lnSpc>
+                <a:spcPct val="90000"/>
+              </a:lnSpc>
+            </a:pPr>
+            <a:r>
+              <a:rPr lang="en-GB" sz="1600" dirty="0" err="1">
+                <a:solidFill>
+                  <a:schemeClr val="tx1"/>
+                </a:solidFill>
+              </a:rPr>
+              <a:t>Devcontainer</a:t>
+            </a:r>
+            <a:r>
+              <a:rPr lang="en-GB" sz="1600" dirty="0">
+                <a:solidFill>
+                  <a:schemeClr val="tx1"/>
+                </a:solidFill>
+              </a:rPr>
+              <a:t> cannot reach the Pi network -&gt; Mac drives all </a:t>
+            </a:r>
+            <a:r>
+              <a:rPr lang="en-GB" sz="1600" dirty="0" err="1">
+                <a:solidFill>
+                  <a:schemeClr val="tx1"/>
+                </a:solidFill>
+              </a:rPr>
+              <a:t>rsync</a:t>
+            </a:r>
+            <a:r>
+              <a:rPr lang="en-GB" sz="1600" dirty="0">
+                <a:solidFill>
+                  <a:schemeClr val="tx1"/>
+                </a:solidFill>
+              </a:rPr>
+              <a:t>/ssh; </a:t>
+            </a:r>
+            <a:r>
+              <a:rPr lang="en-GB" sz="1600" dirty="0" err="1">
+                <a:solidFill>
+                  <a:schemeClr val="tx1"/>
+                </a:solidFill>
+              </a:rPr>
+              <a:t>sysroot</a:t>
+            </a:r>
+            <a:r>
+              <a:rPr lang="en-GB" sz="1600" dirty="0">
+                <a:solidFill>
+                  <a:schemeClr val="tx1"/>
+                </a:solidFill>
+              </a:rPr>
+              <a:t> pulled once</a:t>
+            </a:r>
+          </a:p>
+        </p:txBody>
+      </p:sp>
+    </p:spTree>
+  </p:cSld>
+  <p:clrMapOvr>
+    <a:masterClrMapping/>
+  </p:clrMapOvr>
+</p:sld>
+</file>
+
+<file path=ppt/slides/slide13.xml><?xml version="1.0" encoding="utf-8"?>
+<p:sld xmlns:a="http://schemas.openxmlformats.org/drawingml/2006/main" xmlns:r="http://schemas.openxmlformats.org/officeDocument/2006/relationships" xmlns:p="http://schemas.openxmlformats.org/presentationml/2006/main">
+  <p:cSld>
+    <p:bg>
+      <p:bgPr>
+        <a:solidFill>
+          <a:schemeClr val="bg1"/>
+        </a:solidFill>
+        <a:effectLst/>
+      </p:bgPr>
+    </p:bg>
+    <p:spTree>
+      <p:nvGrpSpPr>
+        <p:cNvPr id="1" name=""/>
+        <p:cNvGrpSpPr/>
+        <p:nvPr/>
+      </p:nvGrpSpPr>
+      <p:grpSpPr>
+        <a:xfrm>
+          <a:off x="0" y="0"/>
+          <a:ext cx="0" cy="0"/>
+          <a:chOff x="0" y="0"/>
+          <a:chExt cx="0" cy="0"/>
+        </a:xfrm>
+      </p:grpSpPr>
+      <p:sp>
+        <p:nvSpPr>
+          <p:cNvPr id="8" name="Rectangle 7">
+            <a:extLst>
+              <a:ext uri="{FF2B5EF4-FFF2-40B4-BE49-F238E27FC236}">
+                <a16:creationId xmlns:a16="http://schemas.microsoft.com/office/drawing/2014/main" id="{C33976D1-3430-450C-A978-87A9A6E8E71F}"/>
+              </a:ext>
+              <a:ext uri="{C183D7F6-B498-43B3-948B-1728B52AA6E4}">
+                <adec:decorative xmlns:adec="http://schemas.microsoft.com/office/drawing/2017/decorative" val="1"/>
+              </a:ext>
+            </a:extLst>
+          </p:cNvPr>
+          <p:cNvSpPr>
+            <a:spLocks noGrp="1" noRot="1" noChangeAspect="1" noMove="1" noResize="1" noEditPoints="1" noAdjustHandles="1" noChangeArrowheads="1" noChangeShapeType="1" noTextEdit="1"/>
+          </p:cNvSpPr>
+          <p:nvPr>
+            <p:extLst>
+              <p:ext uri="{386F3935-93C4-4BCD-93E2-E3B085C9AB24}">
+                <p16:designElem xmlns:p16="http://schemas.microsoft.com/office/powerpoint/2015/main" val="1"/>
+              </p:ext>
+            </p:extLst>
+          </p:nvPr>
+        </p:nvSpPr>
+        <p:spPr>
+          <a:xfrm>
+            <a:off x="0" y="0"/>
+            <a:ext cx="12188825" cy="6858000"/>
+          </a:xfrm>
+          <a:prstGeom prst="rect">
+            <a:avLst/>
+          </a:prstGeom>
+          <a:solidFill>
+            <a:schemeClr val="accent2"/>
+          </a:solidFill>
+          <a:ln>
+            <a:noFill/>
+          </a:ln>
+        </p:spPr>
+        <p:style>
+          <a:lnRef idx="2">
+            <a:schemeClr val="accent1">
+              <a:shade val="50000"/>
+            </a:schemeClr>
+          </a:lnRef>
+          <a:fillRef idx="1">
+            <a:schemeClr val="accent1"/>
+          </a:fillRef>
+          <a:effectRef idx="0">
+            <a:schemeClr val="accent1"/>
+          </a:effectRef>
+          <a:fontRef idx="minor">
+            <a:schemeClr val="lt1"/>
+          </a:fontRef>
+        </p:style>
+        <p:txBody>
+          <a:bodyPr rtlCol="0" anchor="ctr"/>
+          <a:lstStyle/>
+          <a:p>
+            <a:pPr algn="ctr"/>
+            <a:endParaRPr lang="en-US"/>
+          </a:p>
+        </p:txBody>
+      </p:sp>
+      <p:sp>
+        <p:nvSpPr>
+          <p:cNvPr id="10" name="Rectangle 9">
+            <a:extLst>
+              <a:ext uri="{FF2B5EF4-FFF2-40B4-BE49-F238E27FC236}">
+                <a16:creationId xmlns:a16="http://schemas.microsoft.com/office/drawing/2014/main" id="{7D6AAC78-7D86-415A-ADC1-2B474807960C}"/>
+              </a:ext>
+              <a:ext uri="{C183D7F6-B498-43B3-948B-1728B52AA6E4}">
+                <adec:decorative xmlns:adec="http://schemas.microsoft.com/office/drawing/2017/decorative" val="1"/>
+              </a:ext>
+            </a:extLst>
+          </p:cNvPr>
+          <p:cNvSpPr>
+            <a:spLocks noGrp="1" noRot="1" noChangeAspect="1" noMove="1" noResize="1" noEditPoints="1" noAdjustHandles="1" noChangeArrowheads="1" noChangeShapeType="1" noTextEdit="1"/>
+          </p:cNvSpPr>
+          <p:nvPr>
+            <p:extLst>
+              <p:ext uri="{386F3935-93C4-4BCD-93E2-E3B085C9AB24}">
+                <p16:designElem xmlns:p16="http://schemas.microsoft.com/office/powerpoint/2015/main" val="1"/>
+              </p:ext>
+            </p:extLst>
+          </p:nvPr>
+        </p:nvSpPr>
+        <p:spPr>
+          <a:xfrm>
+            <a:off x="1249354" y="1248156"/>
+            <a:ext cx="9690116" cy="4361688"/>
+          </a:xfrm>
+          <a:prstGeom prst="rect">
+            <a:avLst/>
+          </a:prstGeom>
+          <a:solidFill>
+            <a:srgbClr val="FFFFFF"/>
+          </a:solidFill>
+          <a:ln>
+            <a:noFill/>
+          </a:ln>
+        </p:spPr>
+        <p:style>
+          <a:lnRef idx="2">
+            <a:schemeClr val="accent1">
+              <a:shade val="50000"/>
+            </a:schemeClr>
+          </a:lnRef>
+          <a:fillRef idx="1">
+            <a:schemeClr val="accent1"/>
+          </a:fillRef>
+          <a:effectRef idx="0">
+            <a:schemeClr val="accent1"/>
+          </a:effectRef>
+          <a:fontRef idx="minor">
+            <a:schemeClr val="lt1"/>
+          </a:fontRef>
+        </p:style>
+        <p:txBody>
+          <a:bodyPr rtlCol="0" anchor="ctr"/>
+          <a:lstStyle/>
+          <a:p>
+            <a:pPr algn="ctr"/>
+            <a:endParaRPr lang="en-US"/>
+          </a:p>
+        </p:txBody>
+      </p:sp>
+      <p:sp>
+        <p:nvSpPr>
+          <p:cNvPr id="12" name="Rectangle 11">
+            <a:extLst>
+              <a:ext uri="{FF2B5EF4-FFF2-40B4-BE49-F238E27FC236}">
+                <a16:creationId xmlns:a16="http://schemas.microsoft.com/office/drawing/2014/main" id="{F2A658D9-F185-44F1-BA33-D50320D1D078}"/>
+              </a:ext>
+              <a:ext uri="{C183D7F6-B498-43B3-948B-1728B52AA6E4}">
+                <adec:decorative xmlns:adec="http://schemas.microsoft.com/office/drawing/2017/decorative" val="1"/>
+              </a:ext>
+            </a:extLst>
+          </p:cNvPr>
+          <p:cNvSpPr>
+            <a:spLocks noGrp="1" noRot="1" noChangeAspect="1" noMove="1" noResize="1" noEditPoints="1" noAdjustHandles="1" noChangeArrowheads="1" noChangeShapeType="1" noTextEdit="1"/>
+          </p:cNvSpPr>
+          <p:nvPr>
+            <p:extLst>
+              <p:ext uri="{386F3935-93C4-4BCD-93E2-E3B085C9AB24}">
+                <p16:designElem xmlns:p16="http://schemas.microsoft.com/office/powerpoint/2015/main" val="1"/>
+              </p:ext>
+            </p:extLst>
+          </p:nvPr>
+        </p:nvSpPr>
+        <p:spPr>
+          <a:xfrm>
+            <a:off x="1061951" y="1060704"/>
+            <a:ext cx="10064922" cy="4736592"/>
+          </a:xfrm>
+          <a:prstGeom prst="rect">
+            <a:avLst/>
+          </a:prstGeom>
+          <a:noFill/>
+          <a:ln w="31750" cap="sq">
+            <a:solidFill>
+              <a:srgbClr val="FFFFFF"/>
+            </a:solidFill>
+            <a:miter lim="800000"/>
+          </a:ln>
+        </p:spPr>
+        <p:style>
+          <a:lnRef idx="2">
+            <a:schemeClr val="accent1">
+              <a:shade val="50000"/>
+            </a:schemeClr>
+          </a:lnRef>
+          <a:fillRef idx="1">
+            <a:schemeClr val="accent1"/>
+          </a:fillRef>
+          <a:effectRef idx="0">
+            <a:schemeClr val="accent1"/>
+          </a:effectRef>
+          <a:fontRef idx="minor">
+            <a:schemeClr val="lt1"/>
+          </a:fontRef>
+        </p:style>
+        <p:txBody>
+          <a:bodyPr rtlCol="0" anchor="ctr"/>
+          <a:lstStyle/>
+          <a:p>
+            <a:pPr algn="ctr"/>
+            <a:endParaRPr lang="en-US"/>
+          </a:p>
+        </p:txBody>
+      </p:sp>
+      <p:sp>
+        <p:nvSpPr>
+          <p:cNvPr id="2" name="Title 1"/>
+          <p:cNvSpPr>
+            <a:spLocks noGrp="1"/>
+          </p:cNvSpPr>
+          <p:nvPr>
+            <p:ph type="title"/>
+          </p:nvPr>
+        </p:nvSpPr>
+        <p:spPr>
+          <a:xfrm>
+            <a:off x="2230554" y="467418"/>
+            <a:ext cx="7727716" cy="1188720"/>
+          </a:xfrm>
+          <a:solidFill>
+            <a:srgbClr val="FFFFFF"/>
+          </a:solidFill>
+        </p:spPr>
+        <p:txBody>
+          <a:bodyPr>
+            <a:normAutofit/>
+          </a:bodyPr>
+          <a:lstStyle/>
+          <a:p>
+            <a:r>
               <a:rPr dirty="0"/>
               <a:t>Live demo</a:t>
             </a:r>
@@ -5430,7 +5790,7 @@
         </p:blipFill>
         <p:spPr>
           <a:xfrm>
-            <a:off x="1399489" y="1709134"/>
+            <a:off x="5013133" y="1715886"/>
             <a:ext cx="2162558" cy="3847714"/>
           </a:xfrm>
           <a:prstGeom prst="rect">
@@ -5581,7 +5941,7 @@
 </p:sld>
 </file>
 
-<file path=ppt/slides/slide13.xml><?xml version="1.0" encoding="utf-8"?>
+<file path=ppt/slides/slide14.xml><?xml version="1.0" encoding="utf-8"?>
 <p:sld xmlns:a="http://schemas.openxmlformats.org/drawingml/2006/main" xmlns:r="http://schemas.openxmlformats.org/officeDocument/2006/relationships" xmlns:p="http://schemas.openxmlformats.org/presentationml/2006/main">
   <p:cSld>
     <p:bg>
@@ -6559,7 +6919,7 @@
                   <a:schemeClr val="tx1"/>
                 </a:solidFill>
               </a:rPr>
-              <a:t>Dataset must cover different skin tones / hand sizes (group contributes)</a:t>
+              <a:t>Dataset must cover different group contributes</a:t>
             </a:r>
           </a:p>
         </p:txBody>
@@ -6972,7 +7332,7 @@
             </a:pPr>
             <a:r>
               <a:rPr lang="en-US" sz="1600" dirty="0"/>
-              <a:t>- SenseHatDisplay - direct framebuffer (RGB565), no Python</a:t>
+              <a:t>SenseHatDisplay - direct framebuffer (RGB565), no Python</a:t>
             </a:r>
           </a:p>
         </p:txBody>
@@ -6985,7 +7345,7 @@
         </p:nvSpPr>
         <p:spPr>
           <a:xfrm>
-            <a:off x="6489775" y="2097094"/>
+            <a:off x="6489775" y="2080242"/>
             <a:ext cx="4321772" cy="2939266"/>
           </a:xfrm>
           <a:prstGeom prst="rect">
@@ -7699,6 +8059,110 @@
     <p:bg>
       <p:bgPr>
         <a:solidFill>
+          <a:schemeClr val="accent2"/>
+        </a:solidFill>
+        <a:effectLst/>
+      </p:bgPr>
+    </p:bg>
+    <p:spTree>
+      <p:nvGrpSpPr>
+        <p:cNvPr id="1" name=""/>
+        <p:cNvGrpSpPr/>
+        <p:nvPr/>
+      </p:nvGrpSpPr>
+      <p:grpSpPr>
+        <a:xfrm>
+          <a:off x="0" y="0"/>
+          <a:ext cx="0" cy="0"/>
+          <a:chOff x="0" y="0"/>
+          <a:chExt cx="0" cy="0"/>
+        </a:xfrm>
+      </p:grpSpPr>
+      <p:sp>
+        <p:nvSpPr>
+          <p:cNvPr id="2" name="Title 1">
+            <a:extLst>
+              <a:ext uri="{FF2B5EF4-FFF2-40B4-BE49-F238E27FC236}">
+                <a16:creationId xmlns:a16="http://schemas.microsoft.com/office/drawing/2014/main" id="{EE088AF7-0B25-7949-8B1E-F97E5E38DFCC}"/>
+              </a:ext>
+            </a:extLst>
+          </p:cNvPr>
+          <p:cNvSpPr>
+            <a:spLocks noGrp="1"/>
+          </p:cNvSpPr>
+          <p:nvPr>
+            <p:ph type="title"/>
+          </p:nvPr>
+        </p:nvSpPr>
+        <p:spPr>
+          <a:xfrm>
+            <a:off x="1599783" y="4816249"/>
+            <a:ext cx="8989258" cy="1645759"/>
+          </a:xfrm>
+        </p:spPr>
+        <p:txBody>
+          <a:bodyPr vert="horz" lIns="274320" tIns="182880" rIns="274320" bIns="182880" rtlCol="0" anchor="ctr" anchorCtr="1">
+            <a:normAutofit/>
+          </a:bodyPr>
+          <a:lstStyle/>
+          <a:p>
+            <a:pPr defTabSz="914400"/>
+            <a:r>
+              <a:rPr lang="en-US" sz="3800" dirty="0"/>
+              <a:t>logging</a:t>
+            </a:r>
+          </a:p>
+        </p:txBody>
+      </p:sp>
+      <p:pic>
+        <p:nvPicPr>
+          <p:cNvPr id="5" name="Picture 4" descr="A screenshot of a computer program&#10;&#10;AI-generated content may be incorrect.">
+            <a:extLst>
+              <a:ext uri="{FF2B5EF4-FFF2-40B4-BE49-F238E27FC236}">
+                <a16:creationId xmlns:a16="http://schemas.microsoft.com/office/drawing/2014/main" id="{A7364D52-A79E-55DA-9FB6-BF2ECA8C5008}"/>
+              </a:ext>
+            </a:extLst>
+          </p:cNvPr>
+          <p:cNvPicPr>
+            <a:picLocks noChangeAspect="1"/>
+          </p:cNvPicPr>
+          <p:nvPr/>
+        </p:nvPicPr>
+        <p:blipFill>
+          <a:blip r:embed="rId2"/>
+          <a:stretch>
+            <a:fillRect/>
+          </a:stretch>
+        </p:blipFill>
+        <p:spPr>
+          <a:xfrm>
+            <a:off x="1599783" y="173570"/>
+            <a:ext cx="8989258" cy="4219447"/>
+          </a:xfrm>
+          <a:prstGeom prst="rect">
+            <a:avLst/>
+          </a:prstGeom>
+        </p:spPr>
+      </p:pic>
+    </p:spTree>
+    <p:extLst>
+      <p:ext uri="{BB962C8B-B14F-4D97-AF65-F5344CB8AC3E}">
+        <p14:creationId xmlns:p14="http://schemas.microsoft.com/office/powerpoint/2010/main" val="1824247929"/>
+      </p:ext>
+    </p:extLst>
+  </p:cSld>
+  <p:clrMapOvr>
+    <a:masterClrMapping/>
+  </p:clrMapOvr>
+</p:sld>
+</file>
+
+<file path=ppt/slides/slide7.xml><?xml version="1.0" encoding="utf-8"?>
+<p:sld xmlns:a="http://schemas.openxmlformats.org/drawingml/2006/main" xmlns:r="http://schemas.openxmlformats.org/officeDocument/2006/relationships" xmlns:p="http://schemas.openxmlformats.org/presentationml/2006/main">
+  <p:cSld>
+    <p:bg>
+      <p:bgPr>
+        <a:solidFill>
           <a:schemeClr val="bg1"/>
         </a:solidFill>
         <a:effectLst/>
@@ -7956,7 +8420,7 @@
         </p:nvSpPr>
         <p:spPr>
           <a:xfrm>
-            <a:off x="1705617" y="2291262"/>
+            <a:off x="2141552" y="2355058"/>
             <a:ext cx="8599918" cy="2879256"/>
           </a:xfrm>
           <a:prstGeom prst="rect">
@@ -8058,7 +8522,7 @@
 </p:sld>
 </file>
 
-<file path=ppt/slides/slide7.xml><?xml version="1.0" encoding="utf-8"?>
+<file path=ppt/slides/slide8.xml><?xml version="1.0" encoding="utf-8"?>
 <p:sld xmlns:a="http://schemas.openxmlformats.org/drawingml/2006/main" xmlns:r="http://schemas.openxmlformats.org/officeDocument/2006/relationships" xmlns:p="http://schemas.openxmlformats.org/presentationml/2006/main">
   <p:cSld>
     <p:bg>
@@ -8502,7 +8966,7 @@
 </p:sld>
 </file>
 
-<file path=ppt/slides/slide8.xml><?xml version="1.0" encoding="utf-8"?>
+<file path=ppt/slides/slide9.xml><?xml version="1.0" encoding="utf-8"?>
 <p:sld xmlns:a="http://schemas.openxmlformats.org/drawingml/2006/main" xmlns:r="http://schemas.openxmlformats.org/officeDocument/2006/relationships" xmlns:p="http://schemas.openxmlformats.org/presentationml/2006/main">
   <p:cSld>
     <p:bg>
@@ -8959,414 +9423,7 @@
                   <a:schemeClr val="tx1"/>
                 </a:solidFill>
               </a:rPr>
-              <a:t>(4))</a:t>
-            </a:r>
-          </a:p>
-          <a:p>
-            <a:r>
-              <a:rPr lang="en-GB" dirty="0">
-                <a:solidFill>
-                  <a:schemeClr val="tx1"/>
-                </a:solidFill>
-              </a:rPr>
-              <a:t>[TODO: insert real averaged numbers + screenshot from final demo run]</a:t>
-            </a:r>
-          </a:p>
-        </p:txBody>
-      </p:sp>
-    </p:spTree>
-  </p:cSld>
-  <p:clrMapOvr>
-    <a:masterClrMapping/>
-  </p:clrMapOvr>
-</p:sld>
-</file>
-
-<file path=ppt/slides/slide9.xml><?xml version="1.0" encoding="utf-8"?>
-<p:sld xmlns:a="http://schemas.openxmlformats.org/drawingml/2006/main" xmlns:r="http://schemas.openxmlformats.org/officeDocument/2006/relationships" xmlns:p="http://schemas.openxmlformats.org/presentationml/2006/main">
-  <p:cSld>
-    <p:bg>
-      <p:bgPr>
-        <a:solidFill>
-          <a:schemeClr val="bg1"/>
-        </a:solidFill>
-        <a:effectLst/>
-      </p:bgPr>
-    </p:bg>
-    <p:spTree>
-      <p:nvGrpSpPr>
-        <p:cNvPr id="1" name=""/>
-        <p:cNvGrpSpPr/>
-        <p:nvPr/>
-      </p:nvGrpSpPr>
-      <p:grpSpPr>
-        <a:xfrm>
-          <a:off x="0" y="0"/>
-          <a:ext cx="0" cy="0"/>
-          <a:chOff x="0" y="0"/>
-          <a:chExt cx="0" cy="0"/>
-        </a:xfrm>
-      </p:grpSpPr>
-      <p:sp>
-        <p:nvSpPr>
-          <p:cNvPr id="8" name="Rectangle 7">
-            <a:extLst>
-              <a:ext uri="{FF2B5EF4-FFF2-40B4-BE49-F238E27FC236}">
-                <a16:creationId xmlns:a16="http://schemas.microsoft.com/office/drawing/2014/main" id="{C33976D1-3430-450C-A978-87A9A6E8E71F}"/>
-              </a:ext>
-              <a:ext uri="{C183D7F6-B498-43B3-948B-1728B52AA6E4}">
-                <adec:decorative xmlns:adec="http://schemas.microsoft.com/office/drawing/2017/decorative" val="1"/>
-              </a:ext>
-            </a:extLst>
-          </p:cNvPr>
-          <p:cNvSpPr>
-            <a:spLocks noGrp="1" noRot="1" noChangeAspect="1" noMove="1" noResize="1" noEditPoints="1" noAdjustHandles="1" noChangeArrowheads="1" noChangeShapeType="1" noTextEdit="1"/>
-          </p:cNvSpPr>
-          <p:nvPr>
-            <p:extLst>
-              <p:ext uri="{386F3935-93C4-4BCD-93E2-E3B085C9AB24}">
-                <p16:designElem xmlns:p16="http://schemas.microsoft.com/office/powerpoint/2015/main" val="1"/>
-              </p:ext>
-            </p:extLst>
-          </p:nvPr>
-        </p:nvSpPr>
-        <p:spPr>
-          <a:xfrm>
-            <a:off x="0" y="0"/>
-            <a:ext cx="12188825" cy="6858000"/>
-          </a:xfrm>
-          <a:prstGeom prst="rect">
-            <a:avLst/>
-          </a:prstGeom>
-          <a:solidFill>
-            <a:schemeClr val="accent2"/>
-          </a:solidFill>
-          <a:ln>
-            <a:noFill/>
-          </a:ln>
-        </p:spPr>
-        <p:style>
-          <a:lnRef idx="2">
-            <a:schemeClr val="accent1">
-              <a:shade val="50000"/>
-            </a:schemeClr>
-          </a:lnRef>
-          <a:fillRef idx="1">
-            <a:schemeClr val="accent1"/>
-          </a:fillRef>
-          <a:effectRef idx="0">
-            <a:schemeClr val="accent1"/>
-          </a:effectRef>
-          <a:fontRef idx="minor">
-            <a:schemeClr val="lt1"/>
-          </a:fontRef>
-        </p:style>
-        <p:txBody>
-          <a:bodyPr rtlCol="0" anchor="ctr"/>
-          <a:lstStyle/>
-          <a:p>
-            <a:pPr algn="ctr"/>
-            <a:endParaRPr lang="en-US"/>
-          </a:p>
-        </p:txBody>
-      </p:sp>
-      <p:sp>
-        <p:nvSpPr>
-          <p:cNvPr id="10" name="Rectangle 9">
-            <a:extLst>
-              <a:ext uri="{FF2B5EF4-FFF2-40B4-BE49-F238E27FC236}">
-                <a16:creationId xmlns:a16="http://schemas.microsoft.com/office/drawing/2014/main" id="{7D6AAC78-7D86-415A-ADC1-2B474807960C}"/>
-              </a:ext>
-              <a:ext uri="{C183D7F6-B498-43B3-948B-1728B52AA6E4}">
-                <adec:decorative xmlns:adec="http://schemas.microsoft.com/office/drawing/2017/decorative" val="1"/>
-              </a:ext>
-            </a:extLst>
-          </p:cNvPr>
-          <p:cNvSpPr>
-            <a:spLocks noGrp="1" noRot="1" noChangeAspect="1" noMove="1" noResize="1" noEditPoints="1" noAdjustHandles="1" noChangeArrowheads="1" noChangeShapeType="1" noTextEdit="1"/>
-          </p:cNvSpPr>
-          <p:nvPr>
-            <p:extLst>
-              <p:ext uri="{386F3935-93C4-4BCD-93E2-E3B085C9AB24}">
-                <p16:designElem xmlns:p16="http://schemas.microsoft.com/office/powerpoint/2015/main" val="1"/>
-              </p:ext>
-            </p:extLst>
-          </p:nvPr>
-        </p:nvSpPr>
-        <p:spPr>
-          <a:xfrm>
-            <a:off x="1249354" y="1248156"/>
-            <a:ext cx="9690116" cy="4361688"/>
-          </a:xfrm>
-          <a:prstGeom prst="rect">
-            <a:avLst/>
-          </a:prstGeom>
-          <a:solidFill>
-            <a:srgbClr val="FFFFFF"/>
-          </a:solidFill>
-          <a:ln>
-            <a:noFill/>
-          </a:ln>
-        </p:spPr>
-        <p:style>
-          <a:lnRef idx="2">
-            <a:schemeClr val="accent1">
-              <a:shade val="50000"/>
-            </a:schemeClr>
-          </a:lnRef>
-          <a:fillRef idx="1">
-            <a:schemeClr val="accent1"/>
-          </a:fillRef>
-          <a:effectRef idx="0">
-            <a:schemeClr val="accent1"/>
-          </a:effectRef>
-          <a:fontRef idx="minor">
-            <a:schemeClr val="lt1"/>
-          </a:fontRef>
-        </p:style>
-        <p:txBody>
-          <a:bodyPr rtlCol="0" anchor="ctr"/>
-          <a:lstStyle/>
-          <a:p>
-            <a:pPr algn="ctr"/>
-            <a:endParaRPr lang="en-US"/>
-          </a:p>
-        </p:txBody>
-      </p:sp>
-      <p:sp>
-        <p:nvSpPr>
-          <p:cNvPr id="12" name="Rectangle 11">
-            <a:extLst>
-              <a:ext uri="{FF2B5EF4-FFF2-40B4-BE49-F238E27FC236}">
-                <a16:creationId xmlns:a16="http://schemas.microsoft.com/office/drawing/2014/main" id="{F2A658D9-F185-44F1-BA33-D50320D1D078}"/>
-              </a:ext>
-              <a:ext uri="{C183D7F6-B498-43B3-948B-1728B52AA6E4}">
-                <adec:decorative xmlns:adec="http://schemas.microsoft.com/office/drawing/2017/decorative" val="1"/>
-              </a:ext>
-            </a:extLst>
-          </p:cNvPr>
-          <p:cNvSpPr>
-            <a:spLocks noGrp="1" noRot="1" noChangeAspect="1" noMove="1" noResize="1" noEditPoints="1" noAdjustHandles="1" noChangeArrowheads="1" noChangeShapeType="1" noTextEdit="1"/>
-          </p:cNvSpPr>
-          <p:nvPr>
-            <p:extLst>
-              <p:ext uri="{386F3935-93C4-4BCD-93E2-E3B085C9AB24}">
-                <p16:designElem xmlns:p16="http://schemas.microsoft.com/office/powerpoint/2015/main" val="1"/>
-              </p:ext>
-            </p:extLst>
-          </p:nvPr>
-        </p:nvSpPr>
-        <p:spPr>
-          <a:xfrm>
-            <a:off x="1061951" y="1060704"/>
-            <a:ext cx="10064922" cy="4736592"/>
-          </a:xfrm>
-          <a:prstGeom prst="rect">
-            <a:avLst/>
-          </a:prstGeom>
-          <a:noFill/>
-          <a:ln w="31750" cap="sq">
-            <a:solidFill>
-              <a:srgbClr val="FFFFFF"/>
-            </a:solidFill>
-            <a:miter lim="800000"/>
-          </a:ln>
-        </p:spPr>
-        <p:style>
-          <a:lnRef idx="2">
-            <a:schemeClr val="accent1">
-              <a:shade val="50000"/>
-            </a:schemeClr>
-          </a:lnRef>
-          <a:fillRef idx="1">
-            <a:schemeClr val="accent1"/>
-          </a:fillRef>
-          <a:effectRef idx="0">
-            <a:schemeClr val="accent1"/>
-          </a:effectRef>
-          <a:fontRef idx="minor">
-            <a:schemeClr val="lt1"/>
-          </a:fontRef>
-        </p:style>
-        <p:txBody>
-          <a:bodyPr rtlCol="0" anchor="ctr"/>
-          <a:lstStyle/>
-          <a:p>
-            <a:pPr algn="ctr"/>
-            <a:endParaRPr lang="en-US"/>
-          </a:p>
-        </p:txBody>
-      </p:sp>
-      <p:sp>
-        <p:nvSpPr>
-          <p:cNvPr id="2" name="Title 1"/>
-          <p:cNvSpPr>
-            <a:spLocks noGrp="1"/>
-          </p:cNvSpPr>
-          <p:nvPr>
-            <p:ph type="title"/>
-          </p:nvPr>
-        </p:nvSpPr>
-        <p:spPr>
-          <a:xfrm>
-            <a:off x="2230554" y="467418"/>
-            <a:ext cx="7727716" cy="1188720"/>
-          </a:xfrm>
-          <a:solidFill>
-            <a:srgbClr val="FFFFFF"/>
-          </a:solidFill>
-        </p:spPr>
-        <p:txBody>
-          <a:bodyPr>
-            <a:normAutofit/>
-          </a:bodyPr>
-          <a:lstStyle/>
-          <a:p>
-            <a:r>
-              <a:t>Accuracy: training vs real world</a:t>
-            </a:r>
-          </a:p>
-        </p:txBody>
-      </p:sp>
-      <p:sp>
-        <p:nvSpPr>
-          <p:cNvPr id="3" name="Content Placeholder 2"/>
-          <p:cNvSpPr>
-            <a:spLocks noGrp="1"/>
-          </p:cNvSpPr>
-          <p:nvPr>
-            <p:ph idx="1"/>
-          </p:nvPr>
-        </p:nvSpPr>
-        <p:spPr>
-          <a:xfrm>
-            <a:off x="1705617" y="2291262"/>
-            <a:ext cx="8777226" cy="2879256"/>
-          </a:xfrm>
-        </p:spPr>
-        <p:txBody>
-          <a:bodyPr>
-            <a:normAutofit/>
-          </a:bodyPr>
-          <a:lstStyle/>
-          <a:p>
-            <a:pPr>
-              <a:lnSpc>
-                <a:spcPct val="90000"/>
-              </a:lnSpc>
-            </a:pPr>
-            <a:r>
-              <a:rPr lang="en-GB" dirty="0">
-                <a:solidFill>
-                  <a:schemeClr val="tx1"/>
-                </a:solidFill>
-              </a:rPr>
-              <a:t>Training run summary (printed at end of 03_train.py):</a:t>
-            </a:r>
-          </a:p>
-          <a:p>
-            <a:pPr lvl="1">
-              <a:lnSpc>
-                <a:spcPct val="90000"/>
-              </a:lnSpc>
-            </a:pPr>
-            <a:r>
-              <a:rPr lang="en-GB" dirty="0">
-                <a:solidFill>
-                  <a:schemeClr val="tx1"/>
-                </a:solidFill>
-              </a:rPr>
-              <a:t>Train accuracy: [TODO insert]    /    Val accuracy: [TODO insert]</a:t>
-            </a:r>
-          </a:p>
-          <a:p>
-            <a:pPr lvl="1">
-              <a:lnSpc>
-                <a:spcPct val="90000"/>
-              </a:lnSpc>
-            </a:pPr>
-            <a:r>
-              <a:rPr lang="en-GB" dirty="0">
-                <a:solidFill>
-                  <a:schemeClr val="tx1"/>
-                </a:solidFill>
-              </a:rPr>
-              <a:t>Train loss: [TODO]               /    Val loss: [TODO]</a:t>
-            </a:r>
-          </a:p>
-          <a:p>
-            <a:pPr>
-              <a:lnSpc>
-                <a:spcPct val="90000"/>
-              </a:lnSpc>
-            </a:pPr>
-            <a:r>
-              <a:rPr lang="en-GB" dirty="0">
-                <a:solidFill>
-                  <a:schemeClr val="tx1"/>
-                </a:solidFill>
-              </a:rPr>
-              <a:t>Real-world observations (recorded during stand-up testing):</a:t>
-            </a:r>
-          </a:p>
-          <a:p>
-            <a:pPr lvl="1">
-              <a:lnSpc>
-                <a:spcPct val="90000"/>
-              </a:lnSpc>
-            </a:pPr>
-            <a:r>
-              <a:rPr lang="en-GB" dirty="0">
-                <a:solidFill>
-                  <a:schemeClr val="tx1"/>
-                </a:solidFill>
-              </a:rPr>
-              <a:t>Group members in dataset: [TODO % accuracy]</a:t>
-            </a:r>
-          </a:p>
-          <a:p>
-            <a:pPr lvl="1">
-              <a:lnSpc>
-                <a:spcPct val="90000"/>
-              </a:lnSpc>
-            </a:pPr>
-            <a:r>
-              <a:rPr lang="en-GB" dirty="0">
-                <a:solidFill>
-                  <a:schemeClr val="tx1"/>
-                </a:solidFill>
-              </a:rPr>
-              <a:t>Out-of-dataset tester: [TODO]</a:t>
-            </a:r>
-          </a:p>
-          <a:p>
-            <a:pPr lvl="1">
-              <a:lnSpc>
-                <a:spcPct val="90000"/>
-              </a:lnSpc>
-            </a:pPr>
-            <a:r>
-              <a:rPr lang="en-GB" dirty="0">
-                <a:solidFill>
-                  <a:schemeClr val="tx1"/>
-                </a:solidFill>
-              </a:rPr>
-              <a:t>Failure modes seen: [TODO - e.g. low light, scissors confused for paper when fingers fused]</a:t>
-            </a:r>
-          </a:p>
-          <a:p>
-            <a:pPr>
-              <a:lnSpc>
-                <a:spcPct val="90000"/>
-              </a:lnSpc>
-            </a:pPr>
-            <a:r>
-              <a:rPr lang="en-GB" dirty="0">
-                <a:solidFill>
-                  <a:schemeClr val="tx1"/>
-                </a:solidFill>
-              </a:rPr>
-              <a:t>Stability gate hides occasional single-frame mis-reads from the user</a:t>
+              <a:t>(4)</a:t>
             </a:r>
           </a:p>
         </p:txBody>

--- a/presentation.pptx
+++ b/presentation.pptx
@@ -7769,7 +7769,7 @@
         </p:nvSpPr>
         <p:spPr>
           <a:xfrm>
-            <a:off x="1705799" y="1973853"/>
+            <a:off x="2162244" y="2034533"/>
             <a:ext cx="8777226" cy="3318582"/>
           </a:xfrm>
           <a:prstGeom prst="rect">
@@ -8136,7 +8136,7 @@
         </p:blipFill>
         <p:spPr>
           <a:xfrm>
-            <a:off x="1599783" y="173570"/>
+            <a:off x="1599783" y="262239"/>
             <a:ext cx="8989258" cy="4219447"/>
           </a:xfrm>
           <a:prstGeom prst="rect">

--- a/presentation.pptx
+++ b/presentation.pptx
@@ -12,12 +12,12 @@
     <p:sldId id="257" r:id="rId3"/>
     <p:sldId id="258" r:id="rId4"/>
     <p:sldId id="259" r:id="rId5"/>
-    <p:sldId id="260" r:id="rId6"/>
-    <p:sldId id="270" r:id="rId7"/>
-    <p:sldId id="261" r:id="rId8"/>
-    <p:sldId id="269" r:id="rId9"/>
-    <p:sldId id="262" r:id="rId10"/>
-    <p:sldId id="263" r:id="rId11"/>
+    <p:sldId id="261" r:id="rId6"/>
+    <p:sldId id="269" r:id="rId7"/>
+    <p:sldId id="262" r:id="rId8"/>
+    <p:sldId id="263" r:id="rId9"/>
+    <p:sldId id="260" r:id="rId10"/>
+    <p:sldId id="270" r:id="rId11"/>
     <p:sldId id="264" r:id="rId12"/>
     <p:sldId id="265" r:id="rId13"/>
     <p:sldId id="266" r:id="rId14"/>
@@ -221,7 +221,7 @@
           <a:p>
             <a:fld id="{10AAFB84-BBBD-924C-A8A5-078B40555BD8}" type="datetimeFigureOut">
               <a:rPr lang="en-US" smtClean="0"/>
-              <a:t>6/21/26</a:t>
+              <a:t>6/22/26</a:t>
             </a:fld>
             <a:endParaRPr lang="en-US"/>
           </a:p>
@@ -534,6 +534,94 @@
           <a:lstStyle/>
           <a:p>
             <a:r>
+              <a:rPr lang="en-US" dirty="0" err="1"/>
+              <a:t>andi</a:t>
+            </a:r>
+            <a:endParaRPr lang="en-US" dirty="0"/>
+          </a:p>
+        </p:txBody>
+      </p:sp>
+      <p:sp>
+        <p:nvSpPr>
+          <p:cNvPr id="4" name="Slide Number Placeholder 3"/>
+          <p:cNvSpPr>
+            <a:spLocks noGrp="1"/>
+          </p:cNvSpPr>
+          <p:nvPr>
+            <p:ph type="sldNum" sz="quarter" idx="5"/>
+          </p:nvPr>
+        </p:nvSpPr>
+        <p:spPr/>
+        <p:txBody>
+          <a:bodyPr/>
+          <a:lstStyle/>
+          <a:p>
+            <a:fld id="{0B6E914B-5440-AA40-899C-F5E9DD972569}" type="slidenum">
+              <a:rPr lang="en-US" smtClean="0"/>
+              <a:t>1</a:t>
+            </a:fld>
+            <a:endParaRPr lang="en-US"/>
+          </a:p>
+        </p:txBody>
+      </p:sp>
+    </p:spTree>
+    <p:extLst>
+      <p:ext uri="{BB962C8B-B14F-4D97-AF65-F5344CB8AC3E}">
+        <p14:creationId xmlns:p14="http://schemas.microsoft.com/office/powerpoint/2010/main" val="612623374"/>
+      </p:ext>
+    </p:extLst>
+  </p:cSld>
+  <p:clrMapOvr>
+    <a:masterClrMapping/>
+  </p:clrMapOvr>
+</p:notes>
+</file>
+
+<file path=ppt/notesSlides/notesSlide2.xml><?xml version="1.0" encoding="utf-8"?>
+<p:notes xmlns:a="http://schemas.openxmlformats.org/drawingml/2006/main" xmlns:r="http://schemas.openxmlformats.org/officeDocument/2006/relationships" xmlns:p="http://schemas.openxmlformats.org/presentationml/2006/main">
+  <p:cSld>
+    <p:spTree>
+      <p:nvGrpSpPr>
+        <p:cNvPr id="1" name=""/>
+        <p:cNvGrpSpPr/>
+        <p:nvPr/>
+      </p:nvGrpSpPr>
+      <p:grpSpPr>
+        <a:xfrm>
+          <a:off x="0" y="0"/>
+          <a:ext cx="0" cy="0"/>
+          <a:chOff x="0" y="0"/>
+          <a:chExt cx="0" cy="0"/>
+        </a:xfrm>
+      </p:grpSpPr>
+      <p:sp>
+        <p:nvSpPr>
+          <p:cNvPr id="2" name="Slide Image Placeholder 1"/>
+          <p:cNvSpPr>
+            <a:spLocks noGrp="1" noRot="1" noChangeAspect="1"/>
+          </p:cNvSpPr>
+          <p:nvPr>
+            <p:ph type="sldImg"/>
+          </p:nvPr>
+        </p:nvSpPr>
+        <p:spPr/>
+      </p:sp>
+      <p:sp>
+        <p:nvSpPr>
+          <p:cNvPr id="3" name="Notes Placeholder 2"/>
+          <p:cNvSpPr>
+            <a:spLocks noGrp="1"/>
+          </p:cNvSpPr>
+          <p:nvPr>
+            <p:ph type="body" idx="1"/>
+          </p:nvPr>
+        </p:nvSpPr>
+        <p:spPr/>
+        <p:txBody>
+          <a:bodyPr/>
+          <a:lstStyle/>
+          <a:p>
+            <a:r>
               <a:rPr lang="en-US" dirty="0"/>
               <a:t>We will get to our stats later</a:t>
             </a:r>
@@ -567,6 +655,678 @@
     <p:extLst>
       <p:ext uri="{BB962C8B-B14F-4D97-AF65-F5344CB8AC3E}">
         <p14:creationId xmlns:p14="http://schemas.microsoft.com/office/powerpoint/2010/main" val="3227047166"/>
+      </p:ext>
+    </p:extLst>
+  </p:cSld>
+  <p:clrMapOvr>
+    <a:masterClrMapping/>
+  </p:clrMapOvr>
+</p:notes>
+</file>
+
+<file path=ppt/notesSlides/notesSlide3.xml><?xml version="1.0" encoding="utf-8"?>
+<p:notes xmlns:a="http://schemas.openxmlformats.org/drawingml/2006/main" xmlns:r="http://schemas.openxmlformats.org/officeDocument/2006/relationships" xmlns:p="http://schemas.openxmlformats.org/presentationml/2006/main">
+  <p:cSld>
+    <p:spTree>
+      <p:nvGrpSpPr>
+        <p:cNvPr id="1" name=""/>
+        <p:cNvGrpSpPr/>
+        <p:nvPr/>
+      </p:nvGrpSpPr>
+      <p:grpSpPr>
+        <a:xfrm>
+          <a:off x="0" y="0"/>
+          <a:ext cx="0" cy="0"/>
+          <a:chOff x="0" y="0"/>
+          <a:chExt cx="0" cy="0"/>
+        </a:xfrm>
+      </p:grpSpPr>
+      <p:sp>
+        <p:nvSpPr>
+          <p:cNvPr id="2" name="Slide Image Placeholder 1"/>
+          <p:cNvSpPr>
+            <a:spLocks noGrp="1" noRot="1" noChangeAspect="1"/>
+          </p:cNvSpPr>
+          <p:nvPr>
+            <p:ph type="sldImg"/>
+          </p:nvPr>
+        </p:nvSpPr>
+        <p:spPr/>
+      </p:sp>
+      <p:sp>
+        <p:nvSpPr>
+          <p:cNvPr id="3" name="Notes Placeholder 2"/>
+          <p:cNvSpPr>
+            <a:spLocks noGrp="1"/>
+          </p:cNvSpPr>
+          <p:nvPr>
+            <p:ph type="body" idx="1"/>
+          </p:nvPr>
+        </p:nvSpPr>
+        <p:spPr/>
+        <p:txBody>
+          <a:bodyPr/>
+          <a:lstStyle/>
+          <a:p>
+            <a:r>
+              <a:rPr lang="en-US" dirty="0"/>
+              <a:t>Bis </a:t>
+            </a:r>
+            <a:r>
+              <a:rPr lang="en-US" dirty="0" err="1"/>
+              <a:t>hier</a:t>
+            </a:r>
+            <a:r>
+              <a:rPr lang="en-US" dirty="0"/>
+              <a:t> </a:t>
+            </a:r>
+            <a:r>
+              <a:rPr lang="en-US" dirty="0" err="1"/>
+              <a:t>andi</a:t>
+            </a:r>
+            <a:r>
+              <a:rPr lang="en-US" dirty="0"/>
+              <a:t> </a:t>
+            </a:r>
+          </a:p>
+        </p:txBody>
+      </p:sp>
+      <p:sp>
+        <p:nvSpPr>
+          <p:cNvPr id="4" name="Slide Number Placeholder 3"/>
+          <p:cNvSpPr>
+            <a:spLocks noGrp="1"/>
+          </p:cNvSpPr>
+          <p:nvPr>
+            <p:ph type="sldNum" sz="quarter" idx="5"/>
+          </p:nvPr>
+        </p:nvSpPr>
+        <p:spPr/>
+        <p:txBody>
+          <a:bodyPr/>
+          <a:lstStyle/>
+          <a:p>
+            <a:fld id="{0B6E914B-5440-AA40-899C-F5E9DD972569}" type="slidenum">
+              <a:rPr lang="en-US" smtClean="0"/>
+              <a:t>4</a:t>
+            </a:fld>
+            <a:endParaRPr lang="en-US"/>
+          </a:p>
+        </p:txBody>
+      </p:sp>
+    </p:spTree>
+    <p:extLst>
+      <p:ext uri="{BB962C8B-B14F-4D97-AF65-F5344CB8AC3E}">
+        <p14:creationId xmlns:p14="http://schemas.microsoft.com/office/powerpoint/2010/main" val="2716307957"/>
+      </p:ext>
+    </p:extLst>
+  </p:cSld>
+  <p:clrMapOvr>
+    <a:masterClrMapping/>
+  </p:clrMapOvr>
+</p:notes>
+</file>
+
+<file path=ppt/notesSlides/notesSlide4.xml><?xml version="1.0" encoding="utf-8"?>
+<p:notes xmlns:a="http://schemas.openxmlformats.org/drawingml/2006/main" xmlns:r="http://schemas.openxmlformats.org/officeDocument/2006/relationships" xmlns:p="http://schemas.openxmlformats.org/presentationml/2006/main">
+  <p:cSld>
+    <p:spTree>
+      <p:nvGrpSpPr>
+        <p:cNvPr id="1" name=""/>
+        <p:cNvGrpSpPr/>
+        <p:nvPr/>
+      </p:nvGrpSpPr>
+      <p:grpSpPr>
+        <a:xfrm>
+          <a:off x="0" y="0"/>
+          <a:ext cx="0" cy="0"/>
+          <a:chOff x="0" y="0"/>
+          <a:chExt cx="0" cy="0"/>
+        </a:xfrm>
+      </p:grpSpPr>
+      <p:sp>
+        <p:nvSpPr>
+          <p:cNvPr id="2" name="Slide Image Placeholder 1"/>
+          <p:cNvSpPr>
+            <a:spLocks noGrp="1" noRot="1" noChangeAspect="1"/>
+          </p:cNvSpPr>
+          <p:nvPr>
+            <p:ph type="sldImg"/>
+          </p:nvPr>
+        </p:nvSpPr>
+        <p:spPr/>
+      </p:sp>
+      <p:sp>
+        <p:nvSpPr>
+          <p:cNvPr id="3" name="Notes Placeholder 2"/>
+          <p:cNvSpPr>
+            <a:spLocks noGrp="1"/>
+          </p:cNvSpPr>
+          <p:nvPr>
+            <p:ph type="body" idx="1"/>
+          </p:nvPr>
+        </p:nvSpPr>
+        <p:spPr/>
+        <p:txBody>
+          <a:bodyPr/>
+          <a:lstStyle/>
+          <a:p>
+            <a:r>
+              <a:rPr lang="en-US" dirty="0"/>
+              <a:t>peter</a:t>
+            </a:r>
+          </a:p>
+        </p:txBody>
+      </p:sp>
+      <p:sp>
+        <p:nvSpPr>
+          <p:cNvPr id="4" name="Slide Number Placeholder 3"/>
+          <p:cNvSpPr>
+            <a:spLocks noGrp="1"/>
+          </p:cNvSpPr>
+          <p:nvPr>
+            <p:ph type="sldNum" sz="quarter" idx="5"/>
+          </p:nvPr>
+        </p:nvSpPr>
+        <p:spPr/>
+        <p:txBody>
+          <a:bodyPr/>
+          <a:lstStyle/>
+          <a:p>
+            <a:fld id="{0B6E914B-5440-AA40-899C-F5E9DD972569}" type="slidenum">
+              <a:rPr lang="en-US" smtClean="0"/>
+              <a:t>5</a:t>
+            </a:fld>
+            <a:endParaRPr lang="en-US"/>
+          </a:p>
+        </p:txBody>
+      </p:sp>
+    </p:spTree>
+    <p:extLst>
+      <p:ext uri="{BB962C8B-B14F-4D97-AF65-F5344CB8AC3E}">
+        <p14:creationId xmlns:p14="http://schemas.microsoft.com/office/powerpoint/2010/main" val="3273915646"/>
+      </p:ext>
+    </p:extLst>
+  </p:cSld>
+  <p:clrMapOvr>
+    <a:masterClrMapping/>
+  </p:clrMapOvr>
+</p:notes>
+</file>
+
+<file path=ppt/notesSlides/notesSlide5.xml><?xml version="1.0" encoding="utf-8"?>
+<p:notes xmlns:a="http://schemas.openxmlformats.org/drawingml/2006/main" xmlns:r="http://schemas.openxmlformats.org/officeDocument/2006/relationships" xmlns:p="http://schemas.openxmlformats.org/presentationml/2006/main">
+  <p:cSld>
+    <p:spTree>
+      <p:nvGrpSpPr>
+        <p:cNvPr id="1" name=""/>
+        <p:cNvGrpSpPr/>
+        <p:nvPr/>
+      </p:nvGrpSpPr>
+      <p:grpSpPr>
+        <a:xfrm>
+          <a:off x="0" y="0"/>
+          <a:ext cx="0" cy="0"/>
+          <a:chOff x="0" y="0"/>
+          <a:chExt cx="0" cy="0"/>
+        </a:xfrm>
+      </p:grpSpPr>
+      <p:sp>
+        <p:nvSpPr>
+          <p:cNvPr id="2" name="Slide Image Placeholder 1"/>
+          <p:cNvSpPr>
+            <a:spLocks noGrp="1" noRot="1" noChangeAspect="1"/>
+          </p:cNvSpPr>
+          <p:nvPr>
+            <p:ph type="sldImg"/>
+          </p:nvPr>
+        </p:nvSpPr>
+        <p:spPr/>
+      </p:sp>
+      <p:sp>
+        <p:nvSpPr>
+          <p:cNvPr id="3" name="Notes Placeholder 2"/>
+          <p:cNvSpPr>
+            <a:spLocks noGrp="1"/>
+          </p:cNvSpPr>
+          <p:nvPr>
+            <p:ph type="body" idx="1"/>
+          </p:nvPr>
+        </p:nvSpPr>
+        <p:spPr/>
+        <p:txBody>
+          <a:bodyPr/>
+          <a:lstStyle/>
+          <a:p>
+            <a:r>
+              <a:rPr lang="en-US" dirty="0"/>
+              <a:t>peter</a:t>
+            </a:r>
+          </a:p>
+        </p:txBody>
+      </p:sp>
+      <p:sp>
+        <p:nvSpPr>
+          <p:cNvPr id="4" name="Slide Number Placeholder 3"/>
+          <p:cNvSpPr>
+            <a:spLocks noGrp="1"/>
+          </p:cNvSpPr>
+          <p:nvPr>
+            <p:ph type="sldNum" sz="quarter" idx="5"/>
+          </p:nvPr>
+        </p:nvSpPr>
+        <p:spPr/>
+        <p:txBody>
+          <a:bodyPr/>
+          <a:lstStyle/>
+          <a:p>
+            <a:fld id="{0B6E914B-5440-AA40-899C-F5E9DD972569}" type="slidenum">
+              <a:rPr lang="en-US" smtClean="0"/>
+              <a:t>6</a:t>
+            </a:fld>
+            <a:endParaRPr lang="en-US"/>
+          </a:p>
+        </p:txBody>
+      </p:sp>
+    </p:spTree>
+    <p:extLst>
+      <p:ext uri="{BB962C8B-B14F-4D97-AF65-F5344CB8AC3E}">
+        <p14:creationId xmlns:p14="http://schemas.microsoft.com/office/powerpoint/2010/main" val="3856300296"/>
+      </p:ext>
+    </p:extLst>
+  </p:cSld>
+  <p:clrMapOvr>
+    <a:masterClrMapping/>
+  </p:clrMapOvr>
+</p:notes>
+</file>
+
+<file path=ppt/notesSlides/notesSlide6.xml><?xml version="1.0" encoding="utf-8"?>
+<p:notes xmlns:a="http://schemas.openxmlformats.org/drawingml/2006/main" xmlns:r="http://schemas.openxmlformats.org/officeDocument/2006/relationships" xmlns:p="http://schemas.openxmlformats.org/presentationml/2006/main">
+  <p:cSld>
+    <p:spTree>
+      <p:nvGrpSpPr>
+        <p:cNvPr id="1" name=""/>
+        <p:cNvGrpSpPr/>
+        <p:nvPr/>
+      </p:nvGrpSpPr>
+      <p:grpSpPr>
+        <a:xfrm>
+          <a:off x="0" y="0"/>
+          <a:ext cx="0" cy="0"/>
+          <a:chOff x="0" y="0"/>
+          <a:chExt cx="0" cy="0"/>
+        </a:xfrm>
+      </p:grpSpPr>
+      <p:sp>
+        <p:nvSpPr>
+          <p:cNvPr id="2" name="Slide Image Placeholder 1"/>
+          <p:cNvSpPr>
+            <a:spLocks noGrp="1" noRot="1" noChangeAspect="1"/>
+          </p:cNvSpPr>
+          <p:nvPr>
+            <p:ph type="sldImg"/>
+          </p:nvPr>
+        </p:nvSpPr>
+        <p:spPr/>
+      </p:sp>
+      <p:sp>
+        <p:nvSpPr>
+          <p:cNvPr id="3" name="Notes Placeholder 2"/>
+          <p:cNvSpPr>
+            <a:spLocks noGrp="1"/>
+          </p:cNvSpPr>
+          <p:nvPr>
+            <p:ph type="body" idx="1"/>
+          </p:nvPr>
+        </p:nvSpPr>
+        <p:spPr/>
+        <p:txBody>
+          <a:bodyPr/>
+          <a:lstStyle/>
+          <a:p>
+            <a:r>
+              <a:rPr lang="en-US" dirty="0"/>
+              <a:t>End peter</a:t>
+            </a:r>
+          </a:p>
+        </p:txBody>
+      </p:sp>
+      <p:sp>
+        <p:nvSpPr>
+          <p:cNvPr id="4" name="Slide Number Placeholder 3"/>
+          <p:cNvSpPr>
+            <a:spLocks noGrp="1"/>
+          </p:cNvSpPr>
+          <p:nvPr>
+            <p:ph type="sldNum" sz="quarter" idx="5"/>
+          </p:nvPr>
+        </p:nvSpPr>
+        <p:spPr/>
+        <p:txBody>
+          <a:bodyPr/>
+          <a:lstStyle/>
+          <a:p>
+            <a:fld id="{0B6E914B-5440-AA40-899C-F5E9DD972569}" type="slidenum">
+              <a:rPr lang="en-US" smtClean="0"/>
+              <a:t>8</a:t>
+            </a:fld>
+            <a:endParaRPr lang="en-US"/>
+          </a:p>
+        </p:txBody>
+      </p:sp>
+    </p:spTree>
+    <p:extLst>
+      <p:ext uri="{BB962C8B-B14F-4D97-AF65-F5344CB8AC3E}">
+        <p14:creationId xmlns:p14="http://schemas.microsoft.com/office/powerpoint/2010/main" val="4131409806"/>
+      </p:ext>
+    </p:extLst>
+  </p:cSld>
+  <p:clrMapOvr>
+    <a:masterClrMapping/>
+  </p:clrMapOvr>
+</p:notes>
+</file>
+
+<file path=ppt/notesSlides/notesSlide7.xml><?xml version="1.0" encoding="utf-8"?>
+<p:notes xmlns:a="http://schemas.openxmlformats.org/drawingml/2006/main" xmlns:r="http://schemas.openxmlformats.org/officeDocument/2006/relationships" xmlns:p="http://schemas.openxmlformats.org/presentationml/2006/main">
+  <p:cSld>
+    <p:spTree>
+      <p:nvGrpSpPr>
+        <p:cNvPr id="1" name=""/>
+        <p:cNvGrpSpPr/>
+        <p:nvPr/>
+      </p:nvGrpSpPr>
+      <p:grpSpPr>
+        <a:xfrm>
+          <a:off x="0" y="0"/>
+          <a:ext cx="0" cy="0"/>
+          <a:chOff x="0" y="0"/>
+          <a:chExt cx="0" cy="0"/>
+        </a:xfrm>
+      </p:grpSpPr>
+      <p:sp>
+        <p:nvSpPr>
+          <p:cNvPr id="2" name="Slide Image Placeholder 1"/>
+          <p:cNvSpPr>
+            <a:spLocks noGrp="1" noRot="1" noChangeAspect="1"/>
+          </p:cNvSpPr>
+          <p:nvPr>
+            <p:ph type="sldImg"/>
+          </p:nvPr>
+        </p:nvSpPr>
+        <p:spPr/>
+      </p:sp>
+      <p:sp>
+        <p:nvSpPr>
+          <p:cNvPr id="3" name="Notes Placeholder 2"/>
+          <p:cNvSpPr>
+            <a:spLocks noGrp="1"/>
+          </p:cNvSpPr>
+          <p:nvPr>
+            <p:ph type="body" idx="1"/>
+          </p:nvPr>
+        </p:nvSpPr>
+        <p:spPr/>
+        <p:txBody>
+          <a:bodyPr/>
+          <a:lstStyle/>
+          <a:p>
+            <a:r>
+              <a:rPr lang="en-US" dirty="0"/>
+              <a:t>Ab </a:t>
+            </a:r>
+            <a:r>
+              <a:rPr lang="en-US" dirty="0" err="1"/>
+              <a:t>hier</a:t>
+            </a:r>
+            <a:r>
+              <a:rPr lang="en-US" dirty="0"/>
+              <a:t> </a:t>
+            </a:r>
+            <a:r>
+              <a:rPr lang="en-US" dirty="0" err="1"/>
+              <a:t>raphi</a:t>
+            </a:r>
+            <a:endParaRPr lang="en-US" dirty="0"/>
+          </a:p>
+        </p:txBody>
+      </p:sp>
+      <p:sp>
+        <p:nvSpPr>
+          <p:cNvPr id="4" name="Slide Number Placeholder 3"/>
+          <p:cNvSpPr>
+            <a:spLocks noGrp="1"/>
+          </p:cNvSpPr>
+          <p:nvPr>
+            <p:ph type="sldNum" sz="quarter" idx="5"/>
+          </p:nvPr>
+        </p:nvSpPr>
+        <p:spPr/>
+        <p:txBody>
+          <a:bodyPr/>
+          <a:lstStyle/>
+          <a:p>
+            <a:fld id="{0B6E914B-5440-AA40-899C-F5E9DD972569}" type="slidenum">
+              <a:rPr lang="en-US" smtClean="0"/>
+              <a:t>9</a:t>
+            </a:fld>
+            <a:endParaRPr lang="en-US"/>
+          </a:p>
+        </p:txBody>
+      </p:sp>
+    </p:spTree>
+    <p:extLst>
+      <p:ext uri="{BB962C8B-B14F-4D97-AF65-F5344CB8AC3E}">
+        <p14:creationId xmlns:p14="http://schemas.microsoft.com/office/powerpoint/2010/main" val="1959287395"/>
+      </p:ext>
+    </p:extLst>
+  </p:cSld>
+  <p:clrMapOvr>
+    <a:masterClrMapping/>
+  </p:clrMapOvr>
+</p:notes>
+</file>
+
+<file path=ppt/notesSlides/notesSlide8.xml><?xml version="1.0" encoding="utf-8"?>
+<p:notes xmlns:a="http://schemas.openxmlformats.org/drawingml/2006/main" xmlns:r="http://schemas.openxmlformats.org/officeDocument/2006/relationships" xmlns:p="http://schemas.openxmlformats.org/presentationml/2006/main">
+  <p:cSld>
+    <p:spTree>
+      <p:nvGrpSpPr>
+        <p:cNvPr id="1" name=""/>
+        <p:cNvGrpSpPr/>
+        <p:nvPr/>
+      </p:nvGrpSpPr>
+      <p:grpSpPr>
+        <a:xfrm>
+          <a:off x="0" y="0"/>
+          <a:ext cx="0" cy="0"/>
+          <a:chOff x="0" y="0"/>
+          <a:chExt cx="0" cy="0"/>
+        </a:xfrm>
+      </p:grpSpPr>
+      <p:sp>
+        <p:nvSpPr>
+          <p:cNvPr id="2" name="Slide Image Placeholder 1"/>
+          <p:cNvSpPr>
+            <a:spLocks noGrp="1" noRot="1" noChangeAspect="1"/>
+          </p:cNvSpPr>
+          <p:nvPr>
+            <p:ph type="sldImg"/>
+          </p:nvPr>
+        </p:nvSpPr>
+        <p:spPr/>
+      </p:sp>
+      <p:sp>
+        <p:nvSpPr>
+          <p:cNvPr id="3" name="Notes Placeholder 2"/>
+          <p:cNvSpPr>
+            <a:spLocks noGrp="1"/>
+          </p:cNvSpPr>
+          <p:nvPr>
+            <p:ph type="body" idx="1"/>
+          </p:nvPr>
+        </p:nvSpPr>
+        <p:spPr/>
+        <p:txBody>
+          <a:bodyPr/>
+          <a:lstStyle/>
+          <a:p>
+            <a:pPr marL="0" marR="0" lvl="0" indent="0" algn="l" defTabSz="914400" rtl="0" eaLnBrk="1" fontAlgn="auto" latinLnBrk="0" hangingPunct="1">
+              <a:lnSpc>
+                <a:spcPct val="100000"/>
+              </a:lnSpc>
+              <a:spcBef>
+                <a:spcPts val="0"/>
+              </a:spcBef>
+              <a:spcAft>
+                <a:spcPts val="0"/>
+              </a:spcAft>
+              <a:buClrTx/>
+              <a:buSzTx/>
+              <a:buFontTx/>
+              <a:buNone/>
+              <a:tabLst/>
+              <a:defRPr/>
+            </a:pPr>
+            <a:r>
+              <a:rPr lang="en-US" dirty="0"/>
+              <a:t>Bis </a:t>
+            </a:r>
+            <a:r>
+              <a:rPr lang="en-US" dirty="0" err="1"/>
+              <a:t>hier</a:t>
+            </a:r>
+            <a:r>
+              <a:rPr lang="en-US" dirty="0"/>
+              <a:t> </a:t>
+            </a:r>
+            <a:r>
+              <a:rPr lang="en-US" dirty="0" err="1"/>
+              <a:t>raphi</a:t>
+            </a:r>
+            <a:endParaRPr lang="en-US" dirty="0"/>
+          </a:p>
+          <a:p>
+            <a:endParaRPr lang="en-US" dirty="0"/>
+          </a:p>
+        </p:txBody>
+      </p:sp>
+      <p:sp>
+        <p:nvSpPr>
+          <p:cNvPr id="4" name="Slide Number Placeholder 3"/>
+          <p:cNvSpPr>
+            <a:spLocks noGrp="1"/>
+          </p:cNvSpPr>
+          <p:nvPr>
+            <p:ph type="sldNum" sz="quarter" idx="5"/>
+          </p:nvPr>
+        </p:nvSpPr>
+        <p:spPr/>
+        <p:txBody>
+          <a:bodyPr/>
+          <a:lstStyle/>
+          <a:p>
+            <a:fld id="{0B6E914B-5440-AA40-899C-F5E9DD972569}" type="slidenum">
+              <a:rPr lang="en-US" smtClean="0"/>
+              <a:t>10</a:t>
+            </a:fld>
+            <a:endParaRPr lang="en-US"/>
+          </a:p>
+        </p:txBody>
+      </p:sp>
+    </p:spTree>
+    <p:extLst>
+      <p:ext uri="{BB962C8B-B14F-4D97-AF65-F5344CB8AC3E}">
+        <p14:creationId xmlns:p14="http://schemas.microsoft.com/office/powerpoint/2010/main" val="524652614"/>
+      </p:ext>
+    </p:extLst>
+  </p:cSld>
+  <p:clrMapOvr>
+    <a:masterClrMapping/>
+  </p:clrMapOvr>
+</p:notes>
+</file>
+
+<file path=ppt/notesSlides/notesSlide9.xml><?xml version="1.0" encoding="utf-8"?>
+<p:notes xmlns:a="http://schemas.openxmlformats.org/drawingml/2006/main" xmlns:r="http://schemas.openxmlformats.org/officeDocument/2006/relationships" xmlns:p="http://schemas.openxmlformats.org/presentationml/2006/main">
+  <p:cSld>
+    <p:spTree>
+      <p:nvGrpSpPr>
+        <p:cNvPr id="1" name=""/>
+        <p:cNvGrpSpPr/>
+        <p:nvPr/>
+      </p:nvGrpSpPr>
+      <p:grpSpPr>
+        <a:xfrm>
+          <a:off x="0" y="0"/>
+          <a:ext cx="0" cy="0"/>
+          <a:chOff x="0" y="0"/>
+          <a:chExt cx="0" cy="0"/>
+        </a:xfrm>
+      </p:grpSpPr>
+      <p:sp>
+        <p:nvSpPr>
+          <p:cNvPr id="2" name="Slide Image Placeholder 1"/>
+          <p:cNvSpPr>
+            <a:spLocks noGrp="1" noRot="1" noChangeAspect="1"/>
+          </p:cNvSpPr>
+          <p:nvPr>
+            <p:ph type="sldImg"/>
+          </p:nvPr>
+        </p:nvSpPr>
+        <p:spPr/>
+      </p:sp>
+      <p:sp>
+        <p:nvSpPr>
+          <p:cNvPr id="3" name="Notes Placeholder 2"/>
+          <p:cNvSpPr>
+            <a:spLocks noGrp="1"/>
+          </p:cNvSpPr>
+          <p:nvPr>
+            <p:ph type="body" idx="1"/>
+          </p:nvPr>
+        </p:nvSpPr>
+        <p:spPr/>
+        <p:txBody>
+          <a:bodyPr/>
+          <a:lstStyle/>
+          <a:p>
+            <a:r>
+              <a:rPr lang="en-US" dirty="0" err="1"/>
+              <a:t>dilyara</a:t>
+            </a:r>
+            <a:endParaRPr lang="en-US" dirty="0"/>
+          </a:p>
+        </p:txBody>
+      </p:sp>
+      <p:sp>
+        <p:nvSpPr>
+          <p:cNvPr id="4" name="Slide Number Placeholder 3"/>
+          <p:cNvSpPr>
+            <a:spLocks noGrp="1"/>
+          </p:cNvSpPr>
+          <p:nvPr>
+            <p:ph type="sldNum" sz="quarter" idx="5"/>
+          </p:nvPr>
+        </p:nvSpPr>
+        <p:spPr/>
+        <p:txBody>
+          <a:bodyPr/>
+          <a:lstStyle/>
+          <a:p>
+            <a:fld id="{0B6E914B-5440-AA40-899C-F5E9DD972569}" type="slidenum">
+              <a:rPr lang="en-US" smtClean="0"/>
+              <a:t>11</a:t>
+            </a:fld>
+            <a:endParaRPr lang="en-US"/>
+          </a:p>
+        </p:txBody>
+      </p:sp>
+    </p:spTree>
+    <p:extLst>
+      <p:ext uri="{BB962C8B-B14F-4D97-AF65-F5344CB8AC3E}">
+        <p14:creationId xmlns:p14="http://schemas.microsoft.com/office/powerpoint/2010/main" val="378112543"/>
       </p:ext>
     </p:extLst>
   </p:cSld>
@@ -739,7 +1499,7 @@
           <a:p>
             <a:fld id="{5BCAD085-E8A6-8845-BD4E-CB4CCA059FC4}" type="datetimeFigureOut">
               <a:rPr lang="en-US" smtClean="0"/>
-              <a:t>6/21/26</a:t>
+              <a:t>6/22/26</a:t>
             </a:fld>
             <a:endParaRPr lang="en-US"/>
           </a:p>
@@ -909,7 +1669,7 @@
           <a:p>
             <a:fld id="{5BCAD085-E8A6-8845-BD4E-CB4CCA059FC4}" type="datetimeFigureOut">
               <a:rPr lang="en-US" smtClean="0"/>
-              <a:t>6/21/26</a:t>
+              <a:t>6/22/26</a:t>
             </a:fld>
             <a:endParaRPr lang="en-US"/>
           </a:p>
@@ -1089,7 +1849,7 @@
           <a:p>
             <a:fld id="{5BCAD085-E8A6-8845-BD4E-CB4CCA059FC4}" type="datetimeFigureOut">
               <a:rPr lang="en-US" smtClean="0"/>
-              <a:t>6/21/26</a:t>
+              <a:t>6/22/26</a:t>
             </a:fld>
             <a:endParaRPr lang="en-US"/>
           </a:p>
@@ -1259,7 +2019,7 @@
           <a:p>
             <a:fld id="{5BCAD085-E8A6-8845-BD4E-CB4CCA059FC4}" type="datetimeFigureOut">
               <a:rPr lang="en-US" smtClean="0"/>
-              <a:t>6/21/26</a:t>
+              <a:t>6/22/26</a:t>
             </a:fld>
             <a:endParaRPr lang="en-US"/>
           </a:p>
@@ -1527,7 +2287,7 @@
           <a:p>
             <a:fld id="{5BCAD085-E8A6-8845-BD4E-CB4CCA059FC4}" type="datetimeFigureOut">
               <a:rPr lang="en-US" smtClean="0"/>
-              <a:t>6/21/26</a:t>
+              <a:t>6/22/26</a:t>
             </a:fld>
             <a:endParaRPr lang="en-US"/>
           </a:p>
@@ -1759,7 +2519,7 @@
           <a:p>
             <a:fld id="{5BCAD085-E8A6-8845-BD4E-CB4CCA059FC4}" type="datetimeFigureOut">
               <a:rPr lang="en-US" smtClean="0"/>
-              <a:t>6/21/26</a:t>
+              <a:t>6/22/26</a:t>
             </a:fld>
             <a:endParaRPr lang="en-US"/>
           </a:p>
@@ -2118,7 +2878,7 @@
           <a:p>
             <a:fld id="{5BCAD085-E8A6-8845-BD4E-CB4CCA059FC4}" type="datetimeFigureOut">
               <a:rPr lang="en-US" smtClean="0"/>
-              <a:t>6/21/26</a:t>
+              <a:t>6/22/26</a:t>
             </a:fld>
             <a:endParaRPr lang="en-US"/>
           </a:p>
@@ -2259,7 +3019,7 @@
           <a:p>
             <a:fld id="{5BCAD085-E8A6-8845-BD4E-CB4CCA059FC4}" type="datetimeFigureOut">
               <a:rPr lang="en-US" smtClean="0"/>
-              <a:t>6/21/26</a:t>
+              <a:t>6/22/26</a:t>
             </a:fld>
             <a:endParaRPr lang="en-US"/>
           </a:p>
@@ -2354,7 +3114,7 @@
           <a:p>
             <a:fld id="{5BCAD085-E8A6-8845-BD4E-CB4CCA059FC4}" type="datetimeFigureOut">
               <a:rPr lang="en-US" smtClean="0"/>
-              <a:t>6/21/26</a:t>
+              <a:t>6/22/26</a:t>
             </a:fld>
             <a:endParaRPr lang="en-US"/>
           </a:p>
@@ -2711,7 +3471,7 @@
           <a:p>
             <a:fld id="{5BCAD085-E8A6-8845-BD4E-CB4CCA059FC4}" type="datetimeFigureOut">
               <a:rPr lang="en-US" smtClean="0"/>
-              <a:t>6/21/26</a:t>
+              <a:t>6/22/26</a:t>
             </a:fld>
             <a:endParaRPr lang="en-US"/>
           </a:p>
@@ -3068,7 +3828,7 @@
           <a:p>
             <a:fld id="{5BCAD085-E8A6-8845-BD4E-CB4CCA059FC4}" type="datetimeFigureOut">
               <a:rPr lang="en-US" smtClean="0"/>
-              <a:t>6/21/26</a:t>
+              <a:t>6/22/26</a:t>
             </a:fld>
             <a:endParaRPr lang="en-US"/>
           </a:p>
@@ -3310,7 +4070,7 @@
           <a:p>
             <a:fld id="{5BCAD085-E8A6-8845-BD4E-CB4CCA059FC4}" type="datetimeFigureOut">
               <a:rPr lang="en-US" smtClean="0"/>
-              <a:t>6/21/26</a:t>
+              <a:t>6/22/26</a:t>
             </a:fld>
             <a:endParaRPr lang="en-US"/>
           </a:p>
@@ -4049,7 +4809,7 @@
     <p:bg>
       <p:bgPr>
         <a:solidFill>
-          <a:schemeClr val="bg1"/>
+          <a:schemeClr val="accent2"/>
         </a:solidFill>
         <a:effectLst/>
       </p:bgPr>
@@ -4070,331 +4830,76 @@
       </p:grpSpPr>
       <p:sp>
         <p:nvSpPr>
-          <p:cNvPr id="8" name="Rectangle 7">
+          <p:cNvPr id="2" name="Title 1">
             <a:extLst>
               <a:ext uri="{FF2B5EF4-FFF2-40B4-BE49-F238E27FC236}">
-                <a16:creationId xmlns:a16="http://schemas.microsoft.com/office/drawing/2014/main" id="{C33976D1-3430-450C-A978-87A9A6E8E71F}"/>
-              </a:ext>
-              <a:ext uri="{C183D7F6-B498-43B3-948B-1728B52AA6E4}">
-                <adec:decorative xmlns:adec="http://schemas.microsoft.com/office/drawing/2017/decorative" val="1"/>
+                <a16:creationId xmlns:a16="http://schemas.microsoft.com/office/drawing/2014/main" id="{EE088AF7-0B25-7949-8B1E-F97E5E38DFCC}"/>
               </a:ext>
             </a:extLst>
           </p:cNvPr>
           <p:cNvSpPr>
-            <a:spLocks noGrp="1" noRot="1" noChangeAspect="1" noMove="1" noResize="1" noEditPoints="1" noAdjustHandles="1" noChangeArrowheads="1" noChangeShapeType="1" noTextEdit="1"/>
-          </p:cNvSpPr>
-          <p:nvPr>
-            <p:extLst>
-              <p:ext uri="{386F3935-93C4-4BCD-93E2-E3B085C9AB24}">
-                <p16:designElem xmlns:p16="http://schemas.microsoft.com/office/powerpoint/2015/main" val="1"/>
-              </p:ext>
-            </p:extLst>
+            <a:spLocks noGrp="1"/>
+          </p:cNvSpPr>
+          <p:nvPr>
+            <p:ph type="title"/>
           </p:nvPr>
         </p:nvSpPr>
         <p:spPr>
           <a:xfrm>
-            <a:off x="0" y="0"/>
-            <a:ext cx="12188825" cy="6858000"/>
+            <a:off x="1599783" y="4816249"/>
+            <a:ext cx="8989258" cy="1645759"/>
+          </a:xfrm>
+        </p:spPr>
+        <p:txBody>
+          <a:bodyPr vert="horz" lIns="274320" tIns="182880" rIns="274320" bIns="182880" rtlCol="0" anchor="ctr" anchorCtr="1">
+            <a:normAutofit/>
+          </a:bodyPr>
+          <a:lstStyle/>
+          <a:p>
+            <a:pPr defTabSz="914400"/>
+            <a:r>
+              <a:rPr lang="en-US" sz="3800" dirty="0"/>
+              <a:t>logging</a:t>
+            </a:r>
+          </a:p>
+        </p:txBody>
+      </p:sp>
+      <p:pic>
+        <p:nvPicPr>
+          <p:cNvPr id="5" name="Picture 4" descr="A screenshot of a computer program&#10;&#10;AI-generated content may be incorrect.">
+            <a:extLst>
+              <a:ext uri="{FF2B5EF4-FFF2-40B4-BE49-F238E27FC236}">
+                <a16:creationId xmlns:a16="http://schemas.microsoft.com/office/drawing/2014/main" id="{A7364D52-A79E-55DA-9FB6-BF2ECA8C5008}"/>
+              </a:ext>
+            </a:extLst>
+          </p:cNvPr>
+          <p:cNvPicPr>
+            <a:picLocks noChangeAspect="1"/>
+          </p:cNvPicPr>
+          <p:nvPr/>
+        </p:nvPicPr>
+        <p:blipFill>
+          <a:blip r:embed="rId3"/>
+          <a:stretch>
+            <a:fillRect/>
+          </a:stretch>
+        </p:blipFill>
+        <p:spPr>
+          <a:xfrm>
+            <a:off x="1599783" y="262239"/>
+            <a:ext cx="8989258" cy="4219447"/>
           </a:xfrm>
           <a:prstGeom prst="rect">
             <a:avLst/>
           </a:prstGeom>
-          <a:solidFill>
-            <a:schemeClr val="accent2"/>
-          </a:solidFill>
-          <a:ln>
-            <a:noFill/>
-          </a:ln>
         </p:spPr>
-        <p:style>
-          <a:lnRef idx="2">
-            <a:schemeClr val="accent1">
-              <a:shade val="50000"/>
-            </a:schemeClr>
-          </a:lnRef>
-          <a:fillRef idx="1">
-            <a:schemeClr val="accent1"/>
-          </a:fillRef>
-          <a:effectRef idx="0">
-            <a:schemeClr val="accent1"/>
-          </a:effectRef>
-          <a:fontRef idx="minor">
-            <a:schemeClr val="lt1"/>
-          </a:fontRef>
-        </p:style>
-        <p:txBody>
-          <a:bodyPr rtlCol="0" anchor="ctr"/>
-          <a:lstStyle/>
-          <a:p>
-            <a:pPr algn="ctr"/>
-            <a:endParaRPr lang="en-US"/>
-          </a:p>
-        </p:txBody>
-      </p:sp>
-      <p:sp>
-        <p:nvSpPr>
-          <p:cNvPr id="10" name="Rectangle 9">
-            <a:extLst>
-              <a:ext uri="{FF2B5EF4-FFF2-40B4-BE49-F238E27FC236}">
-                <a16:creationId xmlns:a16="http://schemas.microsoft.com/office/drawing/2014/main" id="{7D6AAC78-7D86-415A-ADC1-2B474807960C}"/>
-              </a:ext>
-              <a:ext uri="{C183D7F6-B498-43B3-948B-1728B52AA6E4}">
-                <adec:decorative xmlns:adec="http://schemas.microsoft.com/office/drawing/2017/decorative" val="1"/>
-              </a:ext>
-            </a:extLst>
-          </p:cNvPr>
-          <p:cNvSpPr>
-            <a:spLocks noGrp="1" noRot="1" noChangeAspect="1" noMove="1" noResize="1" noEditPoints="1" noAdjustHandles="1" noChangeArrowheads="1" noChangeShapeType="1" noTextEdit="1"/>
-          </p:cNvSpPr>
-          <p:nvPr>
-            <p:extLst>
-              <p:ext uri="{386F3935-93C4-4BCD-93E2-E3B085C9AB24}">
-                <p16:designElem xmlns:p16="http://schemas.microsoft.com/office/powerpoint/2015/main" val="1"/>
-              </p:ext>
-            </p:extLst>
-          </p:nvPr>
-        </p:nvSpPr>
-        <p:spPr>
-          <a:xfrm>
-            <a:off x="1249354" y="1248156"/>
-            <a:ext cx="9690116" cy="4361688"/>
-          </a:xfrm>
-          <a:prstGeom prst="rect">
-            <a:avLst/>
-          </a:prstGeom>
-          <a:solidFill>
-            <a:srgbClr val="FFFFFF"/>
-          </a:solidFill>
-          <a:ln>
-            <a:noFill/>
-          </a:ln>
-        </p:spPr>
-        <p:style>
-          <a:lnRef idx="2">
-            <a:schemeClr val="accent1">
-              <a:shade val="50000"/>
-            </a:schemeClr>
-          </a:lnRef>
-          <a:fillRef idx="1">
-            <a:schemeClr val="accent1"/>
-          </a:fillRef>
-          <a:effectRef idx="0">
-            <a:schemeClr val="accent1"/>
-          </a:effectRef>
-          <a:fontRef idx="minor">
-            <a:schemeClr val="lt1"/>
-          </a:fontRef>
-        </p:style>
-        <p:txBody>
-          <a:bodyPr rtlCol="0" anchor="ctr"/>
-          <a:lstStyle/>
-          <a:p>
-            <a:pPr algn="ctr"/>
-            <a:endParaRPr lang="en-US"/>
-          </a:p>
-        </p:txBody>
-      </p:sp>
-      <p:sp>
-        <p:nvSpPr>
-          <p:cNvPr id="12" name="Rectangle 11">
-            <a:extLst>
-              <a:ext uri="{FF2B5EF4-FFF2-40B4-BE49-F238E27FC236}">
-                <a16:creationId xmlns:a16="http://schemas.microsoft.com/office/drawing/2014/main" id="{F2A658D9-F185-44F1-BA33-D50320D1D078}"/>
-              </a:ext>
-              <a:ext uri="{C183D7F6-B498-43B3-948B-1728B52AA6E4}">
-                <adec:decorative xmlns:adec="http://schemas.microsoft.com/office/drawing/2017/decorative" val="1"/>
-              </a:ext>
-            </a:extLst>
-          </p:cNvPr>
-          <p:cNvSpPr>
-            <a:spLocks noGrp="1" noRot="1" noChangeAspect="1" noMove="1" noResize="1" noEditPoints="1" noAdjustHandles="1" noChangeArrowheads="1" noChangeShapeType="1" noTextEdit="1"/>
-          </p:cNvSpPr>
-          <p:nvPr>
-            <p:extLst>
-              <p:ext uri="{386F3935-93C4-4BCD-93E2-E3B085C9AB24}">
-                <p16:designElem xmlns:p16="http://schemas.microsoft.com/office/powerpoint/2015/main" val="1"/>
-              </p:ext>
-            </p:extLst>
-          </p:nvPr>
-        </p:nvSpPr>
-        <p:spPr>
-          <a:xfrm>
-            <a:off x="1061951" y="1060704"/>
-            <a:ext cx="10064922" cy="4736592"/>
-          </a:xfrm>
-          <a:prstGeom prst="rect">
-            <a:avLst/>
-          </a:prstGeom>
-          <a:noFill/>
-          <a:ln w="31750" cap="sq">
-            <a:solidFill>
-              <a:srgbClr val="FFFFFF"/>
-            </a:solidFill>
-            <a:miter lim="800000"/>
-          </a:ln>
-        </p:spPr>
-        <p:style>
-          <a:lnRef idx="2">
-            <a:schemeClr val="accent1">
-              <a:shade val="50000"/>
-            </a:schemeClr>
-          </a:lnRef>
-          <a:fillRef idx="1">
-            <a:schemeClr val="accent1"/>
-          </a:fillRef>
-          <a:effectRef idx="0">
-            <a:schemeClr val="accent1"/>
-          </a:effectRef>
-          <a:fontRef idx="minor">
-            <a:schemeClr val="lt1"/>
-          </a:fontRef>
-        </p:style>
-        <p:txBody>
-          <a:bodyPr rtlCol="0" anchor="ctr"/>
-          <a:lstStyle/>
-          <a:p>
-            <a:pPr algn="ctr"/>
-            <a:endParaRPr lang="en-US"/>
-          </a:p>
-        </p:txBody>
-      </p:sp>
-      <p:sp>
-        <p:nvSpPr>
-          <p:cNvPr id="2" name="Title 1"/>
-          <p:cNvSpPr>
-            <a:spLocks noGrp="1"/>
-          </p:cNvSpPr>
-          <p:nvPr>
-            <p:ph type="title"/>
-          </p:nvPr>
-        </p:nvSpPr>
-        <p:spPr>
-          <a:xfrm>
-            <a:off x="2230554" y="467418"/>
-            <a:ext cx="7727716" cy="1188720"/>
-          </a:xfrm>
-          <a:solidFill>
-            <a:srgbClr val="FFFFFF"/>
-          </a:solidFill>
-        </p:spPr>
-        <p:txBody>
-          <a:bodyPr>
-            <a:normAutofit/>
-          </a:bodyPr>
-          <a:lstStyle/>
-          <a:p>
-            <a:r>
-              <a:t>Accuracy: training vs real world</a:t>
-            </a:r>
-          </a:p>
-        </p:txBody>
-      </p:sp>
-      <p:sp>
-        <p:nvSpPr>
-          <p:cNvPr id="3" name="Content Placeholder 2"/>
-          <p:cNvSpPr>
-            <a:spLocks noGrp="1"/>
-          </p:cNvSpPr>
-          <p:nvPr>
-            <p:ph idx="1"/>
-          </p:nvPr>
-        </p:nvSpPr>
-        <p:spPr>
-          <a:xfrm>
-            <a:off x="1705617" y="2291262"/>
-            <a:ext cx="8777226" cy="2879256"/>
-          </a:xfrm>
-        </p:spPr>
-        <p:txBody>
-          <a:bodyPr>
-            <a:normAutofit/>
-          </a:bodyPr>
-          <a:lstStyle/>
-          <a:p>
-            <a:pPr>
-              <a:lnSpc>
-                <a:spcPct val="90000"/>
-              </a:lnSpc>
-            </a:pPr>
-            <a:r>
-              <a:rPr lang="en-GB" dirty="0">
-                <a:solidFill>
-                  <a:schemeClr val="tx1"/>
-                </a:solidFill>
-              </a:rPr>
-              <a:t>Training run summary (printed at end of 03_train.py):</a:t>
-            </a:r>
-          </a:p>
-          <a:p>
-            <a:pPr lvl="1">
-              <a:lnSpc>
-                <a:spcPct val="90000"/>
-              </a:lnSpc>
-            </a:pPr>
-            <a:r>
-              <a:rPr lang="en-GB" dirty="0"/>
-              <a:t>Train Loss: 0.5232 | Train Accuracy: 0.7783 </a:t>
-            </a:r>
-          </a:p>
-          <a:p>
-            <a:pPr lvl="1">
-              <a:lnSpc>
-                <a:spcPct val="90000"/>
-              </a:lnSpc>
-            </a:pPr>
-            <a:r>
-              <a:rPr lang="en-GB" dirty="0"/>
-              <a:t>Val Loss: 0.7143 | Val Accuracy: 0.7535 </a:t>
-            </a:r>
-          </a:p>
-          <a:p>
-            <a:pPr>
-              <a:lnSpc>
-                <a:spcPct val="90000"/>
-              </a:lnSpc>
-            </a:pPr>
-            <a:r>
-              <a:rPr lang="en-GB" dirty="0">
-                <a:solidFill>
-                  <a:schemeClr val="tx1"/>
-                </a:solidFill>
-              </a:rPr>
-              <a:t>Stability gate hides occasional single-frame mis-reads from the user</a:t>
-            </a:r>
-          </a:p>
-          <a:p>
-            <a:pPr>
-              <a:lnSpc>
-                <a:spcPct val="90000"/>
-              </a:lnSpc>
-            </a:pPr>
-            <a:r>
-              <a:rPr lang="en-GB" dirty="0">
-                <a:solidFill>
-                  <a:schemeClr val="tx1"/>
-                </a:solidFill>
-              </a:rPr>
-              <a:t>For real world testing with group members we checked the logs </a:t>
-            </a:r>
-            <a:br>
-              <a:rPr lang="en-GB" dirty="0">
-                <a:solidFill>
-                  <a:schemeClr val="tx1"/>
-                </a:solidFill>
-              </a:rPr>
-            </a:br>
-            <a:r>
-              <a:rPr lang="en-GB" dirty="0">
-                <a:solidFill>
-                  <a:schemeClr val="tx1"/>
-                </a:solidFill>
-              </a:rPr>
-              <a:t>and it was working good about 70% of the times</a:t>
-            </a:r>
-          </a:p>
-        </p:txBody>
-      </p:sp>
+      </p:pic>
     </p:spTree>
+    <p:extLst>
+      <p:ext uri="{BB962C8B-B14F-4D97-AF65-F5344CB8AC3E}">
+        <p14:creationId xmlns:p14="http://schemas.microsoft.com/office/powerpoint/2010/main" val="1824247929"/>
+      </p:ext>
+    </p:extLst>
   </p:cSld>
   <p:clrMapOvr>
     <a:masterClrMapping/>
@@ -7533,7 +8038,7 @@
       </p:grpSpPr>
       <p:sp>
         <p:nvSpPr>
-          <p:cNvPr id="8" name="Rectangle 7">
+          <p:cNvPr id="9" name="Rectangle 8">
             <a:extLst>
               <a:ext uri="{FF2B5EF4-FFF2-40B4-BE49-F238E27FC236}">
                 <a16:creationId xmlns:a16="http://schemas.microsoft.com/office/drawing/2014/main" id="{C33976D1-3430-450C-A978-87A9A6E8E71F}"/>
@@ -7596,7 +8101,7 @@
       </p:sp>
       <p:sp>
         <p:nvSpPr>
-          <p:cNvPr id="10" name="Rectangle 9">
+          <p:cNvPr id="11" name="Rectangle 10">
             <a:extLst>
               <a:ext uri="{FF2B5EF4-FFF2-40B4-BE49-F238E27FC236}">
                 <a16:creationId xmlns:a16="http://schemas.microsoft.com/office/drawing/2014/main" id="{7D6AAC78-7D86-415A-ADC1-2B474807960C}"/>
@@ -7659,7 +8164,7 @@
       </p:sp>
       <p:sp>
         <p:nvSpPr>
-          <p:cNvPr id="12" name="Rectangle 11">
+          <p:cNvPr id="13" name="Rectangle 12">
             <a:extLst>
               <a:ext uri="{FF2B5EF4-FFF2-40B4-BE49-F238E27FC236}">
                 <a16:creationId xmlns:a16="http://schemas.microsoft.com/office/drawing/2014/main" id="{F2A658D9-F185-44F1-BA33-D50320D1D078}"/>
@@ -7756,7 +8261,7 @@
                 <a:ea typeface="+mj-ea"/>
                 <a:cs typeface="+mj-cs"/>
               </a:rPr>
-              <a:t>Dataflow per round</a:t>
+              <a:t>Model architecture</a:t>
             </a:r>
           </a:p>
         </p:txBody>
@@ -7769,8 +8274,8 @@
         </p:nvSpPr>
         <p:spPr>
           <a:xfrm>
-            <a:off x="2162244" y="2034533"/>
-            <a:ext cx="8777226" cy="3318582"/>
+            <a:off x="2141552" y="2355058"/>
+            <a:ext cx="8599918" cy="2879256"/>
           </a:xfrm>
           <a:prstGeom prst="rect">
             <a:avLst/>
@@ -7778,14 +8283,11 @@
         </p:spPr>
         <p:txBody>
           <a:bodyPr vert="horz" lIns="91440" tIns="45720" rIns="91440" bIns="45720" rtlCol="0">
-            <a:normAutofit lnSpcReduction="10000"/>
+            <a:normAutofit/>
           </a:bodyPr>
           <a:lstStyle/>
           <a:p>
             <a:pPr indent="-228600" defTabSz="914400">
-              <a:lnSpc>
-                <a:spcPct val="90000"/>
-              </a:lnSpc>
               <a:spcBef>
                 <a:spcPts val="1000"/>
               </a:spcBef>
@@ -7796,31 +8298,12 @@
               <a:buChar char="•"/>
             </a:pPr>
             <a:r>
-              <a:rPr lang="en-US" sz="1600" b="1" dirty="0"/>
-              <a:t>1. Countdown 3 -&gt; 2 -&gt; 1 on LED matrix (</a:t>
-            </a:r>
-            <a:r>
-              <a:rPr lang="en-US" sz="1600" b="1" dirty="0" err="1"/>
-              <a:t>kCountdownStepMs</a:t>
-            </a:r>
-            <a:r>
-              <a:rPr lang="en-US" sz="1600" b="1" dirty="0"/>
-              <a:t> = 700 </a:t>
-            </a:r>
-            <a:r>
-              <a:rPr lang="en-US" sz="1600" b="1" dirty="0" err="1"/>
-              <a:t>ms</a:t>
-            </a:r>
-            <a:r>
-              <a:rPr lang="en-US" sz="1600" b="1" dirty="0"/>
-              <a:t>)</a:t>
+              <a:rPr lang="en-US" dirty="0"/>
+              <a:t>Backbone: MobileNetV3Small (ImageNet, fine-tuned)</a:t>
             </a:r>
           </a:p>
           <a:p>
             <a:pPr indent="-228600" defTabSz="914400">
-              <a:lnSpc>
-                <a:spcPct val="90000"/>
-              </a:lnSpc>
               <a:spcBef>
                 <a:spcPts val="1000"/>
               </a:spcBef>
@@ -7831,15 +8314,20 @@
               <a:buChar char="•"/>
             </a:pPr>
             <a:r>
-              <a:rPr lang="en-US" sz="1600" dirty="0"/>
-              <a:t>   Player has a known moment to commit to a steady gesture.</a:t>
+              <a:rPr lang="en-US" dirty="0"/>
+              <a:t>Input: 160x160 RGB, </a:t>
+            </a:r>
+            <a:r>
+              <a:rPr lang="en-US" dirty="0" err="1"/>
+              <a:t>include_preprocessing</a:t>
+            </a:r>
+            <a:r>
+              <a:rPr lang="en-US" dirty="0"/>
+              <a:t>=True (norm baked in)</a:t>
             </a:r>
           </a:p>
           <a:p>
             <a:pPr indent="-228600" defTabSz="914400">
-              <a:lnSpc>
-                <a:spcPct val="90000"/>
-              </a:lnSpc>
               <a:spcBef>
                 <a:spcPts val="1000"/>
               </a:spcBef>
@@ -7850,31 +8338,20 @@
               <a:buChar char="•"/>
             </a:pPr>
             <a:r>
-              <a:rPr lang="en-US" sz="1600" b="1" dirty="0"/>
-              <a:t>2. Sliding-window read (</a:t>
-            </a:r>
-            <a:r>
-              <a:rPr lang="en-US" sz="1600" b="1" dirty="0" err="1"/>
-              <a:t>kWindowSize</a:t>
-            </a:r>
-            <a:r>
-              <a:rPr lang="en-US" sz="1600" b="1" dirty="0"/>
-              <a:t> = 8, </a:t>
-            </a:r>
-            <a:r>
-              <a:rPr lang="en-US" sz="1600" b="1" dirty="0" err="1"/>
-              <a:t>kMinAgreeing</a:t>
-            </a:r>
-            <a:r>
-              <a:rPr lang="en-US" sz="1600" b="1" dirty="0"/>
-              <a:t> = 5)</a:t>
+              <a:rPr lang="en-US" dirty="0"/>
+              <a:t>Head: GAP -&gt; Dense(64, L2) -&gt; Dropout(0.5) -&gt; Dense(3, </a:t>
+            </a:r>
+            <a:r>
+              <a:rPr lang="en-US" dirty="0" err="1"/>
+              <a:t>softmax</a:t>
+            </a:r>
+            <a:r>
+              <a:rPr lang="en-US" dirty="0"/>
+              <a:t>)</a:t>
             </a:r>
           </a:p>
           <a:p>
             <a:pPr indent="-228600" defTabSz="914400">
-              <a:lnSpc>
-                <a:spcPct val="90000"/>
-              </a:lnSpc>
               <a:spcBef>
                 <a:spcPts val="1000"/>
               </a:spcBef>
@@ -7885,162 +8362,8 @@
               <a:buChar char="•"/>
             </a:pPr>
             <a:r>
-              <a:rPr lang="en-US" sz="1600" dirty="0"/>
-              <a:t>   Skip low-confidence frames, accept once 5 of last 8 confident frames agree.</a:t>
-            </a:r>
-          </a:p>
-          <a:p>
-            <a:pPr indent="-228600" defTabSz="914400">
-              <a:lnSpc>
-                <a:spcPct val="90000"/>
-              </a:lnSpc>
-              <a:spcBef>
-                <a:spcPts val="1000"/>
-              </a:spcBef>
-              <a:buClr>
-                <a:schemeClr val="accent2"/>
-              </a:buClr>
-              <a:buFont typeface="Arial" panose="020B0604020202020204" pitchFamily="34" charset="0"/>
-              <a:buChar char="•"/>
-            </a:pPr>
-            <a:r>
-              <a:rPr lang="en-US" sz="1600" b="1" dirty="0"/>
-              <a:t>3. HSV accessory check on the same frames</a:t>
-            </a:r>
-          </a:p>
-          <a:p>
-            <a:pPr indent="-228600" defTabSz="914400">
-              <a:lnSpc>
-                <a:spcPct val="90000"/>
-              </a:lnSpc>
-              <a:spcBef>
-                <a:spcPts val="1000"/>
-              </a:spcBef>
-              <a:buClr>
-                <a:schemeClr val="accent2"/>
-              </a:buClr>
-              <a:buFont typeface="Arial" panose="020B0604020202020204" pitchFamily="34" charset="0"/>
-              <a:buChar char="•"/>
-            </a:pPr>
-            <a:r>
-              <a:rPr lang="en-US" sz="1600" dirty="0"/>
-              <a:t>   Cheap cv::</a:t>
-            </a:r>
-            <a:r>
-              <a:rPr lang="en-US" sz="1600" dirty="0" err="1"/>
-              <a:t>inRange</a:t>
-            </a:r>
-            <a:r>
-              <a:rPr lang="en-US" sz="1600" dirty="0"/>
-              <a:t> + </a:t>
-            </a:r>
-            <a:r>
-              <a:rPr lang="en-US" sz="1600" dirty="0" err="1"/>
-              <a:t>countNonZero</a:t>
-            </a:r>
-            <a:r>
-              <a:rPr lang="en-US" sz="1600" dirty="0"/>
-              <a:t> -&gt; 'present' if count &gt; baseline * 1.25.</a:t>
-            </a:r>
-          </a:p>
-          <a:p>
-            <a:pPr indent="-228600" defTabSz="914400">
-              <a:lnSpc>
-                <a:spcPct val="90000"/>
-              </a:lnSpc>
-              <a:spcBef>
-                <a:spcPts val="1000"/>
-              </a:spcBef>
-              <a:buClr>
-                <a:schemeClr val="accent2"/>
-              </a:buClr>
-              <a:buFont typeface="Arial" panose="020B0604020202020204" pitchFamily="34" charset="0"/>
-              <a:buChar char="•"/>
-            </a:pPr>
-            <a:r>
-              <a:rPr lang="en-US" sz="1600" b="1" dirty="0"/>
-              <a:t>4. Pi picks based on accessory state</a:t>
-            </a:r>
-          </a:p>
-          <a:p>
-            <a:pPr indent="-228600" defTabSz="914400">
-              <a:lnSpc>
-                <a:spcPct val="90000"/>
-              </a:lnSpc>
-              <a:spcBef>
-                <a:spcPts val="1000"/>
-              </a:spcBef>
-              <a:buClr>
-                <a:schemeClr val="accent2"/>
-              </a:buClr>
-              <a:buFont typeface="Arial" panose="020B0604020202020204" pitchFamily="34" charset="0"/>
-              <a:buChar char="•"/>
-            </a:pPr>
-            <a:r>
-              <a:rPr lang="en-US" sz="1600" dirty="0"/>
-              <a:t>   Accessory present -&gt; </a:t>
-            </a:r>
-            <a:r>
-              <a:rPr lang="en-US" sz="1600" dirty="0" err="1"/>
-              <a:t>kBeats</a:t>
-            </a:r>
-            <a:r>
-              <a:rPr lang="en-US" sz="1600" dirty="0"/>
-              <a:t>[player]; absent -&gt; </a:t>
-            </a:r>
-            <a:r>
-              <a:rPr lang="en-US" sz="1600" dirty="0" err="1"/>
-              <a:t>kLosesTo</a:t>
-            </a:r>
-            <a:r>
-              <a:rPr lang="en-US" sz="1600" dirty="0"/>
-              <a:t>[player].</a:t>
-            </a:r>
-          </a:p>
-          <a:p>
-            <a:pPr indent="-228600" defTabSz="914400">
-              <a:lnSpc>
-                <a:spcPct val="90000"/>
-              </a:lnSpc>
-              <a:spcBef>
-                <a:spcPts val="1000"/>
-              </a:spcBef>
-              <a:buClr>
-                <a:schemeClr val="accent2"/>
-              </a:buClr>
-              <a:buFont typeface="Arial" panose="020B0604020202020204" pitchFamily="34" charset="0"/>
-              <a:buChar char="•"/>
-            </a:pPr>
-            <a:r>
-              <a:rPr lang="en-US" sz="1600" b="1" dirty="0"/>
-              <a:t>5. Sense HAT: Pi's symbol (2 s) -&gt; full green (won) / red (lost) / blue (tie) (1.5 s)</a:t>
-            </a:r>
-          </a:p>
-          <a:p>
-            <a:pPr indent="-228600" defTabSz="914400">
-              <a:lnSpc>
-                <a:spcPct val="90000"/>
-              </a:lnSpc>
-              <a:spcBef>
-                <a:spcPts val="1000"/>
-              </a:spcBef>
-              <a:buClr>
-                <a:schemeClr val="accent2"/>
-              </a:buClr>
-              <a:buFont typeface="Arial" panose="020B0604020202020204" pitchFamily="34" charset="0"/>
-              <a:buChar char="•"/>
-            </a:pPr>
-            <a:r>
-              <a:rPr lang="en-US" sz="1600" dirty="0"/>
-              <a:t>   Pause 800 </a:t>
-            </a:r>
-            <a:r>
-              <a:rPr lang="en-US" sz="1600" dirty="0" err="1"/>
-              <a:t>ms</a:t>
-            </a:r>
-            <a:r>
-              <a:rPr lang="en-US" sz="1600" dirty="0"/>
-              <a:t>, then loop back to the countdown.</a:t>
+              <a:rPr lang="en-US" dirty="0"/>
+              <a:t>Output: rock / paper / scissors (no garbage class)</a:t>
             </a:r>
           </a:p>
         </p:txBody>
@@ -8059,7 +8382,7 @@
     <p:bg>
       <p:bgPr>
         <a:solidFill>
-          <a:schemeClr val="accent2"/>
+          <a:schemeClr val="bg1"/>
         </a:solidFill>
         <a:effectLst/>
       </p:bgPr>
@@ -8080,10 +8403,200 @@
       </p:grpSpPr>
       <p:sp>
         <p:nvSpPr>
+          <p:cNvPr id="9" name="Rectangle 8">
+            <a:extLst>
+              <a:ext uri="{FF2B5EF4-FFF2-40B4-BE49-F238E27FC236}">
+                <a16:creationId xmlns:a16="http://schemas.microsoft.com/office/drawing/2014/main" id="{C33976D1-3430-450C-A978-87A9A6E8E71F}"/>
+              </a:ext>
+              <a:ext uri="{C183D7F6-B498-43B3-948B-1728B52AA6E4}">
+                <adec:decorative xmlns:adec="http://schemas.microsoft.com/office/drawing/2017/decorative" val="1"/>
+              </a:ext>
+            </a:extLst>
+          </p:cNvPr>
+          <p:cNvSpPr>
+            <a:spLocks noGrp="1" noRot="1" noChangeAspect="1" noMove="1" noResize="1" noEditPoints="1" noAdjustHandles="1" noChangeArrowheads="1" noChangeShapeType="1" noTextEdit="1"/>
+          </p:cNvSpPr>
+          <p:nvPr>
+            <p:extLst>
+              <p:ext uri="{386F3935-93C4-4BCD-93E2-E3B085C9AB24}">
+                <p16:designElem xmlns:p16="http://schemas.microsoft.com/office/powerpoint/2015/main" val="1"/>
+              </p:ext>
+            </p:extLst>
+          </p:nvPr>
+        </p:nvSpPr>
+        <p:spPr>
+          <a:xfrm>
+            <a:off x="0" y="0"/>
+            <a:ext cx="12188825" cy="6858000"/>
+          </a:xfrm>
+          <a:prstGeom prst="rect">
+            <a:avLst/>
+          </a:prstGeom>
+          <a:solidFill>
+            <a:schemeClr val="accent2"/>
+          </a:solidFill>
+          <a:ln>
+            <a:noFill/>
+          </a:ln>
+        </p:spPr>
+        <p:style>
+          <a:lnRef idx="2">
+            <a:schemeClr val="accent1">
+              <a:shade val="50000"/>
+            </a:schemeClr>
+          </a:lnRef>
+          <a:fillRef idx="1">
+            <a:schemeClr val="accent1"/>
+          </a:fillRef>
+          <a:effectRef idx="0">
+            <a:schemeClr val="accent1"/>
+          </a:effectRef>
+          <a:fontRef idx="minor">
+            <a:schemeClr val="lt1"/>
+          </a:fontRef>
+        </p:style>
+        <p:txBody>
+          <a:bodyPr rtlCol="0" anchor="ctr"/>
+          <a:lstStyle/>
+          <a:p>
+            <a:pPr algn="ctr"/>
+            <a:endParaRPr lang="en-US"/>
+          </a:p>
+        </p:txBody>
+      </p:sp>
+      <p:sp>
+        <p:nvSpPr>
+          <p:cNvPr id="11" name="Rectangle 10">
+            <a:extLst>
+              <a:ext uri="{FF2B5EF4-FFF2-40B4-BE49-F238E27FC236}">
+                <a16:creationId xmlns:a16="http://schemas.microsoft.com/office/drawing/2014/main" id="{7D6AAC78-7D86-415A-ADC1-2B474807960C}"/>
+              </a:ext>
+              <a:ext uri="{C183D7F6-B498-43B3-948B-1728B52AA6E4}">
+                <adec:decorative xmlns:adec="http://schemas.microsoft.com/office/drawing/2017/decorative" val="1"/>
+              </a:ext>
+            </a:extLst>
+          </p:cNvPr>
+          <p:cNvSpPr>
+            <a:spLocks noGrp="1" noRot="1" noChangeAspect="1" noMove="1" noResize="1" noEditPoints="1" noAdjustHandles="1" noChangeArrowheads="1" noChangeShapeType="1" noTextEdit="1"/>
+          </p:cNvSpPr>
+          <p:nvPr>
+            <p:extLst>
+              <p:ext uri="{386F3935-93C4-4BCD-93E2-E3B085C9AB24}">
+                <p16:designElem xmlns:p16="http://schemas.microsoft.com/office/powerpoint/2015/main" val="1"/>
+              </p:ext>
+            </p:extLst>
+          </p:nvPr>
+        </p:nvSpPr>
+        <p:spPr>
+          <a:xfrm>
+            <a:off x="1249354" y="1248156"/>
+            <a:ext cx="9690116" cy="4361688"/>
+          </a:xfrm>
+          <a:prstGeom prst="rect">
+            <a:avLst/>
+          </a:prstGeom>
+          <a:solidFill>
+            <a:srgbClr val="FFFFFF"/>
+          </a:solidFill>
+          <a:ln>
+            <a:noFill/>
+          </a:ln>
+        </p:spPr>
+        <p:style>
+          <a:lnRef idx="2">
+            <a:schemeClr val="accent1">
+              <a:shade val="50000"/>
+            </a:schemeClr>
+          </a:lnRef>
+          <a:fillRef idx="1">
+            <a:schemeClr val="accent1"/>
+          </a:fillRef>
+          <a:effectRef idx="0">
+            <a:schemeClr val="accent1"/>
+          </a:effectRef>
+          <a:fontRef idx="minor">
+            <a:schemeClr val="lt1"/>
+          </a:fontRef>
+        </p:style>
+        <p:txBody>
+          <a:bodyPr rtlCol="0" anchor="ctr"/>
+          <a:lstStyle/>
+          <a:p>
+            <a:pPr algn="ctr"/>
+            <a:endParaRPr lang="en-US"/>
+          </a:p>
+        </p:txBody>
+      </p:sp>
+      <p:sp>
+        <p:nvSpPr>
+          <p:cNvPr id="13" name="Rectangle 12">
+            <a:extLst>
+              <a:ext uri="{FF2B5EF4-FFF2-40B4-BE49-F238E27FC236}">
+                <a16:creationId xmlns:a16="http://schemas.microsoft.com/office/drawing/2014/main" id="{F2A658D9-F185-44F1-BA33-D50320D1D078}"/>
+              </a:ext>
+              <a:ext uri="{C183D7F6-B498-43B3-948B-1728B52AA6E4}">
+                <adec:decorative xmlns:adec="http://schemas.microsoft.com/office/drawing/2017/decorative" val="1"/>
+              </a:ext>
+            </a:extLst>
+          </p:cNvPr>
+          <p:cNvSpPr>
+            <a:spLocks noGrp="1" noRot="1" noChangeAspect="1" noMove="1" noResize="1" noEditPoints="1" noAdjustHandles="1" noChangeArrowheads="1" noChangeShapeType="1" noTextEdit="1"/>
+          </p:cNvSpPr>
+          <p:nvPr>
+            <p:extLst>
+              <p:ext uri="{386F3935-93C4-4BCD-93E2-E3B085C9AB24}">
+                <p16:designElem xmlns:p16="http://schemas.microsoft.com/office/powerpoint/2015/main" val="1"/>
+              </p:ext>
+            </p:extLst>
+          </p:nvPr>
+        </p:nvSpPr>
+        <p:spPr>
+          <a:xfrm>
+            <a:off x="1061951" y="1060704"/>
+            <a:ext cx="10064922" cy="4736592"/>
+          </a:xfrm>
+          <a:prstGeom prst="rect">
+            <a:avLst/>
+          </a:prstGeom>
+          <a:noFill/>
+          <a:ln w="31750" cap="sq">
+            <a:solidFill>
+              <a:srgbClr val="FFFFFF"/>
+            </a:solidFill>
+            <a:miter lim="800000"/>
+          </a:ln>
+        </p:spPr>
+        <p:style>
+          <a:lnRef idx="2">
+            <a:schemeClr val="accent1">
+              <a:shade val="50000"/>
+            </a:schemeClr>
+          </a:lnRef>
+          <a:fillRef idx="1">
+            <a:schemeClr val="accent1"/>
+          </a:fillRef>
+          <a:effectRef idx="0">
+            <a:schemeClr val="accent1"/>
+          </a:effectRef>
+          <a:fontRef idx="minor">
+            <a:schemeClr val="lt1"/>
+          </a:fontRef>
+        </p:style>
+        <p:txBody>
+          <a:bodyPr rtlCol="0" anchor="ctr"/>
+          <a:lstStyle/>
+          <a:p>
+            <a:pPr algn="ctr"/>
+            <a:endParaRPr lang="en-US"/>
+          </a:p>
+        </p:txBody>
+      </p:sp>
+      <p:sp>
+        <p:nvSpPr>
           <p:cNvPr id="2" name="Title 1">
             <a:extLst>
               <a:ext uri="{FF2B5EF4-FFF2-40B4-BE49-F238E27FC236}">
-                <a16:creationId xmlns:a16="http://schemas.microsoft.com/office/drawing/2014/main" id="{EE088AF7-0B25-7949-8B1E-F97E5E38DFCC}"/>
+                <a16:creationId xmlns:a16="http://schemas.microsoft.com/office/drawing/2014/main" id="{DD3B9F1D-CED0-70D1-AA76-E9EC999B2FEC}"/>
               </a:ext>
             </a:extLst>
           </p:cNvPr>
@@ -8096,58 +8609,208 @@
         </p:nvSpPr>
         <p:spPr>
           <a:xfrm>
-            <a:off x="1599783" y="4816249"/>
-            <a:ext cx="8989258" cy="1645759"/>
+            <a:off x="2230554" y="467418"/>
+            <a:ext cx="7727716" cy="1188720"/>
           </a:xfrm>
+          <a:solidFill>
+            <a:srgbClr val="FFFFFF"/>
+          </a:solidFill>
         </p:spPr>
         <p:txBody>
-          <a:bodyPr vert="horz" lIns="274320" tIns="182880" rIns="274320" bIns="182880" rtlCol="0" anchor="ctr" anchorCtr="1">
+          <a:bodyPr vert="horz" lIns="182880" tIns="182880" rIns="182880" bIns="182880" rtlCol="0" anchor="ctr">
             <a:normAutofit/>
           </a:bodyPr>
           <a:lstStyle/>
           <a:p>
             <a:pPr defTabSz="914400"/>
             <a:r>
-              <a:rPr lang="en-US" sz="3800" dirty="0"/>
-              <a:t>logging</a:t>
-            </a:r>
-          </a:p>
-        </p:txBody>
-      </p:sp>
-      <p:pic>
-        <p:nvPicPr>
-          <p:cNvPr id="5" name="Picture 4" descr="A screenshot of a computer program&#10;&#10;AI-generated content may be incorrect.">
+              <a:rPr lang="en-US" sz="2800" kern="1200" cap="all" spc="200" baseline="0" dirty="0">
+                <a:solidFill>
+                  <a:srgbClr val="262626"/>
+                </a:solidFill>
+                <a:latin typeface="+mj-lt"/>
+                <a:ea typeface="+mj-ea"/>
+                <a:cs typeface="+mj-cs"/>
+              </a:rPr>
+              <a:t>training</a:t>
+            </a:r>
+          </a:p>
+        </p:txBody>
+      </p:sp>
+      <p:sp>
+        <p:nvSpPr>
+          <p:cNvPr id="4" name="TextBox 3">
             <a:extLst>
               <a:ext uri="{FF2B5EF4-FFF2-40B4-BE49-F238E27FC236}">
-                <a16:creationId xmlns:a16="http://schemas.microsoft.com/office/drawing/2014/main" id="{A7364D52-A79E-55DA-9FB6-BF2ECA8C5008}"/>
+                <a16:creationId xmlns:a16="http://schemas.microsoft.com/office/drawing/2014/main" id="{E9D301B5-61AB-55EB-2A0F-FFDD3A733A5E}"/>
               </a:ext>
             </a:extLst>
           </p:cNvPr>
-          <p:cNvPicPr>
-            <a:picLocks noChangeAspect="1"/>
-          </p:cNvPicPr>
+          <p:cNvSpPr txBox="1"/>
           <p:nvPr/>
-        </p:nvPicPr>
-        <p:blipFill>
-          <a:blip r:embed="rId2"/>
-          <a:stretch>
-            <a:fillRect/>
-          </a:stretch>
-        </p:blipFill>
+        </p:nvSpPr>
         <p:spPr>
           <a:xfrm>
-            <a:off x="1599783" y="262239"/>
-            <a:ext cx="8989258" cy="4219447"/>
+            <a:off x="1705617" y="2291262"/>
+            <a:ext cx="8777226" cy="2879256"/>
           </a:xfrm>
           <a:prstGeom prst="rect">
             <a:avLst/>
           </a:prstGeom>
         </p:spPr>
-      </p:pic>
+        <p:txBody>
+          <a:bodyPr vert="horz" lIns="91440" tIns="45720" rIns="91440" bIns="45720" rtlCol="0">
+            <a:normAutofit/>
+          </a:bodyPr>
+          <a:lstStyle/>
+          <a:p>
+            <a:pPr indent="-228600" defTabSz="914400">
+              <a:spcBef>
+                <a:spcPts val="1000"/>
+              </a:spcBef>
+              <a:spcAft>
+                <a:spcPts val="600"/>
+              </a:spcAft>
+              <a:buClr>
+                <a:schemeClr val="accent2"/>
+              </a:buClr>
+              <a:buFont typeface="Arial" panose="020B0604020202020204" pitchFamily="34" charset="0"/>
+              <a:buChar char="•"/>
+            </a:pPr>
+            <a:r>
+              <a:rPr lang="en-US" sz="1600" b="1" dirty="0" err="1"/>
+              <a:t>rps</a:t>
+            </a:r>
+            <a:r>
+              <a:rPr lang="en-US" sz="1600" b="1" dirty="0"/>
+              <a:t>-project/03_train.py</a:t>
+            </a:r>
+          </a:p>
+          <a:p>
+            <a:pPr indent="-228600" defTabSz="914400">
+              <a:spcBef>
+                <a:spcPts val="1000"/>
+              </a:spcBef>
+              <a:spcAft>
+                <a:spcPts val="600"/>
+              </a:spcAft>
+              <a:buClr>
+                <a:schemeClr val="accent2"/>
+              </a:buClr>
+              <a:buFont typeface="Arial" panose="020B0604020202020204" pitchFamily="34" charset="0"/>
+              <a:buChar char="•"/>
+            </a:pPr>
+            <a:r>
+              <a:rPr lang="en-US" sz="1600" dirty="0"/>
+              <a:t>Train/</a:t>
+            </a:r>
+            <a:r>
+              <a:rPr lang="en-US" sz="1600" dirty="0" err="1"/>
+              <a:t>val</a:t>
+            </a:r>
+            <a:r>
+              <a:rPr lang="en-US" sz="1600" dirty="0"/>
+              <a:t> split 80/20, stratified by class</a:t>
+            </a:r>
+          </a:p>
+          <a:p>
+            <a:pPr indent="-228600" defTabSz="914400">
+              <a:spcBef>
+                <a:spcPts val="1000"/>
+              </a:spcBef>
+              <a:spcAft>
+                <a:spcPts val="600"/>
+              </a:spcAft>
+              <a:buClr>
+                <a:schemeClr val="accent2"/>
+              </a:buClr>
+              <a:buFont typeface="Arial" panose="020B0604020202020204" pitchFamily="34" charset="0"/>
+              <a:buChar char="•"/>
+            </a:pPr>
+            <a:r>
+              <a:rPr lang="en-US" sz="1600" dirty="0"/>
+              <a:t>Oversample minority classes to balance training set</a:t>
+            </a:r>
+          </a:p>
+          <a:p>
+            <a:pPr indent="-228600" defTabSz="914400">
+              <a:spcBef>
+                <a:spcPts val="1000"/>
+              </a:spcBef>
+              <a:spcAft>
+                <a:spcPts val="600"/>
+              </a:spcAft>
+              <a:buClr>
+                <a:schemeClr val="accent2"/>
+              </a:buClr>
+              <a:buFont typeface="Arial" panose="020B0604020202020204" pitchFamily="34" charset="0"/>
+              <a:buChar char="•"/>
+            </a:pPr>
+            <a:r>
+              <a:rPr lang="en-US" sz="1600" dirty="0"/>
+              <a:t>Augmentation: random rotation/translation/zoom/brightness/contrast</a:t>
+            </a:r>
+          </a:p>
+          <a:p>
+            <a:pPr indent="-228600" defTabSz="914400">
+              <a:spcBef>
+                <a:spcPts val="1000"/>
+              </a:spcBef>
+              <a:spcAft>
+                <a:spcPts val="600"/>
+              </a:spcAft>
+              <a:buClr>
+                <a:schemeClr val="accent2"/>
+              </a:buClr>
+              <a:buFont typeface="Arial" panose="020B0604020202020204" pitchFamily="34" charset="0"/>
+              <a:buChar char="•"/>
+            </a:pPr>
+            <a:r>
+              <a:rPr lang="en-US" sz="1600" dirty="0"/>
+              <a:t>Optimizer: Adam + cosine LR decay, class weights, early stopping</a:t>
+            </a:r>
+          </a:p>
+          <a:p>
+            <a:pPr indent="-228600" defTabSz="914400">
+              <a:spcBef>
+                <a:spcPts val="1000"/>
+              </a:spcBef>
+              <a:spcAft>
+                <a:spcPts val="600"/>
+              </a:spcAft>
+              <a:buClr>
+                <a:schemeClr val="accent2"/>
+              </a:buClr>
+              <a:buFont typeface="Arial" panose="020B0604020202020204" pitchFamily="34" charset="0"/>
+              <a:buChar char="•"/>
+            </a:pPr>
+            <a:r>
+              <a:rPr lang="en-US" sz="1600" dirty="0"/>
+              <a:t>Export: int8 </a:t>
+            </a:r>
+            <a:r>
+              <a:rPr lang="en-US" sz="1600" dirty="0" err="1"/>
+              <a:t>TFLite</a:t>
+            </a:r>
+            <a:r>
+              <a:rPr lang="en-US" sz="1600" dirty="0"/>
+              <a:t> (uint8 I/O), </a:t>
+            </a:r>
+            <a:r>
+              <a:rPr lang="en-US" sz="1600" dirty="0" err="1"/>
+              <a:t>softmax</a:t>
+            </a:r>
+            <a:r>
+              <a:rPr lang="en-US" sz="1600" dirty="0"/>
+              <a:t> baked in -&gt; 1.3 MB file</a:t>
+            </a:r>
+          </a:p>
+        </p:txBody>
+      </p:sp>
     </p:spTree>
     <p:extLst>
       <p:ext uri="{BB962C8B-B14F-4D97-AF65-F5344CB8AC3E}">
-        <p14:creationId xmlns:p14="http://schemas.microsoft.com/office/powerpoint/2010/main" val="1824247929"/>
+        <p14:creationId xmlns:p14="http://schemas.microsoft.com/office/powerpoint/2010/main" val="1659154204"/>
       </p:ext>
     </p:extLst>
   </p:cSld>
@@ -8184,7 +8847,7 @@
       </p:grpSpPr>
       <p:sp>
         <p:nvSpPr>
-          <p:cNvPr id="9" name="Rectangle 8">
+          <p:cNvPr id="8" name="Rectangle 7">
             <a:extLst>
               <a:ext uri="{FF2B5EF4-FFF2-40B4-BE49-F238E27FC236}">
                 <a16:creationId xmlns:a16="http://schemas.microsoft.com/office/drawing/2014/main" id="{C33976D1-3430-450C-A978-87A9A6E8E71F}"/>
@@ -8247,7 +8910,7 @@
       </p:sp>
       <p:sp>
         <p:nvSpPr>
-          <p:cNvPr id="11" name="Rectangle 10">
+          <p:cNvPr id="10" name="Rectangle 9">
             <a:extLst>
               <a:ext uri="{FF2B5EF4-FFF2-40B4-BE49-F238E27FC236}">
                 <a16:creationId xmlns:a16="http://schemas.microsoft.com/office/drawing/2014/main" id="{7D6AAC78-7D86-415A-ADC1-2B474807960C}"/>
@@ -8310,7 +8973,7 @@
       </p:sp>
       <p:sp>
         <p:nvSpPr>
-          <p:cNvPr id="13" name="Rectangle 12">
+          <p:cNvPr id="12" name="Rectangle 11">
             <a:extLst>
               <a:ext uri="{FF2B5EF4-FFF2-40B4-BE49-F238E27FC236}">
                 <a16:creationId xmlns:a16="http://schemas.microsoft.com/office/drawing/2014/main" id="{F2A658D9-F185-44F1-BA33-D50320D1D078}"/>
@@ -8392,124 +9055,229 @@
           </a:solidFill>
         </p:spPr>
         <p:txBody>
-          <a:bodyPr vert="horz" lIns="182880" tIns="182880" rIns="182880" bIns="182880" rtlCol="0" anchor="ctr">
+          <a:bodyPr>
             <a:normAutofit/>
           </a:bodyPr>
           <a:lstStyle/>
           <a:p>
-            <a:pPr defTabSz="914400"/>
-            <a:r>
-              <a:rPr lang="en-US" sz="2800" kern="1200" cap="all" spc="200" baseline="0" dirty="0">
-                <a:solidFill>
-                  <a:srgbClr val="262626"/>
-                </a:solidFill>
-                <a:latin typeface="+mj-lt"/>
-                <a:ea typeface="+mj-ea"/>
-                <a:cs typeface="+mj-cs"/>
-              </a:rPr>
-              <a:t>Model architecture</a:t>
-            </a:r>
-          </a:p>
-        </p:txBody>
-      </p:sp>
-      <p:sp>
-        <p:nvSpPr>
-          <p:cNvPr id="3" name="TextBox 2"/>
-          <p:cNvSpPr txBox="1"/>
-          <p:nvPr/>
+            <a:r>
+              <a:rPr dirty="0" err="1"/>
+              <a:t>TFLite</a:t>
+            </a:r>
+            <a:r>
+              <a:rPr dirty="0"/>
+              <a:t> size &amp; inferences/sec</a:t>
+            </a:r>
+          </a:p>
+        </p:txBody>
+      </p:sp>
+      <p:sp>
+        <p:nvSpPr>
+          <p:cNvPr id="3" name="Content Placeholder 2"/>
+          <p:cNvSpPr>
+            <a:spLocks noGrp="1"/>
+          </p:cNvSpPr>
+          <p:nvPr>
+            <p:ph idx="1"/>
+          </p:nvPr>
         </p:nvSpPr>
         <p:spPr>
           <a:xfrm>
-            <a:off x="2141552" y="2355058"/>
-            <a:ext cx="8599918" cy="2879256"/>
+            <a:off x="1705617" y="2291262"/>
+            <a:ext cx="8777226" cy="2879256"/>
           </a:xfrm>
-          <a:prstGeom prst="rect">
-            <a:avLst/>
-          </a:prstGeom>
         </p:spPr>
         <p:txBody>
-          <a:bodyPr vert="horz" lIns="91440" tIns="45720" rIns="91440" bIns="45720" rtlCol="0">
+          <a:bodyPr>
             <a:normAutofit/>
           </a:bodyPr>
           <a:lstStyle/>
           <a:p>
-            <a:pPr indent="-228600" defTabSz="914400">
-              <a:spcBef>
-                <a:spcPts val="1000"/>
-              </a:spcBef>
-              <a:buClr>
-                <a:schemeClr val="accent2"/>
-              </a:buClr>
-              <a:buFont typeface="Arial" panose="020B0604020202020204" pitchFamily="34" charset="0"/>
-              <a:buChar char="•"/>
-            </a:pPr>
-            <a:r>
-              <a:rPr lang="en-US" dirty="0"/>
-              <a:t>Backbone: MobileNetV3Small (ImageNet, fine-tuned)</a:t>
-            </a:r>
-          </a:p>
-          <a:p>
-            <a:pPr indent="-228600" defTabSz="914400">
-              <a:spcBef>
-                <a:spcPts val="1000"/>
-              </a:spcBef>
-              <a:buClr>
-                <a:schemeClr val="accent2"/>
-              </a:buClr>
-              <a:buFont typeface="Arial" panose="020B0604020202020204" pitchFamily="34" charset="0"/>
-              <a:buChar char="•"/>
-            </a:pPr>
-            <a:r>
-              <a:rPr lang="en-US" dirty="0"/>
-              <a:t>Input: 160x160 RGB, </a:t>
-            </a:r>
-            <a:r>
-              <a:rPr lang="en-US" dirty="0" err="1"/>
-              <a:t>include_preprocessing</a:t>
-            </a:r>
-            <a:r>
-              <a:rPr lang="en-US" dirty="0"/>
-              <a:t>=True (norm baked in)</a:t>
-            </a:r>
-          </a:p>
-          <a:p>
-            <a:pPr indent="-228600" defTabSz="914400">
-              <a:spcBef>
-                <a:spcPts val="1000"/>
-              </a:spcBef>
-              <a:buClr>
-                <a:schemeClr val="accent2"/>
-              </a:buClr>
-              <a:buFont typeface="Arial" panose="020B0604020202020204" pitchFamily="34" charset="0"/>
-              <a:buChar char="•"/>
-            </a:pPr>
-            <a:r>
-              <a:rPr lang="en-US" dirty="0"/>
-              <a:t>Head: GAP -&gt; Dense(64, L2) -&gt; Dropout(0.5) -&gt; Dense(3, </a:t>
-            </a:r>
-            <a:r>
-              <a:rPr lang="en-US" dirty="0" err="1"/>
-              <a:t>softmax</a:t>
-            </a:r>
-            <a:r>
-              <a:rPr lang="en-US" dirty="0"/>
+            <a:r>
+              <a:rPr lang="en-GB" dirty="0">
+                <a:solidFill>
+                  <a:schemeClr val="tx1"/>
+                </a:solidFill>
+              </a:rPr>
+              <a:t>Model file: model/</a:t>
+            </a:r>
+            <a:r>
+              <a:rPr lang="en-GB" dirty="0" err="1">
+                <a:solidFill>
+                  <a:schemeClr val="tx1"/>
+                </a:solidFill>
+              </a:rPr>
+              <a:t>model.tflite</a:t>
+            </a:r>
+            <a:r>
+              <a:rPr lang="en-GB" dirty="0">
+                <a:solidFill>
+                  <a:schemeClr val="tx1"/>
+                </a:solidFill>
+              </a:rPr>
+              <a:t> = 1.28 MB / 100 MB budget (~1.3 % used)</a:t>
+            </a:r>
+          </a:p>
+          <a:p>
+            <a:pPr lvl="1"/>
+            <a:r>
+              <a:rPr lang="en-GB" dirty="0">
+                <a:solidFill>
+                  <a:schemeClr val="tx1"/>
+                </a:solidFill>
+              </a:rPr>
+              <a:t>Headroom for adding a second .</a:t>
+            </a:r>
+            <a:r>
+              <a:rPr lang="en-GB" dirty="0" err="1">
+                <a:solidFill>
+                  <a:schemeClr val="tx1"/>
+                </a:solidFill>
+              </a:rPr>
+              <a:t>tflite</a:t>
+            </a:r>
+            <a:r>
+              <a:rPr lang="en-GB" dirty="0">
+                <a:solidFill>
+                  <a:schemeClr val="tx1"/>
+                </a:solidFill>
+              </a:rPr>
+              <a:t> (e.g. an accessory classifier) without changes</a:t>
+            </a:r>
+          </a:p>
+          <a:p>
+            <a:r>
+              <a:rPr lang="en-GB" dirty="0">
+                <a:solidFill>
+                  <a:schemeClr val="tx1"/>
+                </a:solidFill>
+              </a:rPr>
+              <a:t>Per-round perf log printed by the binary:</a:t>
+            </a:r>
+          </a:p>
+          <a:p>
+            <a:pPr lvl="1"/>
+            <a:r>
+              <a:rPr lang="en-GB" dirty="0">
+                <a:solidFill>
+                  <a:schemeClr val="tx1"/>
+                </a:solidFill>
+              </a:rPr>
+              <a:t>[perf] 41 inferences in 1320 </a:t>
+            </a:r>
+            <a:r>
+              <a:rPr lang="en-GB" dirty="0" err="1">
+                <a:solidFill>
+                  <a:schemeClr val="tx1"/>
+                </a:solidFill>
+              </a:rPr>
+              <a:t>ms</a:t>
+            </a:r>
+            <a:r>
+              <a:rPr lang="en-GB" dirty="0">
+                <a:solidFill>
+                  <a:schemeClr val="tx1"/>
+                </a:solidFill>
+              </a:rPr>
+              <a:t> (31.1 inf/s, classify </a:t>
+            </a:r>
+            <a:r>
+              <a:rPr lang="en-GB" dirty="0" err="1">
+                <a:solidFill>
+                  <a:schemeClr val="tx1"/>
+                </a:solidFill>
+              </a:rPr>
+              <a:t>avg</a:t>
+            </a:r>
+            <a:r>
+              <a:rPr lang="en-GB" dirty="0">
+                <a:solidFill>
+                  <a:schemeClr val="tx1"/>
+                </a:solidFill>
+              </a:rPr>
+              <a:t>=22.18 </a:t>
+            </a:r>
+            <a:r>
+              <a:rPr lang="en-GB" dirty="0" err="1">
+                <a:solidFill>
+                  <a:schemeClr val="tx1"/>
+                </a:solidFill>
+              </a:rPr>
+              <a:t>ms</a:t>
+            </a:r>
+            <a:r>
+              <a:rPr lang="en-GB" dirty="0">
+                <a:solidFill>
+                  <a:schemeClr val="tx1"/>
+                </a:solidFill>
+              </a:rPr>
+              <a:t> max=31.40 </a:t>
+            </a:r>
+            <a:r>
+              <a:rPr lang="en-GB" dirty="0" err="1">
+                <a:solidFill>
+                  <a:schemeClr val="tx1"/>
+                </a:solidFill>
+              </a:rPr>
+              <a:t>ms</a:t>
+            </a:r>
+            <a:r>
+              <a:rPr lang="en-GB" dirty="0">
+                <a:solidFill>
+                  <a:schemeClr val="tx1"/>
+                </a:solidFill>
+              </a:rPr>
               <a:t>)</a:t>
             </a:r>
           </a:p>
           <a:p>
-            <a:pPr indent="-228600" defTabSz="914400">
-              <a:spcBef>
-                <a:spcPts val="1000"/>
-              </a:spcBef>
-              <a:buClr>
-                <a:schemeClr val="accent2"/>
-              </a:buClr>
-              <a:buFont typeface="Arial" panose="020B0604020202020204" pitchFamily="34" charset="0"/>
-              <a:buChar char="•"/>
-            </a:pPr>
-            <a:r>
-              <a:rPr lang="en-US" dirty="0"/>
-              <a:t>Output: rock / paper / scissors (no garbage class)</a:t>
+            <a:pPr lvl="1"/>
+            <a:r>
+              <a:rPr lang="en-GB" dirty="0">
+                <a:solidFill>
+                  <a:schemeClr val="tx1"/>
+                </a:solidFill>
+              </a:rPr>
+              <a:t>Tag flips to [perf-warn] when rate falls below 30 -&gt; trivial to grep in </a:t>
+            </a:r>
+            <a:r>
+              <a:rPr lang="en-GB" dirty="0" err="1">
+                <a:solidFill>
+                  <a:schemeClr val="tx1"/>
+                </a:solidFill>
+              </a:rPr>
+              <a:t>journalctl</a:t>
+            </a:r>
+            <a:endParaRPr lang="en-GB" dirty="0">
+              <a:solidFill>
+                <a:schemeClr val="tx1"/>
+              </a:solidFill>
+            </a:endParaRPr>
+          </a:p>
+          <a:p>
+            <a:r>
+              <a:rPr lang="en-GB" dirty="0">
+                <a:solidFill>
+                  <a:schemeClr val="tx1"/>
+                </a:solidFill>
+              </a:rPr>
+              <a:t>Measured on Raspberry Pi 3 (Cortex-A53, 4 threads via Interpreter::</a:t>
+            </a:r>
+            <a:r>
+              <a:rPr lang="en-GB" dirty="0" err="1">
+                <a:solidFill>
+                  <a:schemeClr val="tx1"/>
+                </a:solidFill>
+              </a:rPr>
+              <a:t>SetNumThreads</a:t>
+            </a:r>
+            <a:r>
+              <a:rPr lang="en-GB" dirty="0">
+                <a:solidFill>
+                  <a:schemeClr val="tx1"/>
+                </a:solidFill>
+              </a:rPr>
+              <a:t>(4)</a:t>
             </a:r>
           </a:p>
         </p:txBody>
@@ -8549,7 +9317,7 @@
       </p:grpSpPr>
       <p:sp>
         <p:nvSpPr>
-          <p:cNvPr id="9" name="Rectangle 8">
+          <p:cNvPr id="8" name="Rectangle 7">
             <a:extLst>
               <a:ext uri="{FF2B5EF4-FFF2-40B4-BE49-F238E27FC236}">
                 <a16:creationId xmlns:a16="http://schemas.microsoft.com/office/drawing/2014/main" id="{C33976D1-3430-450C-A978-87A9A6E8E71F}"/>
@@ -8612,7 +9380,7 @@
       </p:sp>
       <p:sp>
         <p:nvSpPr>
-          <p:cNvPr id="11" name="Rectangle 10">
+          <p:cNvPr id="10" name="Rectangle 9">
             <a:extLst>
               <a:ext uri="{FF2B5EF4-FFF2-40B4-BE49-F238E27FC236}">
                 <a16:creationId xmlns:a16="http://schemas.microsoft.com/office/drawing/2014/main" id="{7D6AAC78-7D86-415A-ADC1-2B474807960C}"/>
@@ -8675,7 +9443,7 @@
       </p:sp>
       <p:sp>
         <p:nvSpPr>
-          <p:cNvPr id="13" name="Rectangle 12">
+          <p:cNvPr id="12" name="Rectangle 11">
             <a:extLst>
               <a:ext uri="{FF2B5EF4-FFF2-40B4-BE49-F238E27FC236}">
                 <a16:creationId xmlns:a16="http://schemas.microsoft.com/office/drawing/2014/main" id="{F2A658D9-F185-44F1-BA33-D50320D1D078}"/>
@@ -8739,13 +9507,7 @@
       </p:sp>
       <p:sp>
         <p:nvSpPr>
-          <p:cNvPr id="2" name="Title 1">
-            <a:extLst>
-              <a:ext uri="{FF2B5EF4-FFF2-40B4-BE49-F238E27FC236}">
-                <a16:creationId xmlns:a16="http://schemas.microsoft.com/office/drawing/2014/main" id="{DD3B9F1D-CED0-70D1-AA76-E9EC999B2FEC}"/>
-              </a:ext>
-            </a:extLst>
-          </p:cNvPr>
+          <p:cNvPr id="2" name="Title 1"/>
           <p:cNvSpPr>
             <a:spLocks noGrp="1"/>
           </p:cNvSpPr>
@@ -8763,202 +9525,123 @@
           </a:solidFill>
         </p:spPr>
         <p:txBody>
-          <a:bodyPr vert="horz" lIns="182880" tIns="182880" rIns="182880" bIns="182880" rtlCol="0" anchor="ctr">
+          <a:bodyPr>
             <a:normAutofit/>
           </a:bodyPr>
           <a:lstStyle/>
           <a:p>
-            <a:pPr defTabSz="914400"/>
-            <a:r>
-              <a:rPr lang="en-US" sz="2800" kern="1200" cap="all" spc="200" baseline="0" dirty="0">
-                <a:solidFill>
-                  <a:srgbClr val="262626"/>
-                </a:solidFill>
-                <a:latin typeface="+mj-lt"/>
-                <a:ea typeface="+mj-ea"/>
-                <a:cs typeface="+mj-cs"/>
-              </a:rPr>
-              <a:t>training</a:t>
-            </a:r>
-          </a:p>
-        </p:txBody>
-      </p:sp>
-      <p:sp>
-        <p:nvSpPr>
-          <p:cNvPr id="4" name="TextBox 3">
-            <a:extLst>
-              <a:ext uri="{FF2B5EF4-FFF2-40B4-BE49-F238E27FC236}">
-                <a16:creationId xmlns:a16="http://schemas.microsoft.com/office/drawing/2014/main" id="{E9D301B5-61AB-55EB-2A0F-FFDD3A733A5E}"/>
-              </a:ext>
-            </a:extLst>
-          </p:cNvPr>
-          <p:cNvSpPr txBox="1"/>
-          <p:nvPr/>
+            <a:r>
+              <a:t>Accuracy: training vs real world</a:t>
+            </a:r>
+          </a:p>
+        </p:txBody>
+      </p:sp>
+      <p:sp>
+        <p:nvSpPr>
+          <p:cNvPr id="3" name="Content Placeholder 2"/>
+          <p:cNvSpPr>
+            <a:spLocks noGrp="1"/>
+          </p:cNvSpPr>
+          <p:nvPr>
+            <p:ph idx="1"/>
+          </p:nvPr>
         </p:nvSpPr>
         <p:spPr>
           <a:xfrm>
             <a:off x="1705617" y="2291262"/>
             <a:ext cx="8777226" cy="2879256"/>
           </a:xfrm>
-          <a:prstGeom prst="rect">
-            <a:avLst/>
-          </a:prstGeom>
         </p:spPr>
         <p:txBody>
-          <a:bodyPr vert="horz" lIns="91440" tIns="45720" rIns="91440" bIns="45720" rtlCol="0">
+          <a:bodyPr>
             <a:normAutofit/>
           </a:bodyPr>
           <a:lstStyle/>
           <a:p>
-            <a:pPr indent="-228600" defTabSz="914400">
-              <a:spcBef>
-                <a:spcPts val="1000"/>
-              </a:spcBef>
-              <a:spcAft>
-                <a:spcPts val="600"/>
-              </a:spcAft>
-              <a:buClr>
-                <a:schemeClr val="accent2"/>
-              </a:buClr>
-              <a:buFont typeface="Arial" panose="020B0604020202020204" pitchFamily="34" charset="0"/>
-              <a:buChar char="•"/>
+            <a:pPr>
+              <a:lnSpc>
+                <a:spcPct val="90000"/>
+              </a:lnSpc>
             </a:pPr>
             <a:r>
-              <a:rPr lang="en-US" sz="1600" b="1" dirty="0" err="1"/>
-              <a:t>rps</a:t>
-            </a:r>
-            <a:r>
-              <a:rPr lang="en-US" sz="1600" b="1" dirty="0"/>
-              <a:t>-project/03_train.py</a:t>
-            </a:r>
-          </a:p>
-          <a:p>
-            <a:pPr indent="-228600" defTabSz="914400">
-              <a:spcBef>
-                <a:spcPts val="1000"/>
-              </a:spcBef>
-              <a:spcAft>
-                <a:spcPts val="600"/>
-              </a:spcAft>
-              <a:buClr>
-                <a:schemeClr val="accent2"/>
-              </a:buClr>
-              <a:buFont typeface="Arial" panose="020B0604020202020204" pitchFamily="34" charset="0"/>
-              <a:buChar char="•"/>
+              <a:rPr lang="en-GB" dirty="0">
+                <a:solidFill>
+                  <a:schemeClr val="tx1"/>
+                </a:solidFill>
+              </a:rPr>
+              <a:t>Training run summary (printed at end of 03_train.py):</a:t>
+            </a:r>
+          </a:p>
+          <a:p>
+            <a:pPr lvl="1">
+              <a:lnSpc>
+                <a:spcPct val="90000"/>
+              </a:lnSpc>
             </a:pPr>
             <a:r>
-              <a:rPr lang="en-US" sz="1600" dirty="0"/>
-              <a:t>Train/</a:t>
-            </a:r>
-            <a:r>
-              <a:rPr lang="en-US" sz="1600" dirty="0" err="1"/>
-              <a:t>val</a:t>
-            </a:r>
-            <a:r>
-              <a:rPr lang="en-US" sz="1600" dirty="0"/>
-              <a:t> split 80/20, stratified by class</a:t>
-            </a:r>
-          </a:p>
-          <a:p>
-            <a:pPr indent="-228600" defTabSz="914400">
-              <a:spcBef>
-                <a:spcPts val="1000"/>
-              </a:spcBef>
-              <a:spcAft>
-                <a:spcPts val="600"/>
-              </a:spcAft>
-              <a:buClr>
-                <a:schemeClr val="accent2"/>
-              </a:buClr>
-              <a:buFont typeface="Arial" panose="020B0604020202020204" pitchFamily="34" charset="0"/>
-              <a:buChar char="•"/>
+              <a:rPr lang="en-GB" dirty="0"/>
+              <a:t>Train Loss: 0.5232 | Train Accuracy: 0.7783 </a:t>
+            </a:r>
+          </a:p>
+          <a:p>
+            <a:pPr lvl="1">
+              <a:lnSpc>
+                <a:spcPct val="90000"/>
+              </a:lnSpc>
             </a:pPr>
             <a:r>
-              <a:rPr lang="en-US" sz="1600" dirty="0"/>
-              <a:t>Oversample minority classes to balance training set</a:t>
-            </a:r>
-          </a:p>
-          <a:p>
-            <a:pPr indent="-228600" defTabSz="914400">
-              <a:spcBef>
-                <a:spcPts val="1000"/>
-              </a:spcBef>
-              <a:spcAft>
-                <a:spcPts val="600"/>
-              </a:spcAft>
-              <a:buClr>
-                <a:schemeClr val="accent2"/>
-              </a:buClr>
-              <a:buFont typeface="Arial" panose="020B0604020202020204" pitchFamily="34" charset="0"/>
-              <a:buChar char="•"/>
+              <a:rPr lang="en-GB" dirty="0"/>
+              <a:t>Val Loss: 0.7143 | Val Accuracy: 0.7535 </a:t>
+            </a:r>
+          </a:p>
+          <a:p>
+            <a:pPr>
+              <a:lnSpc>
+                <a:spcPct val="90000"/>
+              </a:lnSpc>
             </a:pPr>
             <a:r>
-              <a:rPr lang="en-US" sz="1600" dirty="0"/>
-              <a:t>Augmentation: random rotation/translation/zoom/brightness/contrast</a:t>
-            </a:r>
-          </a:p>
-          <a:p>
-            <a:pPr indent="-228600" defTabSz="914400">
-              <a:spcBef>
-                <a:spcPts val="1000"/>
-              </a:spcBef>
-              <a:spcAft>
-                <a:spcPts val="600"/>
-              </a:spcAft>
-              <a:buClr>
-                <a:schemeClr val="accent2"/>
-              </a:buClr>
-              <a:buFont typeface="Arial" panose="020B0604020202020204" pitchFamily="34" charset="0"/>
-              <a:buChar char="•"/>
+              <a:rPr lang="en-GB" dirty="0">
+                <a:solidFill>
+                  <a:schemeClr val="tx1"/>
+                </a:solidFill>
+              </a:rPr>
+              <a:t>Stability gate hides occasional single-frame mis-reads from the user</a:t>
+            </a:r>
+          </a:p>
+          <a:p>
+            <a:pPr>
+              <a:lnSpc>
+                <a:spcPct val="90000"/>
+              </a:lnSpc>
             </a:pPr>
             <a:r>
-              <a:rPr lang="en-US" sz="1600" dirty="0"/>
-              <a:t>Optimizer: Adam + cosine LR decay, class weights, early stopping</a:t>
-            </a:r>
-          </a:p>
-          <a:p>
-            <a:pPr indent="-228600" defTabSz="914400">
-              <a:spcBef>
-                <a:spcPts val="1000"/>
-              </a:spcBef>
-              <a:spcAft>
-                <a:spcPts val="600"/>
-              </a:spcAft>
-              <a:buClr>
-                <a:schemeClr val="accent2"/>
-              </a:buClr>
-              <a:buFont typeface="Arial" panose="020B0604020202020204" pitchFamily="34" charset="0"/>
-              <a:buChar char="•"/>
-            </a:pPr>
-            <a:r>
-              <a:rPr lang="en-US" sz="1600" dirty="0"/>
-              <a:t>Export: int8 </a:t>
-            </a:r>
-            <a:r>
-              <a:rPr lang="en-US" sz="1600" dirty="0" err="1"/>
-              <a:t>TFLite</a:t>
-            </a:r>
-            <a:r>
-              <a:rPr lang="en-US" sz="1600" dirty="0"/>
-              <a:t> (uint8 I/O), </a:t>
-            </a:r>
-            <a:r>
-              <a:rPr lang="en-US" sz="1600" dirty="0" err="1"/>
-              <a:t>softmax</a:t>
-            </a:r>
-            <a:r>
-              <a:rPr lang="en-US" sz="1600" dirty="0"/>
-              <a:t> baked in -&gt; 1.3 MB file</a:t>
+              <a:rPr lang="en-GB" dirty="0">
+                <a:solidFill>
+                  <a:schemeClr val="tx1"/>
+                </a:solidFill>
+              </a:rPr>
+              <a:t>For real world testing with group members we checked the logs </a:t>
+            </a:r>
+            <a:br>
+              <a:rPr lang="en-GB" dirty="0">
+                <a:solidFill>
+                  <a:schemeClr val="tx1"/>
+                </a:solidFill>
+              </a:rPr>
+            </a:br>
+            <a:r>
+              <a:rPr lang="en-GB" dirty="0">
+                <a:solidFill>
+                  <a:schemeClr val="tx1"/>
+                </a:solidFill>
+              </a:rPr>
+              <a:t>and it was working good about 70% of the times</a:t>
             </a:r>
           </a:p>
         </p:txBody>
       </p:sp>
     </p:spTree>
-    <p:extLst>
-      <p:ext uri="{BB962C8B-B14F-4D97-AF65-F5344CB8AC3E}">
-        <p14:creationId xmlns:p14="http://schemas.microsoft.com/office/powerpoint/2010/main" val="1659154204"/>
-      </p:ext>
-    </p:extLst>
   </p:cSld>
   <p:clrMapOvr>
     <a:masterClrMapping/>
@@ -9201,229 +9884,306 @@
           </a:solidFill>
         </p:spPr>
         <p:txBody>
-          <a:bodyPr>
+          <a:bodyPr vert="horz" lIns="182880" tIns="182880" rIns="182880" bIns="182880" rtlCol="0" anchor="ctr">
             <a:normAutofit/>
           </a:bodyPr>
           <a:lstStyle/>
           <a:p>
-            <a:r>
-              <a:rPr dirty="0" err="1"/>
-              <a:t>TFLite</a:t>
-            </a:r>
-            <a:r>
-              <a:rPr dirty="0"/>
-              <a:t> size &amp; inferences/sec</a:t>
-            </a:r>
-          </a:p>
-        </p:txBody>
-      </p:sp>
-      <p:sp>
-        <p:nvSpPr>
-          <p:cNvPr id="3" name="Content Placeholder 2"/>
-          <p:cNvSpPr>
-            <a:spLocks noGrp="1"/>
-          </p:cNvSpPr>
-          <p:nvPr>
-            <p:ph idx="1"/>
-          </p:nvPr>
+            <a:pPr defTabSz="914400"/>
+            <a:r>
+              <a:rPr lang="en-US" sz="2800" kern="1200" cap="all" spc="200" baseline="0" dirty="0">
+                <a:solidFill>
+                  <a:srgbClr val="262626"/>
+                </a:solidFill>
+                <a:latin typeface="+mj-lt"/>
+                <a:ea typeface="+mj-ea"/>
+                <a:cs typeface="+mj-cs"/>
+              </a:rPr>
+              <a:t>Dataflow per round</a:t>
+            </a:r>
+          </a:p>
+        </p:txBody>
+      </p:sp>
+      <p:sp>
+        <p:nvSpPr>
+          <p:cNvPr id="3" name="TextBox 2"/>
+          <p:cNvSpPr txBox="1"/>
+          <p:nvPr/>
         </p:nvSpPr>
         <p:spPr>
           <a:xfrm>
-            <a:off x="1705617" y="2291262"/>
-            <a:ext cx="8777226" cy="2879256"/>
+            <a:off x="2162244" y="2034533"/>
+            <a:ext cx="8777226" cy="3318582"/>
           </a:xfrm>
+          <a:prstGeom prst="rect">
+            <a:avLst/>
+          </a:prstGeom>
         </p:spPr>
         <p:txBody>
-          <a:bodyPr>
-            <a:normAutofit/>
+          <a:bodyPr vert="horz" lIns="91440" tIns="45720" rIns="91440" bIns="45720" rtlCol="0">
+            <a:normAutofit lnSpcReduction="10000"/>
           </a:bodyPr>
           <a:lstStyle/>
           <a:p>
-            <a:r>
-              <a:rPr lang="en-GB" dirty="0">
-                <a:solidFill>
-                  <a:schemeClr val="tx1"/>
-                </a:solidFill>
-              </a:rPr>
-              <a:t>Model file: model/</a:t>
-            </a:r>
-            <a:r>
-              <a:rPr lang="en-GB" dirty="0" err="1">
-                <a:solidFill>
-                  <a:schemeClr val="tx1"/>
-                </a:solidFill>
-              </a:rPr>
-              <a:t>model.tflite</a:t>
-            </a:r>
-            <a:r>
-              <a:rPr lang="en-GB" dirty="0">
-                <a:solidFill>
-                  <a:schemeClr val="tx1"/>
-                </a:solidFill>
-              </a:rPr>
-              <a:t> = 1.28 MB / 100 MB budget (~1.3 % used)</a:t>
-            </a:r>
-          </a:p>
-          <a:p>
-            <a:pPr lvl="1"/>
-            <a:r>
-              <a:rPr lang="en-GB" dirty="0">
-                <a:solidFill>
-                  <a:schemeClr val="tx1"/>
-                </a:solidFill>
-              </a:rPr>
-              <a:t>Headroom for adding a second .</a:t>
-            </a:r>
-            <a:r>
-              <a:rPr lang="en-GB" dirty="0" err="1">
-                <a:solidFill>
-                  <a:schemeClr val="tx1"/>
-                </a:solidFill>
-              </a:rPr>
-              <a:t>tflite</a:t>
-            </a:r>
-            <a:r>
-              <a:rPr lang="en-GB" dirty="0">
-                <a:solidFill>
-                  <a:schemeClr val="tx1"/>
-                </a:solidFill>
-              </a:rPr>
-              <a:t> (e.g. an accessory classifier) without changes</a:t>
-            </a:r>
-          </a:p>
-          <a:p>
-            <a:r>
-              <a:rPr lang="en-GB" dirty="0">
-                <a:solidFill>
-                  <a:schemeClr val="tx1"/>
-                </a:solidFill>
-              </a:rPr>
-              <a:t>Per-round perf log printed by the binary:</a:t>
-            </a:r>
-          </a:p>
-          <a:p>
-            <a:pPr lvl="1"/>
-            <a:r>
-              <a:rPr lang="en-GB" dirty="0">
-                <a:solidFill>
-                  <a:schemeClr val="tx1"/>
-                </a:solidFill>
-              </a:rPr>
-              <a:t>[perf] 41 inferences in 1320 </a:t>
-            </a:r>
-            <a:r>
-              <a:rPr lang="en-GB" dirty="0" err="1">
-                <a:solidFill>
-                  <a:schemeClr val="tx1"/>
-                </a:solidFill>
-              </a:rPr>
+            <a:pPr indent="-228600" defTabSz="914400">
+              <a:lnSpc>
+                <a:spcPct val="90000"/>
+              </a:lnSpc>
+              <a:spcBef>
+                <a:spcPts val="1000"/>
+              </a:spcBef>
+              <a:buClr>
+                <a:schemeClr val="accent2"/>
+              </a:buClr>
+              <a:buFont typeface="Arial" panose="020B0604020202020204" pitchFamily="34" charset="0"/>
+              <a:buChar char="•"/>
+            </a:pPr>
+            <a:r>
+              <a:rPr lang="en-US" sz="1600" b="1" dirty="0"/>
+              <a:t>1. Countdown 3 -&gt; 2 -&gt; 1 on LED matrix (</a:t>
+            </a:r>
+            <a:r>
+              <a:rPr lang="en-US" sz="1600" b="1" dirty="0" err="1"/>
+              <a:t>kCountdownStepMs</a:t>
+            </a:r>
+            <a:r>
+              <a:rPr lang="en-US" sz="1600" b="1" dirty="0"/>
+              <a:t> = 700 </a:t>
+            </a:r>
+            <a:r>
+              <a:rPr lang="en-US" sz="1600" b="1" dirty="0" err="1"/>
               <a:t>ms</a:t>
             </a:r>
             <a:r>
-              <a:rPr lang="en-GB" dirty="0">
-                <a:solidFill>
-                  <a:schemeClr val="tx1"/>
-                </a:solidFill>
-              </a:rPr>
-              <a:t> (31.1 inf/s, classify </a:t>
-            </a:r>
-            <a:r>
-              <a:rPr lang="en-GB" dirty="0" err="1">
-                <a:solidFill>
-                  <a:schemeClr val="tx1"/>
-                </a:solidFill>
-              </a:rPr>
-              <a:t>avg</a:t>
-            </a:r>
-            <a:r>
-              <a:rPr lang="en-GB" dirty="0">
-                <a:solidFill>
-                  <a:schemeClr val="tx1"/>
-                </a:solidFill>
-              </a:rPr>
-              <a:t>=22.18 </a:t>
-            </a:r>
-            <a:r>
-              <a:rPr lang="en-GB" dirty="0" err="1">
-                <a:solidFill>
-                  <a:schemeClr val="tx1"/>
-                </a:solidFill>
-              </a:rPr>
+              <a:rPr lang="en-US" sz="1600" b="1" dirty="0"/>
+              <a:t>)</a:t>
+            </a:r>
+          </a:p>
+          <a:p>
+            <a:pPr indent="-228600" defTabSz="914400">
+              <a:lnSpc>
+                <a:spcPct val="90000"/>
+              </a:lnSpc>
+              <a:spcBef>
+                <a:spcPts val="1000"/>
+              </a:spcBef>
+              <a:buClr>
+                <a:schemeClr val="accent2"/>
+              </a:buClr>
+              <a:buFont typeface="Arial" panose="020B0604020202020204" pitchFamily="34" charset="0"/>
+              <a:buChar char="•"/>
+            </a:pPr>
+            <a:r>
+              <a:rPr lang="en-US" sz="1600" dirty="0"/>
+              <a:t>   Player has a known moment to commit to a steady gesture.</a:t>
+            </a:r>
+          </a:p>
+          <a:p>
+            <a:pPr indent="-228600" defTabSz="914400">
+              <a:lnSpc>
+                <a:spcPct val="90000"/>
+              </a:lnSpc>
+              <a:spcBef>
+                <a:spcPts val="1000"/>
+              </a:spcBef>
+              <a:buClr>
+                <a:schemeClr val="accent2"/>
+              </a:buClr>
+              <a:buFont typeface="Arial" panose="020B0604020202020204" pitchFamily="34" charset="0"/>
+              <a:buChar char="•"/>
+            </a:pPr>
+            <a:r>
+              <a:rPr lang="en-US" sz="1600" b="1" dirty="0"/>
+              <a:t>2. Sliding-window read (</a:t>
+            </a:r>
+            <a:r>
+              <a:rPr lang="en-US" sz="1600" b="1" dirty="0" err="1"/>
+              <a:t>kWindowSize</a:t>
+            </a:r>
+            <a:r>
+              <a:rPr lang="en-US" sz="1600" b="1" dirty="0"/>
+              <a:t> = 8, </a:t>
+            </a:r>
+            <a:r>
+              <a:rPr lang="en-US" sz="1600" b="1" dirty="0" err="1"/>
+              <a:t>kMinAgreeing</a:t>
+            </a:r>
+            <a:r>
+              <a:rPr lang="en-US" sz="1600" b="1" dirty="0"/>
+              <a:t> = 5)</a:t>
+            </a:r>
+          </a:p>
+          <a:p>
+            <a:pPr indent="-228600" defTabSz="914400">
+              <a:lnSpc>
+                <a:spcPct val="90000"/>
+              </a:lnSpc>
+              <a:spcBef>
+                <a:spcPts val="1000"/>
+              </a:spcBef>
+              <a:buClr>
+                <a:schemeClr val="accent2"/>
+              </a:buClr>
+              <a:buFont typeface="Arial" panose="020B0604020202020204" pitchFamily="34" charset="0"/>
+              <a:buChar char="•"/>
+            </a:pPr>
+            <a:r>
+              <a:rPr lang="en-US" sz="1600" dirty="0"/>
+              <a:t>   Skip low-confidence frames, accept once 5 of last 8 confident frames agree.</a:t>
+            </a:r>
+          </a:p>
+          <a:p>
+            <a:pPr indent="-228600" defTabSz="914400">
+              <a:lnSpc>
+                <a:spcPct val="90000"/>
+              </a:lnSpc>
+              <a:spcBef>
+                <a:spcPts val="1000"/>
+              </a:spcBef>
+              <a:buClr>
+                <a:schemeClr val="accent2"/>
+              </a:buClr>
+              <a:buFont typeface="Arial" panose="020B0604020202020204" pitchFamily="34" charset="0"/>
+              <a:buChar char="•"/>
+            </a:pPr>
+            <a:r>
+              <a:rPr lang="en-US" sz="1600" b="1" dirty="0"/>
+              <a:t>3. HSV accessory check on the same frames</a:t>
+            </a:r>
+          </a:p>
+          <a:p>
+            <a:pPr indent="-228600" defTabSz="914400">
+              <a:lnSpc>
+                <a:spcPct val="90000"/>
+              </a:lnSpc>
+              <a:spcBef>
+                <a:spcPts val="1000"/>
+              </a:spcBef>
+              <a:buClr>
+                <a:schemeClr val="accent2"/>
+              </a:buClr>
+              <a:buFont typeface="Arial" panose="020B0604020202020204" pitchFamily="34" charset="0"/>
+              <a:buChar char="•"/>
+            </a:pPr>
+            <a:r>
+              <a:rPr lang="en-US" sz="1600" dirty="0"/>
+              <a:t>   Cheap cv::</a:t>
+            </a:r>
+            <a:r>
+              <a:rPr lang="en-US" sz="1600" dirty="0" err="1"/>
+              <a:t>inRange</a:t>
+            </a:r>
+            <a:r>
+              <a:rPr lang="en-US" sz="1600" dirty="0"/>
+              <a:t> + </a:t>
+            </a:r>
+            <a:r>
+              <a:rPr lang="en-US" sz="1600" dirty="0" err="1"/>
+              <a:t>countNonZero</a:t>
+            </a:r>
+            <a:r>
+              <a:rPr lang="en-US" sz="1600" dirty="0"/>
+              <a:t> -&gt; 'present' if count &gt; baseline * 1.25.</a:t>
+            </a:r>
+          </a:p>
+          <a:p>
+            <a:pPr indent="-228600" defTabSz="914400">
+              <a:lnSpc>
+                <a:spcPct val="90000"/>
+              </a:lnSpc>
+              <a:spcBef>
+                <a:spcPts val="1000"/>
+              </a:spcBef>
+              <a:buClr>
+                <a:schemeClr val="accent2"/>
+              </a:buClr>
+              <a:buFont typeface="Arial" panose="020B0604020202020204" pitchFamily="34" charset="0"/>
+              <a:buChar char="•"/>
+            </a:pPr>
+            <a:r>
+              <a:rPr lang="en-US" sz="1600" b="1" dirty="0"/>
+              <a:t>4. Pi picks based on accessory state</a:t>
+            </a:r>
+          </a:p>
+          <a:p>
+            <a:pPr indent="-228600" defTabSz="914400">
+              <a:lnSpc>
+                <a:spcPct val="90000"/>
+              </a:lnSpc>
+              <a:spcBef>
+                <a:spcPts val="1000"/>
+              </a:spcBef>
+              <a:buClr>
+                <a:schemeClr val="accent2"/>
+              </a:buClr>
+              <a:buFont typeface="Arial" panose="020B0604020202020204" pitchFamily="34" charset="0"/>
+              <a:buChar char="•"/>
+            </a:pPr>
+            <a:r>
+              <a:rPr lang="en-US" sz="1600" dirty="0"/>
+              <a:t>   Accessory present -&gt; </a:t>
+            </a:r>
+            <a:r>
+              <a:rPr lang="en-US" sz="1600" dirty="0" err="1"/>
+              <a:t>kBeats</a:t>
+            </a:r>
+            <a:r>
+              <a:rPr lang="en-US" sz="1600" dirty="0"/>
+              <a:t>[player]; absent -&gt; </a:t>
+            </a:r>
+            <a:r>
+              <a:rPr lang="en-US" sz="1600" dirty="0" err="1"/>
+              <a:t>kLosesTo</a:t>
+            </a:r>
+            <a:r>
+              <a:rPr lang="en-US" sz="1600" dirty="0"/>
+              <a:t>[player].</a:t>
+            </a:r>
+          </a:p>
+          <a:p>
+            <a:pPr indent="-228600" defTabSz="914400">
+              <a:lnSpc>
+                <a:spcPct val="90000"/>
+              </a:lnSpc>
+              <a:spcBef>
+                <a:spcPts val="1000"/>
+              </a:spcBef>
+              <a:buClr>
+                <a:schemeClr val="accent2"/>
+              </a:buClr>
+              <a:buFont typeface="Arial" panose="020B0604020202020204" pitchFamily="34" charset="0"/>
+              <a:buChar char="•"/>
+            </a:pPr>
+            <a:r>
+              <a:rPr lang="en-US" sz="1600" b="1" dirty="0"/>
+              <a:t>5. Sense HAT: Pi's symbol (2 s) -&gt; full green (won) / red (lost) / blue (tie) (1.5 s)</a:t>
+            </a:r>
+          </a:p>
+          <a:p>
+            <a:pPr indent="-228600" defTabSz="914400">
+              <a:lnSpc>
+                <a:spcPct val="90000"/>
+              </a:lnSpc>
+              <a:spcBef>
+                <a:spcPts val="1000"/>
+              </a:spcBef>
+              <a:buClr>
+                <a:schemeClr val="accent2"/>
+              </a:buClr>
+              <a:buFont typeface="Arial" panose="020B0604020202020204" pitchFamily="34" charset="0"/>
+              <a:buChar char="•"/>
+            </a:pPr>
+            <a:r>
+              <a:rPr lang="en-US" sz="1600" dirty="0"/>
+              <a:t>   Pause 800 </a:t>
+            </a:r>
+            <a:r>
+              <a:rPr lang="en-US" sz="1600" dirty="0" err="1"/>
               <a:t>ms</a:t>
             </a:r>
             <a:r>
-              <a:rPr lang="en-GB" dirty="0">
-                <a:solidFill>
-                  <a:schemeClr val="tx1"/>
-                </a:solidFill>
-              </a:rPr>
-              <a:t> max=31.40 </a:t>
-            </a:r>
-            <a:r>
-              <a:rPr lang="en-GB" dirty="0" err="1">
-                <a:solidFill>
-                  <a:schemeClr val="tx1"/>
-                </a:solidFill>
-              </a:rPr>
-              <a:t>ms</a:t>
-            </a:r>
-            <a:r>
-              <a:rPr lang="en-GB" dirty="0">
-                <a:solidFill>
-                  <a:schemeClr val="tx1"/>
-                </a:solidFill>
-              </a:rPr>
-              <a:t>)</a:t>
-            </a:r>
-          </a:p>
-          <a:p>
-            <a:pPr lvl="1"/>
-            <a:r>
-              <a:rPr lang="en-GB" dirty="0">
-                <a:solidFill>
-                  <a:schemeClr val="tx1"/>
-                </a:solidFill>
-              </a:rPr>
-              <a:t>Tag flips to [perf-warn] when rate falls below 30 -&gt; trivial to grep in </a:t>
-            </a:r>
-            <a:r>
-              <a:rPr lang="en-GB" dirty="0" err="1">
-                <a:solidFill>
-                  <a:schemeClr val="tx1"/>
-                </a:solidFill>
-              </a:rPr>
-              <a:t>journalctl</a:t>
-            </a:r>
-            <a:endParaRPr lang="en-GB" dirty="0">
-              <a:solidFill>
-                <a:schemeClr val="tx1"/>
-              </a:solidFill>
-            </a:endParaRPr>
-          </a:p>
-          <a:p>
-            <a:r>
-              <a:rPr lang="en-GB" dirty="0">
-                <a:solidFill>
-                  <a:schemeClr val="tx1"/>
-                </a:solidFill>
-              </a:rPr>
-              <a:t>Measured on Raspberry Pi 3 (Cortex-A53, 4 threads via Interpreter::</a:t>
-            </a:r>
-            <a:r>
-              <a:rPr lang="en-GB" dirty="0" err="1">
-                <a:solidFill>
-                  <a:schemeClr val="tx1"/>
-                </a:solidFill>
-              </a:rPr>
-              <a:t>SetNumThreads</a:t>
-            </a:r>
-            <a:r>
-              <a:rPr lang="en-GB" dirty="0">
-                <a:solidFill>
-                  <a:schemeClr val="tx1"/>
-                </a:solidFill>
-              </a:rPr>
-              <a:t>(4)</a:t>
+              <a:rPr lang="en-US" sz="1600" dirty="0"/>
+              <a:t>, then loop back to the countdown.</a:t>
             </a:r>
           </a:p>
         </p:txBody>

--- a/presentation.pptx
+++ b/presentation.pptx
@@ -4714,8 +4714,8 @@
         </p:nvSpPr>
         <p:spPr>
           <a:xfrm>
-            <a:off x="1552353" y="2007219"/>
-            <a:ext cx="2987749" cy="4414845"/>
+            <a:off x="1552353" y="863601"/>
+            <a:ext cx="2987749" cy="5558464"/>
           </a:xfrm>
         </p:spPr>
         <p:txBody>
@@ -4731,7 +4731,18 @@
                   <a:srgbClr val="FFFFFF"/>
                 </a:solidFill>
               </a:rPr>
-              <a:t>Rigged rock-paper-scissors project on Raspberry Pi 3</a:t>
+              <a:t>Rigged rock-paper-scissors project on a</a:t>
+            </a:r>
+          </a:p>
+          <a:p>
+            <a:pPr algn="r"/>
+            <a:r>
+              <a:rPr lang="en-GB" dirty="0">
+                <a:solidFill>
+                  <a:srgbClr val="FFFFFF"/>
+                </a:solidFill>
+              </a:rPr>
+              <a:t>Raspberry PI 3 </a:t>
             </a:r>
           </a:p>
           <a:p>
@@ -4744,6 +4755,30 @@
           </a:p>
           <a:p>
             <a:pPr algn="r"/>
+            <a:endParaRPr lang="en-GB" dirty="0">
+              <a:solidFill>
+                <a:srgbClr val="FFFFFF"/>
+              </a:solidFill>
+            </a:endParaRPr>
+          </a:p>
+          <a:p>
+            <a:pPr algn="r"/>
+            <a:endParaRPr lang="en-GB" dirty="0">
+              <a:solidFill>
+                <a:srgbClr val="FFFFFF"/>
+              </a:solidFill>
+            </a:endParaRPr>
+          </a:p>
+          <a:p>
+            <a:pPr algn="r"/>
+            <a:endParaRPr lang="en-GB" dirty="0">
+              <a:solidFill>
+                <a:srgbClr val="FFFFFF"/>
+              </a:solidFill>
+            </a:endParaRPr>
+          </a:p>
+          <a:p>
+            <a:pPr algn="r"/>
             <a:r>
               <a:rPr lang="en-GB" dirty="0">
                 <a:solidFill>
@@ -4795,6 +4830,42 @@
           </a:p>
         </p:txBody>
       </p:sp>
+      <p:pic>
+        <p:nvPicPr>
+          <p:cNvPr id="16" name="Picture 15" descr="Raspberry Pi">
+            <a:extLst>
+              <a:ext uri="{FF2B5EF4-FFF2-40B4-BE49-F238E27FC236}">
+                <a16:creationId xmlns:a16="http://schemas.microsoft.com/office/drawing/2014/main" id="{61BDB660-9BE6-862F-BE73-D5DAC4791F26}"/>
+              </a:ext>
+            </a:extLst>
+          </p:cNvPr>
+          <p:cNvPicPr>
+            <a:picLocks noChangeAspect="1"/>
+          </p:cNvPicPr>
+          <p:nvPr/>
+        </p:nvPicPr>
+        <p:blipFill>
+          <a:blip r:embed="rId3">
+            <a:extLst>
+              <a:ext uri="{837473B0-CC2E-450A-ABE3-18F120FF3D39}">
+                <a1611:picAttrSrcUrl xmlns:a1611="http://schemas.microsoft.com/office/drawing/2016/11/main" r:id="rId4"/>
+              </a:ext>
+            </a:extLst>
+          </a:blip>
+          <a:stretch>
+            <a:fillRect/>
+          </a:stretch>
+        </p:blipFill>
+        <p:spPr>
+          <a:xfrm>
+            <a:off x="938551" y="1932305"/>
+            <a:ext cx="1858549" cy="2342074"/>
+          </a:xfrm>
+          <a:prstGeom prst="rect">
+            <a:avLst/>
+          </a:prstGeom>
+        </p:spPr>
+      </p:pic>
     </p:spTree>
   </p:cSld>
   <p:clrMapOvr>
@@ -4846,7 +4917,7 @@
         </p:nvSpPr>
         <p:spPr>
           <a:xfrm>
-            <a:off x="1599783" y="4816249"/>
+            <a:off x="1599783" y="4941671"/>
             <a:ext cx="8989258" cy="1645759"/>
           </a:xfrm>
         </p:spPr>
@@ -4866,10 +4937,10 @@
       </p:sp>
       <p:pic>
         <p:nvPicPr>
-          <p:cNvPr id="5" name="Picture 4" descr="A screenshot of a computer program&#10;&#10;AI-generated content may be incorrect.">
+          <p:cNvPr id="3" name="Picture 2">
             <a:extLst>
               <a:ext uri="{FF2B5EF4-FFF2-40B4-BE49-F238E27FC236}">
-                <a16:creationId xmlns:a16="http://schemas.microsoft.com/office/drawing/2014/main" id="{A7364D52-A79E-55DA-9FB6-BF2ECA8C5008}"/>
+                <a16:creationId xmlns:a16="http://schemas.microsoft.com/office/drawing/2014/main" id="{8C8B21BE-286B-1C51-552B-46C835673903}"/>
               </a:ext>
             </a:extLst>
           </p:cNvPr>
@@ -4886,8 +4957,8 @@
         </p:blipFill>
         <p:spPr>
           <a:xfrm>
-            <a:off x="1599783" y="262239"/>
-            <a:ext cx="8989258" cy="4219447"/>
+            <a:off x="1599783" y="60408"/>
+            <a:ext cx="8989258" cy="4583089"/>
           </a:xfrm>
           <a:prstGeom prst="rect">
             <a:avLst/>
@@ -5171,7 +5242,7 @@
         </p:spPr>
         <p:txBody>
           <a:bodyPr>
-            <a:normAutofit/>
+            <a:normAutofit fontScale="92500" lnSpcReduction="20000"/>
           </a:bodyPr>
           <a:lstStyle/>
           <a:p>
@@ -5186,7 +5257,7 @@
                   <a:schemeClr val="tx1"/>
                 </a:solidFill>
               </a:rPr>
-              <a:t>Goal: ONLY the chosen accessory enables wins; other coloured items must not trigger it</a:t>
+              <a:t>Goal: ONLY the chosen pink accessory enables wins</a:t>
             </a:r>
           </a:p>
           <a:p>
@@ -5201,129 +5272,7 @@
                   <a:schemeClr val="tx1"/>
                 </a:solidFill>
               </a:rPr>
-              <a:t>Approach: HSV mask + per-startup baseline (no second neural network needed)</a:t>
-            </a:r>
-          </a:p>
-          <a:p>
-            <a:pPr lvl="1">
-              <a:lnSpc>
-                <a:spcPct val="90000"/>
-              </a:lnSpc>
-            </a:pPr>
-            <a:r>
-              <a:rPr lang="en-GB" dirty="0">
-                <a:solidFill>
-                  <a:schemeClr val="tx1"/>
-                </a:solidFill>
-              </a:rPr>
-              <a:t>cv::</a:t>
-            </a:r>
-            <a:r>
-              <a:rPr lang="en-GB" dirty="0" err="1">
-                <a:solidFill>
-                  <a:schemeClr val="tx1"/>
-                </a:solidFill>
-              </a:rPr>
-              <a:t>cvtColor</a:t>
-            </a:r>
-            <a:r>
-              <a:rPr lang="en-GB" dirty="0">
-                <a:solidFill>
-                  <a:schemeClr val="tx1"/>
-                </a:solidFill>
-              </a:rPr>
-              <a:t>(RGB-&gt;HSV) -&gt; cv::</a:t>
-            </a:r>
-            <a:r>
-              <a:rPr lang="en-GB" dirty="0" err="1">
-                <a:solidFill>
-                  <a:schemeClr val="tx1"/>
-                </a:solidFill>
-              </a:rPr>
-              <a:t>inRange</a:t>
-            </a:r>
-            <a:r>
-              <a:rPr lang="en-GB" dirty="0">
-                <a:solidFill>
-                  <a:schemeClr val="tx1"/>
-                </a:solidFill>
-              </a:rPr>
-              <a:t>(hue/sat/</a:t>
-            </a:r>
-            <a:r>
-              <a:rPr lang="en-GB" dirty="0" err="1">
-                <a:solidFill>
-                  <a:schemeClr val="tx1"/>
-                </a:solidFill>
-              </a:rPr>
-              <a:t>val</a:t>
-            </a:r>
-            <a:r>
-              <a:rPr lang="en-GB" dirty="0">
-                <a:solidFill>
-                  <a:schemeClr val="tx1"/>
-                </a:solidFill>
-              </a:rPr>
-              <a:t> bounds) -&gt; cv::</a:t>
-            </a:r>
-            <a:r>
-              <a:rPr lang="en-GB" dirty="0" err="1">
-                <a:solidFill>
-                  <a:schemeClr val="tx1"/>
-                </a:solidFill>
-              </a:rPr>
-              <a:t>countNonZero</a:t>
-            </a:r>
-            <a:endParaRPr lang="en-GB" dirty="0">
-              <a:solidFill>
-                <a:schemeClr val="tx1"/>
-              </a:solidFill>
-            </a:endParaRPr>
-          </a:p>
-          <a:p>
-            <a:pPr lvl="1">
-              <a:lnSpc>
-                <a:spcPct val="90000"/>
-              </a:lnSpc>
-            </a:pPr>
-            <a:r>
-              <a:rPr lang="en-GB" dirty="0">
-                <a:solidFill>
-                  <a:schemeClr val="tx1"/>
-                </a:solidFill>
-              </a:rPr>
-              <a:t>Calibrate baseline by averaging 60 empty-scene frames at startup</a:t>
-            </a:r>
-          </a:p>
-          <a:p>
-            <a:pPr lvl="1">
-              <a:lnSpc>
-                <a:spcPct val="90000"/>
-              </a:lnSpc>
-            </a:pPr>
-            <a:r>
-              <a:rPr lang="en-GB" dirty="0">
-                <a:solidFill>
-                  <a:schemeClr val="tx1"/>
-                </a:solidFill>
-              </a:rPr>
-              <a:t>'Present' if live count &gt; baseline * </a:t>
-            </a:r>
-            <a:r>
-              <a:rPr lang="en-GB" dirty="0" err="1">
-                <a:solidFill>
-                  <a:schemeClr val="tx1"/>
-                </a:solidFill>
-              </a:rPr>
-              <a:t>threshold_multiplier</a:t>
-            </a:r>
-            <a:r>
-              <a:rPr lang="en-GB" dirty="0">
-                <a:solidFill>
-                  <a:schemeClr val="tx1"/>
-                </a:solidFill>
-              </a:rPr>
-              <a:t> (default 1.25)</a:t>
+              <a:t>Approach: HSV mask + per-startup baseline + per-round majority vote (no second neural network needed)</a:t>
             </a:r>
           </a:p>
           <a:p>
@@ -5333,12 +5282,20 @@
               </a:lnSpc>
             </a:pPr>
             <a:r>
+              <a:rPr lang="en-GB" dirty="0">
+                <a:solidFill>
+                  <a:schemeClr val="tx1"/>
+                </a:solidFill>
+              </a:rPr>
+              <a:t>Per-frame trigger: 'present' if count &gt; max(baseline * threshold_multiplier, </a:t>
+            </a:r>
+            <a:r>
               <a:rPr lang="en-GB" dirty="0" err="1">
                 <a:solidFill>
                   <a:schemeClr val="tx1"/>
                 </a:solidFill>
               </a:rPr>
-              <a:t>Tunable</a:t>
+              <a:t>min_threshold</a:t>
             </a:r>
             <a:r>
               <a:rPr lang="en-GB" dirty="0">
@@ -5346,38 +5303,45 @@
                   <a:schemeClr val="tx1"/>
                 </a:solidFill>
               </a:rPr>
-              <a:t> without rebuild via </a:t>
-            </a:r>
-            <a:r>
-              <a:rPr lang="en-GB" dirty="0" err="1">
-                <a:solidFill>
-                  <a:schemeClr val="tx1"/>
-                </a:solidFill>
-              </a:rPr>
-              <a:t>accessory.conf</a:t>
-            </a:r>
-            <a:r>
-              <a:rPr lang="en-GB" dirty="0">
-                <a:solidFill>
-                  <a:schemeClr val="tx1"/>
-                </a:solidFill>
-              </a:rPr>
-              <a:t>:</a:t>
-            </a:r>
-          </a:p>
-          <a:p>
-            <a:pPr lvl="1">
+              <a:t>)</a:t>
+            </a:r>
+          </a:p>
+          <a:p>
+            <a:pPr>
               <a:lnSpc>
                 <a:spcPct val="90000"/>
               </a:lnSpc>
             </a:pPr>
             <a:r>
+              <a:rPr lang="en-GB" dirty="0">
+                <a:solidFill>
+                  <a:schemeClr val="tx1"/>
+                </a:solidFill>
+              </a:rPr>
+              <a:t>Per-round smoothing: the gesture window also majority-votes the accessory bool, so one glitched frame cannot flip the rigging</a:t>
+            </a:r>
+          </a:p>
+          <a:p>
+            <a:pPr>
+              <a:lnSpc>
+                <a:spcPct val="90000"/>
+              </a:lnSpc>
+            </a:pPr>
+            <a:r>
+              <a:rPr lang="en-GB" dirty="0">
+                <a:solidFill>
+                  <a:schemeClr val="tx1"/>
+                </a:solidFill>
+              </a:rPr>
+              <a:t>Tunable without rebuild via </a:t>
+            </a:r>
+            <a:r>
               <a:rPr lang="en-GB" dirty="0" err="1">
                 <a:solidFill>
                   <a:schemeClr val="tx1"/>
                 </a:solidFill>
               </a:rPr>
-              <a:t>hue_min</a:t>
+              <a:t>accessory.conf</a:t>
             </a:r>
             <a:r>
               <a:rPr lang="en-GB" dirty="0">
@@ -5385,69 +5349,23 @@
                   <a:schemeClr val="tx1"/>
                 </a:solidFill>
               </a:rPr>
-              <a:t>/max, </a:t>
-            </a:r>
-            <a:r>
-              <a:rPr lang="en-GB" dirty="0" err="1">
+              <a:t>:</a:t>
+            </a:r>
+          </a:p>
+          <a:p>
+            <a:pPr>
+              <a:lnSpc>
+                <a:spcPct val="90000"/>
+              </a:lnSpc>
+            </a:pPr>
+            <a:r>
+              <a:rPr lang="en-GB" dirty="0">
                 <a:solidFill>
                   <a:schemeClr val="tx1"/>
                 </a:solidFill>
               </a:rPr>
-              <a:t>sat_min</a:t>
-            </a:r>
-            <a:r>
-              <a:rPr lang="en-GB" dirty="0">
-                <a:solidFill>
-                  <a:schemeClr val="tx1"/>
-                </a:solidFill>
-              </a:rPr>
-              <a:t>/max, </a:t>
-            </a:r>
-            <a:r>
-              <a:rPr lang="en-GB" dirty="0" err="1">
-                <a:solidFill>
-                  <a:schemeClr val="tx1"/>
-                </a:solidFill>
-              </a:rPr>
-              <a:t>val_min</a:t>
-            </a:r>
-            <a:r>
-              <a:rPr lang="en-GB" dirty="0">
-                <a:solidFill>
-                  <a:schemeClr val="tx1"/>
-                </a:solidFill>
-              </a:rPr>
-              <a:t>/max, </a:t>
-            </a:r>
-            <a:r>
-              <a:rPr lang="en-GB" dirty="0" err="1">
-                <a:solidFill>
-                  <a:schemeClr val="tx1"/>
-                </a:solidFill>
-              </a:rPr>
-              <a:t>calibration_frames</a:t>
-            </a:r>
-            <a:r>
-              <a:rPr lang="en-GB" dirty="0">
-                <a:solidFill>
-                  <a:schemeClr val="tx1"/>
-                </a:solidFill>
-              </a:rPr>
-              <a:t>, </a:t>
-            </a:r>
-            <a:r>
-              <a:rPr lang="en-GB" dirty="0" err="1">
-                <a:solidFill>
-                  <a:schemeClr val="tx1"/>
-                </a:solidFill>
-              </a:rPr>
-              <a:t>threshold_multiplier</a:t>
-            </a:r>
-            <a:endParaRPr lang="en-GB" dirty="0">
-              <a:solidFill>
-                <a:schemeClr val="tx1"/>
-              </a:solidFill>
-            </a:endParaRPr>
+              <a:t>Current values (pink wristband): H 120-175, S 35-255, V 31-183, 60 frames, multiplier 10, floor 500 px</a:t>
+            </a:r>
           </a:p>
           <a:p>
             <a:pPr>
@@ -6260,7 +6178,7 @@
           <a:p>
             <a:r>
               <a:rPr dirty="0"/>
-              <a:t>Live demo</a:t>
+              <a:t>demo</a:t>
             </a:r>
           </a:p>
         </p:txBody>
@@ -9921,7 +9839,7 @@
         </p:spPr>
         <p:txBody>
           <a:bodyPr vert="horz" lIns="91440" tIns="45720" rIns="91440" bIns="45720" rtlCol="0">
-            <a:normAutofit lnSpcReduction="10000"/>
+            <a:normAutofit fontScale="92500" lnSpcReduction="20000"/>
           </a:bodyPr>
           <a:lstStyle/>
           <a:p>
@@ -10052,7 +9970,7 @@
             </a:r>
           </a:p>
           <a:p>
-            <a:pPr indent="-228600" defTabSz="914400">
+            <a:pPr lvl="1" indent="-228600" defTabSz="914400">
               <a:lnSpc>
                 <a:spcPct val="90000"/>
               </a:lnSpc>
@@ -10067,7 +9985,7 @@
             </a:pPr>
             <a:r>
               <a:rPr lang="en-US" sz="1600" dirty="0"/>
-              <a:t>   Cheap cv::</a:t>
+              <a:t>Cheap cv::</a:t>
             </a:r>
             <a:r>
               <a:rPr lang="en-US" sz="1600" dirty="0" err="1"/>
@@ -10083,7 +10001,26 @@
             </a:r>
             <a:r>
               <a:rPr lang="en-US" sz="1600" dirty="0"/>
-              <a:t> -&gt; 'present' if count &gt; baseline * 1.25.</a:t>
+              <a:t> -&gt; 'present' if count &gt; baseline * 10.</a:t>
+            </a:r>
+          </a:p>
+          <a:p>
+            <a:pPr lvl="1" indent="-228600" defTabSz="914400">
+              <a:lnSpc>
+                <a:spcPct val="90000"/>
+              </a:lnSpc>
+              <a:spcBef>
+                <a:spcPts val="1000"/>
+              </a:spcBef>
+              <a:buClr>
+                <a:schemeClr val="accent2"/>
+              </a:buClr>
+              <a:buFont typeface="Arial" panose="020B0604020202020204" pitchFamily="34" charset="0"/>
+              <a:buChar char="•"/>
+            </a:pPr>
+            <a:r>
+              <a:rPr lang="en-US" sz="1600" dirty="0"/>
+              <a:t>as well as a floor of pixels found at 500</a:t>
             </a:r>
           </a:p>
           <a:p>
